--- a/PitchIQ_SilverOak_Presentation.pptx
+++ b/PitchIQ_SilverOak_Presentation.pptx
@@ -3307,8 +3307,8 @@
           <p:nvPr/>
         </p:nvGraphicFramePr>
         <p:xfrm>
-          <a:off x="1645920" y="3657600"/>
-          <a:ext cx="8899855" cy="2103120"/>
+          <a:off x="1280160" y="3474720"/>
+          <a:ext cx="9630460" cy="868680"/>
         </p:xfrm>
         <a:graphic>
           <a:graphicData uri="http://schemas.openxmlformats.org/drawingml/2006/table">
@@ -3317,17 +3317,19 @@
                 <a:tableStyleId>{5C22544A-7EE6-4342-B048-85BDC9FD1C3A}</a:tableStyleId>
               </a:tblPr>
               <a:tblGrid>
-                <a:gridCol w="2926080"/>
-                <a:gridCol w="5973775"/>
+                <a:gridCol w="1828800"/>
+                <a:gridCol w="2986430"/>
+                <a:gridCol w="1828800"/>
+                <a:gridCol w="2986430"/>
               </a:tblGrid>
-              <a:tr h="420624">
+              <a:tr h="434340">
                 <a:tc>
                   <a:txBody>
-                    <a:bodyPr/>
+                    <a:bodyPr tIns="54864" bIns="54864"/>
                     <a:lstStyle/>
                     <a:p>
                       <a:pPr>
-                        <a:defRPr sz="1200" b="1">
+                        <a:defRPr sz="1100" b="1">
                           <a:solidFill>
                             <a:srgbClr val="801818"/>
                           </a:solidFill>
@@ -3341,17 +3343,17 @@
                   </a:txBody>
                   <a:tcPr>
                     <a:solidFill>
-                      <a:srgbClr val="F1F5F9"/>
+                      <a:srgbClr val="F8FAFC"/>
                     </a:solidFill>
                   </a:tcPr>
                 </a:tc>
                 <a:tc>
                   <a:txBody>
-                    <a:bodyPr/>
+                    <a:bodyPr tIns="54864" bIns="54864"/>
                     <a:lstStyle/>
                     <a:p>
                       <a:pPr>
-                        <a:defRPr sz="1200">
+                        <a:defRPr sz="1100" b="0">
                           <a:solidFill>
                             <a:srgbClr val="1E293B"/>
                           </a:solidFill>
@@ -3365,19 +3367,17 @@
                   </a:txBody>
                   <a:tcPr>
                     <a:solidFill>
-                      <a:srgbClr val="F1F5F9"/>
+                      <a:srgbClr val="FFFFFF"/>
                     </a:solidFill>
                   </a:tcPr>
                 </a:tc>
-              </a:tr>
-              <a:tr h="420624">
                 <a:tc>
                   <a:txBody>
-                    <a:bodyPr/>
+                    <a:bodyPr tIns="54864" bIns="54864"/>
                     <a:lstStyle/>
                     <a:p>
                       <a:pPr>
-                        <a:defRPr sz="1200" b="1">
+                        <a:defRPr sz="1100" b="1">
                           <a:solidFill>
                             <a:srgbClr val="801818"/>
                           </a:solidFill>
@@ -3385,123 +3385,23 @@
                         </a:defRPr>
                       </a:pPr>
                       <a:r>
-                        <a:t>Enrollment No</a:t>
+                        <a:t>Branch</a:t>
                       </a:r>
                     </a:p>
                   </a:txBody>
                   <a:tcPr>
                     <a:solidFill>
-                      <a:srgbClr val="FFFFFF"/>
+                      <a:srgbClr val="F8FAFC"/>
                     </a:solidFill>
                   </a:tcPr>
                 </a:tc>
                 <a:tc>
                   <a:txBody>
-                    <a:bodyPr/>
+                    <a:bodyPr tIns="54864" bIns="54864"/>
                     <a:lstStyle/>
                     <a:p>
                       <a:pPr>
-                        <a:defRPr sz="1200">
-                          <a:solidFill>
-                            <a:srgbClr val="1E293B"/>
-                          </a:solidFill>
-                          <a:latin typeface="Arial"/>
-                        </a:defRPr>
-                      </a:pPr>
-                      <a:r>
-                        <a:t>[Your Enrollment Number]</a:t>
-                      </a:r>
-                    </a:p>
-                  </a:txBody>
-                  <a:tcPr>
-                    <a:solidFill>
-                      <a:srgbClr val="FFFFFF"/>
-                    </a:solidFill>
-                  </a:tcPr>
-                </a:tc>
-              </a:tr>
-              <a:tr h="420624">
-                <a:tc>
-                  <a:txBody>
-                    <a:bodyPr/>
-                    <a:lstStyle/>
-                    <a:p>
-                      <a:pPr>
-                        <a:defRPr sz="1200" b="1">
-                          <a:solidFill>
-                            <a:srgbClr val="801818"/>
-                          </a:solidFill>
-                          <a:latin typeface="Arial"/>
-                        </a:defRPr>
-                      </a:pPr>
-                      <a:r>
-                        <a:t>Student Name</a:t>
-                      </a:r>
-                    </a:p>
-                  </a:txBody>
-                  <a:tcPr>
-                    <a:solidFill>
-                      <a:srgbClr val="F1F5F9"/>
-                    </a:solidFill>
-                  </a:tcPr>
-                </a:tc>
-                <a:tc>
-                  <a:txBody>
-                    <a:bodyPr/>
-                    <a:lstStyle/>
-                    <a:p>
-                      <a:pPr>
-                        <a:defRPr sz="1200">
-                          <a:solidFill>
-                            <a:srgbClr val="1E293B"/>
-                          </a:solidFill>
-                          <a:latin typeface="Arial"/>
-                        </a:defRPr>
-                      </a:pPr>
-                      <a:r>
-                        <a:t>Parth Bavaliya</a:t>
-                      </a:r>
-                    </a:p>
-                  </a:txBody>
-                  <a:tcPr>
-                    <a:solidFill>
-                      <a:srgbClr val="F1F5F9"/>
-                    </a:solidFill>
-                  </a:tcPr>
-                </a:tc>
-              </a:tr>
-              <a:tr h="420624">
-                <a:tc>
-                  <a:txBody>
-                    <a:bodyPr/>
-                    <a:lstStyle/>
-                    <a:p>
-                      <a:pPr>
-                        <a:defRPr sz="1200" b="1">
-                          <a:solidFill>
-                            <a:srgbClr val="801818"/>
-                          </a:solidFill>
-                          <a:latin typeface="Arial"/>
-                        </a:defRPr>
-                      </a:pPr>
-                      <a:r>
-                        <a:t>Branch / Department</a:t>
-                      </a:r>
-                    </a:p>
-                  </a:txBody>
-                  <a:tcPr>
-                    <a:solidFill>
-                      <a:srgbClr val="FFFFFF"/>
-                    </a:solidFill>
-                  </a:tcPr>
-                </a:tc>
-                <a:tc>
-                  <a:txBody>
-                    <a:bodyPr/>
-                    <a:lstStyle/>
-                    <a:p>
-                      <a:pPr>
-                        <a:defRPr sz="1200">
+                        <a:defRPr sz="1100" b="0">
                           <a:solidFill>
                             <a:srgbClr val="1E293B"/>
                           </a:solidFill>
@@ -3520,14 +3420,14 @@
                   </a:tcPr>
                 </a:tc>
               </a:tr>
-              <a:tr h="420624">
+              <a:tr h="434340">
                 <a:tc>
                   <a:txBody>
-                    <a:bodyPr/>
+                    <a:bodyPr tIns="54864" bIns="54864"/>
                     <a:lstStyle/>
                     <a:p>
                       <a:pPr>
-                        <a:defRPr sz="1200" b="1">
+                        <a:defRPr sz="1100" b="1">
                           <a:solidFill>
                             <a:srgbClr val="801818"/>
                           </a:solidFill>
@@ -3535,7 +3435,230 @@
                         </a:defRPr>
                       </a:pPr>
                       <a:r>
-                        <a:t>Project Guide Name</a:t>
+                        <a:t>Project Guide</a:t>
+                      </a:r>
+                    </a:p>
+                  </a:txBody>
+                  <a:tcPr>
+                    <a:solidFill>
+                      <a:srgbClr val="F8FAFC"/>
+                    </a:solidFill>
+                  </a:tcPr>
+                </a:tc>
+                <a:tc>
+                  <a:txBody>
+                    <a:bodyPr tIns="54864" bIns="54864"/>
+                    <a:lstStyle/>
+                    <a:p>
+                      <a:pPr>
+                        <a:defRPr sz="1100" b="0">
+                          <a:solidFill>
+                            <a:srgbClr val="1E293B"/>
+                          </a:solidFill>
+                          <a:latin typeface="Arial"/>
+                        </a:defRPr>
+                      </a:pPr>
+                      <a:r>
+                        <a:t>[Prof. Guide Name]</a:t>
+                      </a:r>
+                    </a:p>
+                  </a:txBody>
+                  <a:tcPr>
+                    <a:solidFill>
+                      <a:srgbClr val="FFFFFF"/>
+                    </a:solidFill>
+                  </a:tcPr>
+                </a:tc>
+                <a:tc>
+                  <a:txBody>
+                    <a:bodyPr tIns="54864" bIns="54864"/>
+                    <a:lstStyle/>
+                    <a:p>
+                      <a:pPr>
+                        <a:defRPr sz="1100" b="1">
+                          <a:solidFill>
+                            <a:srgbClr val="801818"/>
+                          </a:solidFill>
+                          <a:latin typeface="Arial"/>
+                        </a:defRPr>
+                      </a:pPr>
+                      <a:r>
+                        <a:t>Department</a:t>
+                      </a:r>
+                    </a:p>
+                  </a:txBody>
+                  <a:tcPr>
+                    <a:solidFill>
+                      <a:srgbClr val="F8FAFC"/>
+                    </a:solidFill>
+                  </a:tcPr>
+                </a:tc>
+                <a:tc>
+                  <a:txBody>
+                    <a:bodyPr tIns="54864" bIns="54864"/>
+                    <a:lstStyle/>
+                    <a:p>
+                      <a:pPr>
+                        <a:defRPr sz="1100" b="0">
+                          <a:solidFill>
+                            <a:srgbClr val="1E293B"/>
+                          </a:solidFill>
+                          <a:latin typeface="Arial"/>
+                        </a:defRPr>
+                      </a:pPr>
+                      <a:r>
+                        <a:t>Computer Engineering, SOU</a:t>
+                      </a:r>
+                    </a:p>
+                  </a:txBody>
+                  <a:tcPr>
+                    <a:solidFill>
+                      <a:srgbClr val="FFFFFF"/>
+                    </a:solidFill>
+                  </a:tcPr>
+                </a:tc>
+              </a:tr>
+            </a:tbl>
+          </a:graphicData>
+        </a:graphic>
+      </p:graphicFrame>
+      <p:graphicFrame>
+        <p:nvGraphicFramePr>
+          <p:cNvPr id="7" name="Table 6"/>
+          <p:cNvGraphicFramePr>
+            <a:graphicFrameLocks noGrp="1"/>
+          </p:cNvGraphicFramePr>
+          <p:nvPr/>
+        </p:nvGraphicFramePr>
+        <p:xfrm>
+          <a:off x="1280160" y="4480560"/>
+          <a:ext cx="9631375" cy="1645920"/>
+        </p:xfrm>
+        <a:graphic>
+          <a:graphicData uri="http://schemas.openxmlformats.org/drawingml/2006/table">
+            <a:tbl>
+              <a:tblPr firstRow="1" bandRow="1">
+                <a:tableStyleId>{5C22544A-7EE6-4342-B048-85BDC9FD1C3A}</a:tableStyleId>
+              </a:tblPr>
+              <a:tblGrid>
+                <a:gridCol w="1097280"/>
+                <a:gridCol w="3962095"/>
+                <a:gridCol w="4572000"/>
+              </a:tblGrid>
+              <a:tr h="411480">
+                <a:tc>
+                  <a:txBody>
+                    <a:bodyPr/>
+                    <a:lstStyle/>
+                    <a:p>
+                      <a:pPr algn="ctr">
+                        <a:defRPr sz="1100" b="1">
+                          <a:solidFill>
+                            <a:srgbClr val="FFFFFF"/>
+                          </a:solidFill>
+                          <a:latin typeface="Arial"/>
+                        </a:defRPr>
+                      </a:pPr>
+                      <a:r>
+                        <a:t>Sr. No.</a:t>
+                      </a:r>
+                    </a:p>
+                  </a:txBody>
+                  <a:tcPr>
+                    <a:solidFill>
+                      <a:srgbClr val="801818"/>
+                    </a:solidFill>
+                  </a:tcPr>
+                </a:tc>
+                <a:tc>
+                  <a:txBody>
+                    <a:bodyPr/>
+                    <a:lstStyle/>
+                    <a:p>
+                      <a:pPr algn="ctr">
+                        <a:defRPr sz="1100" b="1">
+                          <a:solidFill>
+                            <a:srgbClr val="FFFFFF"/>
+                          </a:solidFill>
+                          <a:latin typeface="Arial"/>
+                        </a:defRPr>
+                      </a:pPr>
+                      <a:r>
+                        <a:t>Enrollment Number</a:t>
+                      </a:r>
+                    </a:p>
+                  </a:txBody>
+                  <a:tcPr>
+                    <a:solidFill>
+                      <a:srgbClr val="801818"/>
+                    </a:solidFill>
+                  </a:tcPr>
+                </a:tc>
+                <a:tc>
+                  <a:txBody>
+                    <a:bodyPr/>
+                    <a:lstStyle/>
+                    <a:p>
+                      <a:pPr>
+                        <a:defRPr sz="1100" b="1">
+                          <a:solidFill>
+                            <a:srgbClr val="FFFFFF"/>
+                          </a:solidFill>
+                          <a:latin typeface="Arial"/>
+                        </a:defRPr>
+                      </a:pPr>
+                      <a:r>
+                        <a:t>Student Name</a:t>
+                      </a:r>
+                    </a:p>
+                  </a:txBody>
+                  <a:tcPr>
+                    <a:solidFill>
+                      <a:srgbClr val="801818"/>
+                    </a:solidFill>
+                  </a:tcPr>
+                </a:tc>
+              </a:tr>
+              <a:tr h="411480">
+                <a:tc>
+                  <a:txBody>
+                    <a:bodyPr/>
+                    <a:lstStyle/>
+                    <a:p>
+                      <a:pPr algn="ctr">
+                        <a:defRPr sz="1100">
+                          <a:solidFill>
+                            <a:srgbClr val="1E293B"/>
+                          </a:solidFill>
+                          <a:latin typeface="Arial"/>
+                        </a:defRPr>
+                      </a:pPr>
+                      <a:r>
+                        <a:t>01</a:t>
+                      </a:r>
+                    </a:p>
+                  </a:txBody>
+                  <a:tcPr>
+                    <a:solidFill>
+                      <a:srgbClr val="F1F5F9"/>
+                    </a:solidFill>
+                  </a:tcPr>
+                </a:tc>
+                <a:tc>
+                  <a:txBody>
+                    <a:bodyPr/>
+                    <a:lstStyle/>
+                    <a:p>
+                      <a:pPr algn="ctr">
+                        <a:defRPr sz="1100">
+                          <a:solidFill>
+                            <a:srgbClr val="1E293B"/>
+                          </a:solidFill>
+                          <a:latin typeface="Arial"/>
+                        </a:defRPr>
+                      </a:pPr>
+                      <a:r>
+                        <a:t>2402031830036</a:t>
                       </a:r>
                     </a:p>
                   </a:txBody>
@@ -3551,7 +3674,7 @@
                     <a:lstStyle/>
                     <a:p>
                       <a:pPr>
-                        <a:defRPr sz="1200">
+                        <a:defRPr sz="1100" b="1">
                           <a:solidFill>
                             <a:srgbClr val="1E293B"/>
                           </a:solidFill>
@@ -3559,7 +3682,155 @@
                         </a:defRPr>
                       </a:pPr>
                       <a:r>
-                        <a:t>[Prof. Guide Name] / Internal Reviewer</a:t>
+                        <a:t>Parth Bavalliya</a:t>
+                      </a:r>
+                    </a:p>
+                  </a:txBody>
+                  <a:tcPr>
+                    <a:solidFill>
+                      <a:srgbClr val="F1F5F9"/>
+                    </a:solidFill>
+                  </a:tcPr>
+                </a:tc>
+              </a:tr>
+              <a:tr h="411480">
+                <a:tc>
+                  <a:txBody>
+                    <a:bodyPr/>
+                    <a:lstStyle/>
+                    <a:p>
+                      <a:pPr algn="ctr">
+                        <a:defRPr sz="1100">
+                          <a:solidFill>
+                            <a:srgbClr val="1E293B"/>
+                          </a:solidFill>
+                          <a:latin typeface="Arial"/>
+                        </a:defRPr>
+                      </a:pPr>
+                      <a:r>
+                        <a:t>02</a:t>
+                      </a:r>
+                    </a:p>
+                  </a:txBody>
+                  <a:tcPr>
+                    <a:solidFill>
+                      <a:srgbClr val="FFFFFF"/>
+                    </a:solidFill>
+                  </a:tcPr>
+                </a:tc>
+                <a:tc>
+                  <a:txBody>
+                    <a:bodyPr/>
+                    <a:lstStyle/>
+                    <a:p>
+                      <a:pPr algn="ctr">
+                        <a:defRPr sz="1100">
+                          <a:solidFill>
+                            <a:srgbClr val="1E293B"/>
+                          </a:solidFill>
+                          <a:latin typeface="Arial"/>
+                        </a:defRPr>
+                      </a:pPr>
+                      <a:r>
+                        <a:t>2402031830026</a:t>
+                      </a:r>
+                    </a:p>
+                  </a:txBody>
+                  <a:tcPr>
+                    <a:solidFill>
+                      <a:srgbClr val="FFFFFF"/>
+                    </a:solidFill>
+                  </a:tcPr>
+                </a:tc>
+                <a:tc>
+                  <a:txBody>
+                    <a:bodyPr/>
+                    <a:lstStyle/>
+                    <a:p>
+                      <a:pPr>
+                        <a:defRPr sz="1100" b="1">
+                          <a:solidFill>
+                            <a:srgbClr val="1E293B"/>
+                          </a:solidFill>
+                          <a:latin typeface="Arial"/>
+                        </a:defRPr>
+                      </a:pPr>
+                      <a:r>
+                        <a:t>Harsh Varatiya</a:t>
+                      </a:r>
+                    </a:p>
+                  </a:txBody>
+                  <a:tcPr>
+                    <a:solidFill>
+                      <a:srgbClr val="FFFFFF"/>
+                    </a:solidFill>
+                  </a:tcPr>
+                </a:tc>
+              </a:tr>
+              <a:tr h="411480">
+                <a:tc>
+                  <a:txBody>
+                    <a:bodyPr/>
+                    <a:lstStyle/>
+                    <a:p>
+                      <a:pPr algn="ctr">
+                        <a:defRPr sz="1100">
+                          <a:solidFill>
+                            <a:srgbClr val="1E293B"/>
+                          </a:solidFill>
+                          <a:latin typeface="Arial"/>
+                        </a:defRPr>
+                      </a:pPr>
+                      <a:r>
+                        <a:t>03</a:t>
+                      </a:r>
+                    </a:p>
+                  </a:txBody>
+                  <a:tcPr>
+                    <a:solidFill>
+                      <a:srgbClr val="F1F5F9"/>
+                    </a:solidFill>
+                  </a:tcPr>
+                </a:tc>
+                <a:tc>
+                  <a:txBody>
+                    <a:bodyPr/>
+                    <a:lstStyle/>
+                    <a:p>
+                      <a:pPr algn="ctr">
+                        <a:defRPr sz="1100">
+                          <a:solidFill>
+                            <a:srgbClr val="1E293B"/>
+                          </a:solidFill>
+                          <a:latin typeface="Arial"/>
+                        </a:defRPr>
+                      </a:pPr>
+                      <a:r>
+                        <a:t>2402031830015</a:t>
+                      </a:r>
+                    </a:p>
+                  </a:txBody>
+                  <a:tcPr>
+                    <a:solidFill>
+                      <a:srgbClr val="F1F5F9"/>
+                    </a:solidFill>
+                  </a:tcPr>
+                </a:tc>
+                <a:tc>
+                  <a:txBody>
+                    <a:bodyPr/>
+                    <a:lstStyle/>
+                    <a:p>
+                      <a:pPr>
+                        <a:defRPr sz="1100" b="1">
+                          <a:solidFill>
+                            <a:srgbClr val="1E293B"/>
+                          </a:solidFill>
+                          <a:latin typeface="Arial"/>
+                        </a:defRPr>
+                      </a:pPr>
+                      <a:r>
+                        <a:t>Akshat Solanki</a:t>
                       </a:r>
                     </a:p>
                   </a:txBody>

--- a/PitchIQ_SilverOak_Presentation.pptx
+++ b/PitchIQ_SilverOak_Presentation.pptx
@@ -3451,21 +3451,21 @@
                     <a:lstStyle/>
                     <a:p>
                       <a:pPr>
-                        <a:defRPr sz="1100" b="0">
+                        <a:defRPr sz="1100" b="1">
                           <a:solidFill>
-                            <a:srgbClr val="1E293B"/>
+                            <a:srgbClr val="801818"/>
                           </a:solidFill>
                           <a:latin typeface="Arial"/>
                         </a:defRPr>
                       </a:pPr>
                       <a:r>
-                        <a:t>[Prof. Guide Name]</a:t>
+                        <a:t>Prof. Hemali Patel</a:t>
                       </a:r>
                     </a:p>
                   </a:txBody>
                   <a:tcPr>
                     <a:solidFill>
-                      <a:srgbClr val="FFFFFF"/>
+                      <a:srgbClr val="F8FAFC"/>
                     </a:solidFill>
                   </a:tcPr>
                 </a:tc>

--- a/PitchIQ_SilverOak_Presentation.pptx
+++ b/PitchIQ_SilverOak_Presentation.pptx
@@ -3353,7 +3353,7 @@
                     <a:lstStyle/>
                     <a:p>
                       <a:pPr>
-                        <a:defRPr sz="1100" b="0">
+                        <a:defRPr sz="1100" b="1">
                           <a:solidFill>
                             <a:srgbClr val="1E293B"/>
                           </a:solidFill>
@@ -3361,13 +3361,13 @@
                         </a:defRPr>
                       </a:pPr>
                       <a:r>
-                        <a:t>CE-2026-PIQ-01</a:t>
+                        <a:t>M2_CSE_027</a:t>
                       </a:r>
                     </a:p>
                   </a:txBody>
                   <a:tcPr>
                     <a:solidFill>
-                      <a:srgbClr val="FFFFFF"/>
+                      <a:srgbClr val="F8FAFC"/>
                     </a:solidFill>
                   </a:tcPr>
                 </a:tc>

--- a/PitchIQ_SilverOak_Presentation.pptx
+++ b/PitchIQ_SilverOak_Presentation.pptx
@@ -3110,7 +3110,7 @@
         <p:spPr>
           <a:xfrm>
             <a:off x="0" y="0"/>
-            <a:ext cx="12191695" cy="1188720"/>
+            <a:ext cx="12191695" cy="1051560"/>
           </a:xfrm>
           <a:prstGeom prst="rect">
             <a:avLst/>
@@ -3152,7 +3152,7 @@
         </p:nvSpPr>
         <p:spPr>
           <a:xfrm>
-            <a:off x="731520" y="274320"/>
+            <a:off x="731520" y="182880"/>
             <a:ext cx="10728655" cy="731520"/>
           </a:xfrm>
           <a:prstGeom prst="rect">
@@ -3161,13 +3161,13 @@
           <a:noFill/>
         </p:spPr>
         <p:txBody>
-          <a:bodyPr wrap="none">
+          <a:bodyPr wrap="none" lIns="0" tIns="0" rIns="0" bIns="0">
             <a:spAutoFit/>
           </a:bodyPr>
           <a:lstStyle/>
           <a:p>
             <a:pPr algn="ctr">
-              <a:defRPr sz="2600" b="1">
+              <a:defRPr sz="2400" b="1">
                 <a:solidFill>
                   <a:srgbClr val="801818"/>
                 </a:solidFill>
@@ -3180,7 +3180,7 @@
           </a:p>
           <a:p>
             <a:pPr algn="ctr">
-              <a:defRPr sz="1100">
+              <a:defRPr sz="1000">
                 <a:solidFill>
                   <a:srgbClr val="64748B"/>
                 </a:solidFill>
@@ -3188,7 +3188,7 @@
               </a:defRPr>
             </a:pPr>
             <a:r>
-              <a:t>DEPARTMENT OF COMPUTER ENGINEERING  |  EDUCATION TO INNOVATION</a:t>
+              <a:t>DEPARTMENT OF COMPUTER ENGINEERING  |  EDUCATION TO INNOVATION  |  NAAC A+</a:t>
             </a:r>
           </a:p>
         </p:txBody>
@@ -3201,8 +3201,8 @@
         </p:nvSpPr>
         <p:spPr>
           <a:xfrm>
-            <a:off x="731520" y="1371600"/>
-            <a:ext cx="10728655" cy="2011680"/>
+            <a:off x="731520" y="1188720"/>
+            <a:ext cx="10728655" cy="1920240"/>
           </a:xfrm>
           <a:prstGeom prst="rect">
             <a:avLst/>
@@ -3244,8 +3244,8 @@
         </p:nvSpPr>
         <p:spPr>
           <a:xfrm>
-            <a:off x="914400" y="1508760"/>
-            <a:ext cx="10362895" cy="1737360"/>
+            <a:off x="914400" y="1325880"/>
+            <a:ext cx="10362895" cy="1645920"/>
           </a:xfrm>
           <a:prstGeom prst="rect">
             <a:avLst/>
@@ -3253,13 +3253,13 @@
           <a:noFill/>
         </p:spPr>
         <p:txBody>
-          <a:bodyPr wrap="none">
+          <a:bodyPr wrap="square" lIns="0" tIns="0" rIns="0" bIns="0">
             <a:spAutoFit/>
           </a:bodyPr>
           <a:lstStyle/>
           <a:p>
             <a:pPr algn="ctr">
-              <a:defRPr sz="1300">
+              <a:defRPr sz="1200">
                 <a:solidFill>
                   <a:srgbClr val="FED7AA"/>
                 </a:solidFill>
@@ -3267,12 +3267,15 @@
               </a:defRPr>
             </a:pPr>
             <a:r>
-              <a:t>Course Name: Final Year Major Project (CE)</a:t>
+              <a:t>Course: Final Year Major Project (CE)</a:t>
             </a:r>
           </a:p>
           <a:p>
             <a:pPr algn="ctr">
-              <a:defRPr sz="2800" b="1">
+              <a:spcBef>
+                <a:spcPts val="400"/>
+              </a:spcBef>
+              <a:defRPr sz="2600" b="1">
                 <a:solidFill>
                   <a:srgbClr val="FFFFFF"/>
                 </a:solidFill>
@@ -3285,7 +3288,10 @@
           </a:p>
           <a:p>
             <a:pPr algn="ctr">
-              <a:defRPr sz="1200">
+              <a:spcBef>
+                <a:spcPts val="400"/>
+              </a:spcBef>
+              <a:defRPr sz="1100">
                 <a:solidFill>
                   <a:srgbClr val="FEF3C7"/>
                 </a:solidFill>
@@ -3307,8 +3313,8 @@
           <p:nvPr/>
         </p:nvGraphicFramePr>
         <p:xfrm>
-          <a:off x="1280160" y="3474720"/>
-          <a:ext cx="9630460" cy="868680"/>
+          <a:off x="1280160" y="3291840"/>
+          <a:ext cx="9630460" cy="777240"/>
         </p:xfrm>
         <a:graphic>
           <a:graphicData uri="http://schemas.openxmlformats.org/drawingml/2006/table">
@@ -3322,14 +3328,14 @@
                 <a:gridCol w="1828800"/>
                 <a:gridCol w="2986430"/>
               </a:tblGrid>
-              <a:tr h="434340">
+              <a:tr h="388620">
                 <a:tc>
                   <a:txBody>
-                    <a:bodyPr tIns="54864" bIns="54864"/>
+                    <a:bodyPr/>
                     <a:lstStyle/>
                     <a:p>
                       <a:pPr>
-                        <a:defRPr sz="1100" b="1">
+                        <a:defRPr sz="1050" b="1">
                           <a:solidFill>
                             <a:srgbClr val="801818"/>
                           </a:solidFill>
@@ -3341,7 +3347,7 @@
                       </a:r>
                     </a:p>
                   </a:txBody>
-                  <a:tcPr>
+                  <a:tcPr marL="109728" marR="109728" marT="36576" marB="36576">
                     <a:solidFill>
                       <a:srgbClr val="F8FAFC"/>
                     </a:solidFill>
@@ -3349,11 +3355,11 @@
                 </a:tc>
                 <a:tc>
                   <a:txBody>
-                    <a:bodyPr tIns="54864" bIns="54864"/>
+                    <a:bodyPr/>
                     <a:lstStyle/>
                     <a:p>
                       <a:pPr>
-                        <a:defRPr sz="1100" b="1">
+                        <a:defRPr sz="1050" b="1">
                           <a:solidFill>
                             <a:srgbClr val="1E293B"/>
                           </a:solidFill>
@@ -3365,7 +3371,7 @@
                       </a:r>
                     </a:p>
                   </a:txBody>
-                  <a:tcPr>
+                  <a:tcPr marL="109728" marR="109728" marT="36576" marB="36576">
                     <a:solidFill>
                       <a:srgbClr val="F8FAFC"/>
                     </a:solidFill>
@@ -3373,11 +3379,11 @@
                 </a:tc>
                 <a:tc>
                   <a:txBody>
-                    <a:bodyPr tIns="54864" bIns="54864"/>
+                    <a:bodyPr/>
                     <a:lstStyle/>
                     <a:p>
                       <a:pPr>
-                        <a:defRPr sz="1100" b="1">
+                        <a:defRPr sz="1050" b="1">
                           <a:solidFill>
                             <a:srgbClr val="801818"/>
                           </a:solidFill>
@@ -3389,7 +3395,7 @@
                       </a:r>
                     </a:p>
                   </a:txBody>
-                  <a:tcPr>
+                  <a:tcPr marL="109728" marR="109728" marT="36576" marB="36576">
                     <a:solidFill>
                       <a:srgbClr val="F8FAFC"/>
                     </a:solidFill>
@@ -3397,11 +3403,11 @@
                 </a:tc>
                 <a:tc>
                   <a:txBody>
-                    <a:bodyPr tIns="54864" bIns="54864"/>
+                    <a:bodyPr/>
                     <a:lstStyle/>
                     <a:p>
                       <a:pPr>
-                        <a:defRPr sz="1100" b="0">
+                        <a:defRPr sz="1050" b="0">
                           <a:solidFill>
                             <a:srgbClr val="1E293B"/>
                           </a:solidFill>
@@ -3413,21 +3419,21 @@
                       </a:r>
                     </a:p>
                   </a:txBody>
-                  <a:tcPr>
+                  <a:tcPr marL="109728" marR="109728" marT="36576" marB="36576">
                     <a:solidFill>
                       <a:srgbClr val="FFFFFF"/>
                     </a:solidFill>
                   </a:tcPr>
                 </a:tc>
               </a:tr>
-              <a:tr h="434340">
+              <a:tr h="388620">
                 <a:tc>
                   <a:txBody>
-                    <a:bodyPr tIns="54864" bIns="54864"/>
+                    <a:bodyPr/>
                     <a:lstStyle/>
                     <a:p>
                       <a:pPr>
-                        <a:defRPr sz="1100" b="1">
+                        <a:defRPr sz="1050" b="1">
                           <a:solidFill>
                             <a:srgbClr val="801818"/>
                           </a:solidFill>
@@ -3439,7 +3445,7 @@
                       </a:r>
                     </a:p>
                   </a:txBody>
-                  <a:tcPr>
+                  <a:tcPr marL="109728" marR="109728" marT="36576" marB="36576">
                     <a:solidFill>
                       <a:srgbClr val="F8FAFC"/>
                     </a:solidFill>
@@ -3447,11 +3453,11 @@
                 </a:tc>
                 <a:tc>
                   <a:txBody>
-                    <a:bodyPr tIns="54864" bIns="54864"/>
+                    <a:bodyPr/>
                     <a:lstStyle/>
                     <a:p>
                       <a:pPr>
-                        <a:defRPr sz="1100" b="1">
+                        <a:defRPr sz="1050" b="1">
                           <a:solidFill>
                             <a:srgbClr val="801818"/>
                           </a:solidFill>
@@ -3463,7 +3469,7 @@
                       </a:r>
                     </a:p>
                   </a:txBody>
-                  <a:tcPr>
+                  <a:tcPr marL="109728" marR="109728" marT="36576" marB="36576">
                     <a:solidFill>
                       <a:srgbClr val="F8FAFC"/>
                     </a:solidFill>
@@ -3471,11 +3477,11 @@
                 </a:tc>
                 <a:tc>
                   <a:txBody>
-                    <a:bodyPr tIns="54864" bIns="54864"/>
+                    <a:bodyPr/>
                     <a:lstStyle/>
                     <a:p>
                       <a:pPr>
-                        <a:defRPr sz="1100" b="1">
+                        <a:defRPr sz="1050" b="1">
                           <a:solidFill>
                             <a:srgbClr val="801818"/>
                           </a:solidFill>
@@ -3487,7 +3493,7 @@
                       </a:r>
                     </a:p>
                   </a:txBody>
-                  <a:tcPr>
+                  <a:tcPr marL="109728" marR="109728" marT="36576" marB="36576">
                     <a:solidFill>
                       <a:srgbClr val="F8FAFC"/>
                     </a:solidFill>
@@ -3495,11 +3501,11 @@
                 </a:tc>
                 <a:tc>
                   <a:txBody>
-                    <a:bodyPr tIns="54864" bIns="54864"/>
+                    <a:bodyPr/>
                     <a:lstStyle/>
                     <a:p>
                       <a:pPr>
-                        <a:defRPr sz="1100" b="0">
+                        <a:defRPr sz="1050" b="0">
                           <a:solidFill>
                             <a:srgbClr val="1E293B"/>
                           </a:solidFill>
@@ -3511,7 +3517,7 @@
                       </a:r>
                     </a:p>
                   </a:txBody>
-                  <a:tcPr>
+                  <a:tcPr marL="109728" marR="109728" marT="36576" marB="36576">
                     <a:solidFill>
                       <a:srgbClr val="FFFFFF"/>
                     </a:solidFill>
@@ -3531,8 +3537,8 @@
           <p:nvPr/>
         </p:nvGraphicFramePr>
         <p:xfrm>
-          <a:off x="1280160" y="4480560"/>
-          <a:ext cx="9631375" cy="1645920"/>
+          <a:off x="1280160" y="4206240"/>
+          <a:ext cx="9631375" cy="1600200"/>
         </p:xfrm>
         <a:graphic>
           <a:graphicData uri="http://schemas.openxmlformats.org/drawingml/2006/table">
@@ -3545,14 +3551,14 @@
                 <a:gridCol w="3962095"/>
                 <a:gridCol w="4572000"/>
               </a:tblGrid>
-              <a:tr h="411480">
+              <a:tr h="400050">
                 <a:tc>
                   <a:txBody>
                     <a:bodyPr/>
                     <a:lstStyle/>
                     <a:p>
                       <a:pPr algn="ctr">
-                        <a:defRPr sz="1100" b="1">
+                        <a:defRPr sz="1050" b="1">
                           <a:solidFill>
                             <a:srgbClr val="FFFFFF"/>
                           </a:solidFill>
@@ -3564,7 +3570,7 @@
                       </a:r>
                     </a:p>
                   </a:txBody>
-                  <a:tcPr>
+                  <a:tcPr marL="109728" marR="109728" marT="36576" marB="36576">
                     <a:solidFill>
                       <a:srgbClr val="801818"/>
                     </a:solidFill>
@@ -3576,7 +3582,7 @@
                     <a:lstStyle/>
                     <a:p>
                       <a:pPr algn="ctr">
-                        <a:defRPr sz="1100" b="1">
+                        <a:defRPr sz="1050" b="1">
                           <a:solidFill>
                             <a:srgbClr val="FFFFFF"/>
                           </a:solidFill>
@@ -3588,7 +3594,7 @@
                       </a:r>
                     </a:p>
                   </a:txBody>
-                  <a:tcPr>
+                  <a:tcPr marL="109728" marR="109728" marT="36576" marB="36576">
                     <a:solidFill>
                       <a:srgbClr val="801818"/>
                     </a:solidFill>
@@ -3600,7 +3606,7 @@
                     <a:lstStyle/>
                     <a:p>
                       <a:pPr>
-                        <a:defRPr sz="1100" b="1">
+                        <a:defRPr sz="1050" b="1">
                           <a:solidFill>
                             <a:srgbClr val="FFFFFF"/>
                           </a:solidFill>
@@ -3612,21 +3618,21 @@
                       </a:r>
                     </a:p>
                   </a:txBody>
-                  <a:tcPr>
+                  <a:tcPr marL="109728" marR="109728" marT="36576" marB="36576">
                     <a:solidFill>
                       <a:srgbClr val="801818"/>
                     </a:solidFill>
                   </a:tcPr>
                 </a:tc>
               </a:tr>
-              <a:tr h="411480">
+              <a:tr h="400050">
                 <a:tc>
                   <a:txBody>
                     <a:bodyPr/>
                     <a:lstStyle/>
                     <a:p>
                       <a:pPr algn="ctr">
-                        <a:defRPr sz="1100">
+                        <a:defRPr sz="1050">
                           <a:solidFill>
                             <a:srgbClr val="1E293B"/>
                           </a:solidFill>
@@ -3638,7 +3644,7 @@
                       </a:r>
                     </a:p>
                   </a:txBody>
-                  <a:tcPr>
+                  <a:tcPr marL="109728" marR="109728" marT="36576" marB="36576">
                     <a:solidFill>
                       <a:srgbClr val="F1F5F9"/>
                     </a:solidFill>
@@ -3650,7 +3656,7 @@
                     <a:lstStyle/>
                     <a:p>
                       <a:pPr algn="ctr">
-                        <a:defRPr sz="1100">
+                        <a:defRPr sz="1050">
                           <a:solidFill>
                             <a:srgbClr val="1E293B"/>
                           </a:solidFill>
@@ -3662,7 +3668,7 @@
                       </a:r>
                     </a:p>
                   </a:txBody>
-                  <a:tcPr>
+                  <a:tcPr marL="109728" marR="109728" marT="36576" marB="36576">
                     <a:solidFill>
                       <a:srgbClr val="F1F5F9"/>
                     </a:solidFill>
@@ -3674,7 +3680,7 @@
                     <a:lstStyle/>
                     <a:p>
                       <a:pPr>
-                        <a:defRPr sz="1100" b="1">
+                        <a:defRPr sz="1050" b="1">
                           <a:solidFill>
                             <a:srgbClr val="1E293B"/>
                           </a:solidFill>
@@ -3686,21 +3692,21 @@
                       </a:r>
                     </a:p>
                   </a:txBody>
-                  <a:tcPr>
+                  <a:tcPr marL="109728" marR="109728" marT="36576" marB="36576">
                     <a:solidFill>
                       <a:srgbClr val="F1F5F9"/>
                     </a:solidFill>
                   </a:tcPr>
                 </a:tc>
               </a:tr>
-              <a:tr h="411480">
+              <a:tr h="400050">
                 <a:tc>
                   <a:txBody>
                     <a:bodyPr/>
                     <a:lstStyle/>
                     <a:p>
                       <a:pPr algn="ctr">
-                        <a:defRPr sz="1100">
+                        <a:defRPr sz="1050">
                           <a:solidFill>
                             <a:srgbClr val="1E293B"/>
                           </a:solidFill>
@@ -3712,7 +3718,7 @@
                       </a:r>
                     </a:p>
                   </a:txBody>
-                  <a:tcPr>
+                  <a:tcPr marL="109728" marR="109728" marT="36576" marB="36576">
                     <a:solidFill>
                       <a:srgbClr val="FFFFFF"/>
                     </a:solidFill>
@@ -3724,7 +3730,7 @@
                     <a:lstStyle/>
                     <a:p>
                       <a:pPr algn="ctr">
-                        <a:defRPr sz="1100">
+                        <a:defRPr sz="1050">
                           <a:solidFill>
                             <a:srgbClr val="1E293B"/>
                           </a:solidFill>
@@ -3736,7 +3742,7 @@
                       </a:r>
                     </a:p>
                   </a:txBody>
-                  <a:tcPr>
+                  <a:tcPr marL="109728" marR="109728" marT="36576" marB="36576">
                     <a:solidFill>
                       <a:srgbClr val="FFFFFF"/>
                     </a:solidFill>
@@ -3748,7 +3754,7 @@
                     <a:lstStyle/>
                     <a:p>
                       <a:pPr>
-                        <a:defRPr sz="1100" b="1">
+                        <a:defRPr sz="1050" b="1">
                           <a:solidFill>
                             <a:srgbClr val="1E293B"/>
                           </a:solidFill>
@@ -3760,21 +3766,21 @@
                       </a:r>
                     </a:p>
                   </a:txBody>
-                  <a:tcPr>
+                  <a:tcPr marL="109728" marR="109728" marT="36576" marB="36576">
                     <a:solidFill>
                       <a:srgbClr val="FFFFFF"/>
                     </a:solidFill>
                   </a:tcPr>
                 </a:tc>
               </a:tr>
-              <a:tr h="411480">
+              <a:tr h="400050">
                 <a:tc>
                   <a:txBody>
                     <a:bodyPr/>
                     <a:lstStyle/>
                     <a:p>
                       <a:pPr algn="ctr">
-                        <a:defRPr sz="1100">
+                        <a:defRPr sz="1050">
                           <a:solidFill>
                             <a:srgbClr val="1E293B"/>
                           </a:solidFill>
@@ -3786,7 +3792,7 @@
                       </a:r>
                     </a:p>
                   </a:txBody>
-                  <a:tcPr>
+                  <a:tcPr marL="109728" marR="109728" marT="36576" marB="36576">
                     <a:solidFill>
                       <a:srgbClr val="F1F5F9"/>
                     </a:solidFill>
@@ -3798,7 +3804,7 @@
                     <a:lstStyle/>
                     <a:p>
                       <a:pPr algn="ctr">
-                        <a:defRPr sz="1100">
+                        <a:defRPr sz="1050">
                           <a:solidFill>
                             <a:srgbClr val="1E293B"/>
                           </a:solidFill>
@@ -3810,7 +3816,7 @@
                       </a:r>
                     </a:p>
                   </a:txBody>
-                  <a:tcPr>
+                  <a:tcPr marL="109728" marR="109728" marT="36576" marB="36576">
                     <a:solidFill>
                       <a:srgbClr val="F1F5F9"/>
                     </a:solidFill>
@@ -3822,7 +3828,7 @@
                     <a:lstStyle/>
                     <a:p>
                       <a:pPr>
-                        <a:defRPr sz="1100" b="1">
+                        <a:defRPr sz="1050" b="1">
                           <a:solidFill>
                             <a:srgbClr val="1E293B"/>
                           </a:solidFill>
@@ -3834,7 +3840,7 @@
                       </a:r>
                     </a:p>
                   </a:txBody>
-                  <a:tcPr>
+                  <a:tcPr marL="109728" marR="109728" marT="36576" marB="36576">
                     <a:solidFill>
                       <a:srgbClr val="F1F5F9"/>
                     </a:solidFill>
@@ -3871,8 +3877,8 @@
         </p:nvSpPr>
         <p:spPr>
           <a:xfrm>
-            <a:off x="731520" y="1188720"/>
-            <a:ext cx="10728655" cy="36576"/>
+            <a:off x="731520" y="1170432"/>
+            <a:ext cx="10728655" cy="27432"/>
           </a:xfrm>
           <a:prstGeom prst="rect">
             <a:avLst/>
@@ -3916,7 +3922,7 @@
         </p:nvSpPr>
         <p:spPr>
           <a:xfrm>
-            <a:off x="731520" y="411480"/>
+            <a:off x="731520" y="365760"/>
             <a:ext cx="7772400" cy="731520"/>
           </a:xfrm>
           <a:prstGeom prst="rect">
@@ -3931,7 +3937,7 @@
           <a:lstStyle/>
           <a:p>
             <a:pPr>
-              <a:defRPr sz="2800" b="1">
+              <a:defRPr sz="2600" b="1">
                 <a:solidFill>
                   <a:srgbClr val="1E293B"/>
                 </a:solidFill>
@@ -4046,8 +4052,8 @@
         </p:nvSpPr>
         <p:spPr>
           <a:xfrm>
-            <a:off x="731520" y="6309360"/>
-            <a:ext cx="10728655" cy="365760"/>
+            <a:off x="731520" y="6291072"/>
+            <a:ext cx="2743200" cy="274320"/>
           </a:xfrm>
           <a:prstGeom prst="rect">
             <a:avLst/>
@@ -4055,7 +4061,7 @@
           <a:noFill/>
         </p:spPr>
         <p:txBody>
-          <a:bodyPr wrap="square" lIns="0" tIns="0" rIns="0" bIns="0">
+          <a:bodyPr wrap="none" lIns="0" tIns="0" rIns="0" bIns="0">
             <a:spAutoFit/>
           </a:bodyPr>
           <a:lstStyle/>
@@ -4072,9 +4078,32 @@
               <a:t>Academic Year 2025-2026</a:t>
             </a:r>
           </a:p>
+        </p:txBody>
+      </p:sp>
+      <p:sp>
+        <p:nvSpPr>
+          <p:cNvPr id="7" name="TextBox 6"/>
+          <p:cNvSpPr txBox="1"/>
+          <p:nvPr/>
+        </p:nvSpPr>
+        <p:spPr>
+          <a:xfrm>
+            <a:off x="3474720" y="6291072"/>
+            <a:ext cx="5242255" cy="274320"/>
+          </a:xfrm>
+          <a:prstGeom prst="rect">
+            <a:avLst/>
+          </a:prstGeom>
+          <a:noFill/>
+        </p:spPr>
+        <p:txBody>
+          <a:bodyPr wrap="none" lIns="0" tIns="0" rIns="0" bIns="0">
+            <a:spAutoFit/>
+          </a:bodyPr>
+          <a:lstStyle/>
           <a:p>
             <a:pPr algn="ctr">
-              <a:defRPr sz="900" b="1">
+              <a:defRPr sz="850" b="1">
                 <a:solidFill>
                   <a:srgbClr val="801818"/>
                 </a:solidFill>
@@ -4085,6 +4114,29 @@
               <a:t>DEPARTMENT OF COMPUTER ENGINEERING  •  SILVER OAK UNIVERSITY</a:t>
             </a:r>
           </a:p>
+        </p:txBody>
+      </p:sp>
+      <p:sp>
+        <p:nvSpPr>
+          <p:cNvPr id="8" name="TextBox 7"/>
+          <p:cNvSpPr txBox="1"/>
+          <p:nvPr/>
+        </p:nvSpPr>
+        <p:spPr>
+          <a:xfrm>
+            <a:off x="9631375" y="6291072"/>
+            <a:ext cx="1828800" cy="274320"/>
+          </a:xfrm>
+          <a:prstGeom prst="rect">
+            <a:avLst/>
+          </a:prstGeom>
+          <a:noFill/>
+        </p:spPr>
+        <p:txBody>
+          <a:bodyPr wrap="none" lIns="0" tIns="0" rIns="0" bIns="0">
+            <a:spAutoFit/>
+          </a:bodyPr>
+          <a:lstStyle/>
           <a:p>
             <a:pPr algn="r">
               <a:defRPr sz="900">
@@ -4102,14 +4154,14 @@
       </p:sp>
       <p:sp>
         <p:nvSpPr>
-          <p:cNvPr id="7" name="Rounded Rectangle 6"/>
+          <p:cNvPr id="9" name="Rounded Rectangle 8"/>
           <p:cNvSpPr/>
           <p:nvPr/>
         </p:nvSpPr>
         <p:spPr>
           <a:xfrm>
-            <a:off x="731520" y="1463040"/>
-            <a:ext cx="10728655" cy="777240"/>
+            <a:off x="731520" y="1389888"/>
+            <a:ext cx="10728655" cy="822960"/>
           </a:xfrm>
           <a:prstGeom prst="roundRect">
             <a:avLst/>
@@ -4138,11 +4190,11 @@
           </a:fontRef>
         </p:style>
         <p:txBody>
-          <a:bodyPr rtlCol="0" anchor="ctr" wrap="square" lIns="914400" tIns="109728"/>
+          <a:bodyPr rtlCol="0" anchor="ctr" wrap="square" lIns="822960" rIns="182880" tIns="73152" bIns="73152"/>
           <a:lstStyle/>
           <a:p>
             <a:pPr algn="ctr">
-              <a:defRPr sz="1300" b="1">
+              <a:defRPr sz="1100" b="1">
                 <a:solidFill>
                   <a:srgbClr val="801818"/>
                 </a:solidFill>
@@ -4165,14 +4217,14 @@
       </p:sp>
       <p:sp>
         <p:nvSpPr>
-          <p:cNvPr id="8" name="Rectangle 7"/>
+          <p:cNvPr id="10" name="Rectangle 9"/>
           <p:cNvSpPr/>
           <p:nvPr/>
         </p:nvSpPr>
         <p:spPr>
           <a:xfrm>
-            <a:off x="731520" y="1463040"/>
-            <a:ext cx="731520" cy="777240"/>
+            <a:off x="731520" y="1389888"/>
+            <a:ext cx="685800" cy="822960"/>
           </a:xfrm>
           <a:prstGeom prst="rect">
             <a:avLst/>
@@ -4203,7 +4255,7 @@
           <a:lstStyle/>
           <a:p>
             <a:pPr algn="ctr">
-              <a:defRPr sz="1400" b="1">
+              <a:defRPr sz="1300" b="1">
                 <a:solidFill>
                   <a:srgbClr val="FFFFFF"/>
                 </a:solidFill>
@@ -4218,14 +4270,14 @@
       </p:sp>
       <p:sp>
         <p:nvSpPr>
-          <p:cNvPr id="9" name="Rounded Rectangle 8"/>
+          <p:cNvPr id="11" name="Rounded Rectangle 10"/>
           <p:cNvSpPr/>
           <p:nvPr/>
         </p:nvSpPr>
         <p:spPr>
           <a:xfrm>
-            <a:off x="731520" y="2359152"/>
-            <a:ext cx="10728655" cy="777240"/>
+            <a:off x="731520" y="2304288"/>
+            <a:ext cx="10728655" cy="822960"/>
           </a:xfrm>
           <a:prstGeom prst="roundRect">
             <a:avLst/>
@@ -4254,11 +4306,11 @@
           </a:fontRef>
         </p:style>
         <p:txBody>
-          <a:bodyPr rtlCol="0" anchor="ctr" wrap="square" lIns="914400" tIns="109728"/>
+          <a:bodyPr rtlCol="0" anchor="ctr" wrap="square" lIns="822960" rIns="182880" tIns="73152" bIns="73152"/>
           <a:lstStyle/>
           <a:p>
             <a:pPr algn="ctr">
-              <a:defRPr sz="1300" b="1">
+              <a:defRPr sz="1100" b="1">
                 <a:solidFill>
                   <a:srgbClr val="801818"/>
                 </a:solidFill>
@@ -4281,14 +4333,14 @@
       </p:sp>
       <p:sp>
         <p:nvSpPr>
-          <p:cNvPr id="10" name="Rectangle 9"/>
+          <p:cNvPr id="12" name="Rectangle 11"/>
           <p:cNvSpPr/>
           <p:nvPr/>
         </p:nvSpPr>
         <p:spPr>
           <a:xfrm>
-            <a:off x="731520" y="2359152"/>
-            <a:ext cx="731520" cy="777240"/>
+            <a:off x="731520" y="2304288"/>
+            <a:ext cx="685800" cy="822960"/>
           </a:xfrm>
           <a:prstGeom prst="rect">
             <a:avLst/>
@@ -4319,7 +4371,7 @@
           <a:lstStyle/>
           <a:p>
             <a:pPr algn="ctr">
-              <a:defRPr sz="1400" b="1">
+              <a:defRPr sz="1300" b="1">
                 <a:solidFill>
                   <a:srgbClr val="FFFFFF"/>
                 </a:solidFill>
@@ -4334,14 +4386,14 @@
       </p:sp>
       <p:sp>
         <p:nvSpPr>
-          <p:cNvPr id="11" name="Rounded Rectangle 10"/>
+          <p:cNvPr id="13" name="Rounded Rectangle 12"/>
           <p:cNvSpPr/>
           <p:nvPr/>
         </p:nvSpPr>
         <p:spPr>
           <a:xfrm>
-            <a:off x="731520" y="3255264"/>
-            <a:ext cx="10728655" cy="777240"/>
+            <a:off x="731520" y="3218688"/>
+            <a:ext cx="10728655" cy="822960"/>
           </a:xfrm>
           <a:prstGeom prst="roundRect">
             <a:avLst/>
@@ -4370,11 +4422,11 @@
           </a:fontRef>
         </p:style>
         <p:txBody>
-          <a:bodyPr rtlCol="0" anchor="ctr" wrap="square" lIns="914400" tIns="109728"/>
+          <a:bodyPr rtlCol="0" anchor="ctr" wrap="square" lIns="822960" rIns="182880" tIns="73152" bIns="73152"/>
           <a:lstStyle/>
           <a:p>
             <a:pPr algn="ctr">
-              <a:defRPr sz="1300" b="1">
+              <a:defRPr sz="1100" b="1">
                 <a:solidFill>
                   <a:srgbClr val="801818"/>
                 </a:solidFill>
@@ -4397,14 +4449,14 @@
       </p:sp>
       <p:sp>
         <p:nvSpPr>
-          <p:cNvPr id="12" name="Rectangle 11"/>
+          <p:cNvPr id="14" name="Rectangle 13"/>
           <p:cNvSpPr/>
           <p:nvPr/>
         </p:nvSpPr>
         <p:spPr>
           <a:xfrm>
-            <a:off x="731520" y="3255264"/>
-            <a:ext cx="731520" cy="777240"/>
+            <a:off x="731520" y="3218688"/>
+            <a:ext cx="685800" cy="822960"/>
           </a:xfrm>
           <a:prstGeom prst="rect">
             <a:avLst/>
@@ -4435,7 +4487,7 @@
           <a:lstStyle/>
           <a:p>
             <a:pPr algn="ctr">
-              <a:defRPr sz="1400" b="1">
+              <a:defRPr sz="1300" b="1">
                 <a:solidFill>
                   <a:srgbClr val="FFFFFF"/>
                 </a:solidFill>
@@ -4450,14 +4502,14 @@
       </p:sp>
       <p:sp>
         <p:nvSpPr>
-          <p:cNvPr id="13" name="Rounded Rectangle 12"/>
+          <p:cNvPr id="15" name="Rounded Rectangle 14"/>
           <p:cNvSpPr/>
           <p:nvPr/>
         </p:nvSpPr>
         <p:spPr>
           <a:xfrm>
-            <a:off x="731520" y="4151376"/>
-            <a:ext cx="10728655" cy="777240"/>
+            <a:off x="731520" y="4133087"/>
+            <a:ext cx="10728655" cy="822960"/>
           </a:xfrm>
           <a:prstGeom prst="roundRect">
             <a:avLst/>
@@ -4486,11 +4538,11 @@
           </a:fontRef>
         </p:style>
         <p:txBody>
-          <a:bodyPr rtlCol="0" anchor="ctr" wrap="square" lIns="914400" tIns="109728"/>
+          <a:bodyPr rtlCol="0" anchor="ctr" wrap="square" lIns="822960" rIns="182880" tIns="73152" bIns="73152"/>
           <a:lstStyle/>
           <a:p>
             <a:pPr algn="ctr">
-              <a:defRPr sz="1300" b="1">
+              <a:defRPr sz="1100" b="1">
                 <a:solidFill>
                   <a:srgbClr val="801818"/>
                 </a:solidFill>
@@ -4513,14 +4565,14 @@
       </p:sp>
       <p:sp>
         <p:nvSpPr>
-          <p:cNvPr id="14" name="Rectangle 13"/>
+          <p:cNvPr id="16" name="Rectangle 15"/>
           <p:cNvSpPr/>
           <p:nvPr/>
         </p:nvSpPr>
         <p:spPr>
           <a:xfrm>
-            <a:off x="731520" y="4151376"/>
-            <a:ext cx="731520" cy="777240"/>
+            <a:off x="731520" y="4133087"/>
+            <a:ext cx="685800" cy="822960"/>
           </a:xfrm>
           <a:prstGeom prst="rect">
             <a:avLst/>
@@ -4551,7 +4603,7 @@
           <a:lstStyle/>
           <a:p>
             <a:pPr algn="ctr">
-              <a:defRPr sz="1400" b="1">
+              <a:defRPr sz="1300" b="1">
                 <a:solidFill>
                   <a:srgbClr val="FFFFFF"/>
                 </a:solidFill>
@@ -4566,14 +4618,14 @@
       </p:sp>
       <p:sp>
         <p:nvSpPr>
-          <p:cNvPr id="15" name="Rounded Rectangle 14"/>
+          <p:cNvPr id="17" name="Rounded Rectangle 16"/>
           <p:cNvSpPr/>
           <p:nvPr/>
         </p:nvSpPr>
         <p:spPr>
           <a:xfrm>
             <a:off x="731520" y="5047488"/>
-            <a:ext cx="10728655" cy="777240"/>
+            <a:ext cx="10728655" cy="822960"/>
           </a:xfrm>
           <a:prstGeom prst="roundRect">
             <a:avLst/>
@@ -4602,11 +4654,11 @@
           </a:fontRef>
         </p:style>
         <p:txBody>
-          <a:bodyPr rtlCol="0" anchor="ctr" wrap="square" lIns="914400" tIns="109728"/>
+          <a:bodyPr rtlCol="0" anchor="ctr" wrap="square" lIns="822960" rIns="182880" tIns="73152" bIns="73152"/>
           <a:lstStyle/>
           <a:p>
             <a:pPr algn="ctr">
-              <a:defRPr sz="1300" b="1">
+              <a:defRPr sz="1100" b="1">
                 <a:solidFill>
                   <a:srgbClr val="801818"/>
                 </a:solidFill>
@@ -4629,14 +4681,14 @@
       </p:sp>
       <p:sp>
         <p:nvSpPr>
-          <p:cNvPr id="16" name="Rectangle 15"/>
+          <p:cNvPr id="18" name="Rectangle 17"/>
           <p:cNvSpPr/>
           <p:nvPr/>
         </p:nvSpPr>
         <p:spPr>
           <a:xfrm>
             <a:off x="731520" y="5047488"/>
-            <a:ext cx="731520" cy="777240"/>
+            <a:ext cx="685800" cy="822960"/>
           </a:xfrm>
           <a:prstGeom prst="rect">
             <a:avLst/>
@@ -4667,7 +4719,7 @@
           <a:lstStyle/>
           <a:p>
             <a:pPr algn="ctr">
-              <a:defRPr sz="1400" b="1">
+              <a:defRPr sz="1300" b="1">
                 <a:solidFill>
                   <a:srgbClr val="FFFFFF"/>
                 </a:solidFill>
@@ -4706,8 +4758,8 @@
         </p:nvSpPr>
         <p:spPr>
           <a:xfrm>
-            <a:off x="731520" y="1188720"/>
-            <a:ext cx="10728655" cy="36576"/>
+            <a:off x="731520" y="1170432"/>
+            <a:ext cx="10728655" cy="27432"/>
           </a:xfrm>
           <a:prstGeom prst="rect">
             <a:avLst/>
@@ -4751,7 +4803,7 @@
         </p:nvSpPr>
         <p:spPr>
           <a:xfrm>
-            <a:off x="731520" y="411480"/>
+            <a:off x="731520" y="365760"/>
             <a:ext cx="7772400" cy="731520"/>
           </a:xfrm>
           <a:prstGeom prst="rect">
@@ -4766,7 +4818,7 @@
           <a:lstStyle/>
           <a:p>
             <a:pPr>
-              <a:defRPr sz="2800" b="1">
+              <a:defRPr sz="2600" b="1">
                 <a:solidFill>
                   <a:srgbClr val="1E293B"/>
                 </a:solidFill>
@@ -4881,8 +4933,8 @@
         </p:nvSpPr>
         <p:spPr>
           <a:xfrm>
-            <a:off x="731520" y="6309360"/>
-            <a:ext cx="10728655" cy="365760"/>
+            <a:off x="731520" y="6291072"/>
+            <a:ext cx="2743200" cy="274320"/>
           </a:xfrm>
           <a:prstGeom prst="rect">
             <a:avLst/>
@@ -4890,7 +4942,7 @@
           <a:noFill/>
         </p:spPr>
         <p:txBody>
-          <a:bodyPr wrap="square" lIns="0" tIns="0" rIns="0" bIns="0">
+          <a:bodyPr wrap="none" lIns="0" tIns="0" rIns="0" bIns="0">
             <a:spAutoFit/>
           </a:bodyPr>
           <a:lstStyle/>
@@ -4907,9 +4959,32 @@
               <a:t>Academic Year 2025-2026</a:t>
             </a:r>
           </a:p>
+        </p:txBody>
+      </p:sp>
+      <p:sp>
+        <p:nvSpPr>
+          <p:cNvPr id="7" name="TextBox 6"/>
+          <p:cNvSpPr txBox="1"/>
+          <p:nvPr/>
+        </p:nvSpPr>
+        <p:spPr>
+          <a:xfrm>
+            <a:off x="3474720" y="6291072"/>
+            <a:ext cx="5242255" cy="274320"/>
+          </a:xfrm>
+          <a:prstGeom prst="rect">
+            <a:avLst/>
+          </a:prstGeom>
+          <a:noFill/>
+        </p:spPr>
+        <p:txBody>
+          <a:bodyPr wrap="none" lIns="0" tIns="0" rIns="0" bIns="0">
+            <a:spAutoFit/>
+          </a:bodyPr>
+          <a:lstStyle/>
           <a:p>
             <a:pPr algn="ctr">
-              <a:defRPr sz="900" b="1">
+              <a:defRPr sz="850" b="1">
                 <a:solidFill>
                   <a:srgbClr val="801818"/>
                 </a:solidFill>
@@ -4920,6 +4995,29 @@
               <a:t>DEPARTMENT OF COMPUTER ENGINEERING  •  SILVER OAK UNIVERSITY</a:t>
             </a:r>
           </a:p>
+        </p:txBody>
+      </p:sp>
+      <p:sp>
+        <p:nvSpPr>
+          <p:cNvPr id="8" name="TextBox 7"/>
+          <p:cNvSpPr txBox="1"/>
+          <p:nvPr/>
+        </p:nvSpPr>
+        <p:spPr>
+          <a:xfrm>
+            <a:off x="9631375" y="6291072"/>
+            <a:ext cx="1828800" cy="274320"/>
+          </a:xfrm>
+          <a:prstGeom prst="rect">
+            <a:avLst/>
+          </a:prstGeom>
+          <a:noFill/>
+        </p:spPr>
+        <p:txBody>
+          <a:bodyPr wrap="none" lIns="0" tIns="0" rIns="0" bIns="0">
+            <a:spAutoFit/>
+          </a:bodyPr>
+          <a:lstStyle/>
           <a:p>
             <a:pPr algn="r">
               <a:defRPr sz="900">
@@ -4937,14 +5035,14 @@
       </p:sp>
       <p:sp>
         <p:nvSpPr>
-          <p:cNvPr id="7" name="Rounded Rectangle 6"/>
+          <p:cNvPr id="9" name="Rounded Rectangle 8"/>
           <p:cNvSpPr/>
           <p:nvPr/>
         </p:nvSpPr>
         <p:spPr>
           <a:xfrm>
-            <a:off x="731520" y="1463040"/>
-            <a:ext cx="5120640" cy="4480560"/>
+            <a:off x="731520" y="1389888"/>
+            <a:ext cx="5166360" cy="4572000"/>
           </a:xfrm>
           <a:prstGeom prst="roundRect">
             <a:avLst/>
@@ -4973,11 +5071,11 @@
           </a:fontRef>
         </p:style>
         <p:txBody>
-          <a:bodyPr rtlCol="0" anchor="ctr" wrap="square" lIns="274320" rIns="274320" tIns="182880"/>
+          <a:bodyPr rtlCol="0" anchor="ctr" wrap="square" lIns="228600" rIns="228600" tIns="182880" bIns="137160"/>
           <a:lstStyle/>
           <a:p>
             <a:pPr algn="ctr">
-              <a:defRPr sz="1800" b="1">
+              <a:defRPr sz="1600" b="1">
                 <a:solidFill>
                   <a:srgbClr val="166534"/>
                 </a:solidFill>
@@ -4991,9 +5089,9 @@
           <a:p>
             <a:pPr>
               <a:spcBef>
-                <a:spcPts val="800"/>
+                <a:spcPts val="600"/>
               </a:spcBef>
-              <a:defRPr sz="1100">
+              <a:defRPr sz="1050">
                 <a:solidFill>
                   <a:srgbClr val="1E293B"/>
                 </a:solidFill>
@@ -5007,9 +5105,9 @@
           <a:p>
             <a:pPr>
               <a:spcBef>
-                <a:spcPts val="800"/>
+                <a:spcPts val="600"/>
               </a:spcBef>
-              <a:defRPr sz="1100">
+              <a:defRPr sz="1050">
                 <a:solidFill>
                   <a:srgbClr val="1E293B"/>
                 </a:solidFill>
@@ -5023,9 +5121,9 @@
           <a:p>
             <a:pPr>
               <a:spcBef>
-                <a:spcPts val="800"/>
+                <a:spcPts val="600"/>
               </a:spcBef>
-              <a:defRPr sz="1100">
+              <a:defRPr sz="1050">
                 <a:solidFill>
                   <a:srgbClr val="1E293B"/>
                 </a:solidFill>
@@ -5039,9 +5137,9 @@
           <a:p>
             <a:pPr>
               <a:spcBef>
-                <a:spcPts val="800"/>
+                <a:spcPts val="600"/>
               </a:spcBef>
-              <a:defRPr sz="1100">
+              <a:defRPr sz="1050">
                 <a:solidFill>
                   <a:srgbClr val="1E293B"/>
                 </a:solidFill>
@@ -5055,9 +5153,9 @@
           <a:p>
             <a:pPr>
               <a:spcBef>
-                <a:spcPts val="800"/>
+                <a:spcPts val="600"/>
               </a:spcBef>
-              <a:defRPr sz="1100">
+              <a:defRPr sz="1050">
                 <a:solidFill>
                   <a:srgbClr val="1E293B"/>
                 </a:solidFill>
@@ -5071,9 +5169,9 @@
           <a:p>
             <a:pPr>
               <a:spcBef>
-                <a:spcPts val="800"/>
+                <a:spcPts val="600"/>
               </a:spcBef>
-              <a:defRPr sz="1100">
+              <a:defRPr sz="1050">
                 <a:solidFill>
                   <a:srgbClr val="1E293B"/>
                 </a:solidFill>
@@ -5081,21 +5179,21 @@
               </a:defRPr>
             </a:pPr>
             <a:r>
-              <a:t>✔  Audience Selectors: Investor Pitch, Sales Call, Product Demo, Job Interview</a:t>
-            </a:r>
-          </a:p>
-        </p:txBody>
-      </p:sp>
-      <p:sp>
-        <p:nvSpPr>
-          <p:cNvPr id="8" name="Rounded Rectangle 7"/>
+              <a:t>✔  Audience Selectors: Investor Pitch, Sales Call, Demo, Interview</a:t>
+            </a:r>
+          </a:p>
+        </p:txBody>
+      </p:sp>
+      <p:sp>
+        <p:nvSpPr>
+          <p:cNvPr id="10" name="Rounded Rectangle 9"/>
           <p:cNvSpPr/>
           <p:nvPr/>
         </p:nvSpPr>
         <p:spPr>
           <a:xfrm>
-            <a:off x="6217920" y="1463040"/>
-            <a:ext cx="5242255" cy="4480560"/>
+            <a:off x="6172200" y="1389888"/>
+            <a:ext cx="5287975" cy="4572000"/>
           </a:xfrm>
           <a:prstGeom prst="roundRect">
             <a:avLst/>
@@ -5124,11 +5222,11 @@
           </a:fontRef>
         </p:style>
         <p:txBody>
-          <a:bodyPr rtlCol="0" anchor="ctr" wrap="square" lIns="274320" rIns="274320" tIns="182880"/>
+          <a:bodyPr rtlCol="0" anchor="ctr" wrap="square" lIns="228600" rIns="228600" tIns="182880" bIns="137160"/>
           <a:lstStyle/>
           <a:p>
             <a:pPr algn="ctr">
-              <a:defRPr sz="1800" b="1">
+              <a:defRPr sz="1600" b="1">
                 <a:solidFill>
                   <a:srgbClr val="801818"/>
                 </a:solidFill>
@@ -5142,9 +5240,9 @@
           <a:p>
             <a:pPr>
               <a:spcBef>
-                <a:spcPts val="800"/>
+                <a:spcPts val="600"/>
               </a:spcBef>
-              <a:defRPr sz="1100" b="1">
+              <a:defRPr sz="1000" b="1">
                 <a:solidFill>
                   <a:srgbClr val="801818"/>
                 </a:solidFill>
@@ -5166,9 +5264,9 @@
           <a:p>
             <a:pPr>
               <a:spcBef>
-                <a:spcPts val="800"/>
+                <a:spcPts val="600"/>
               </a:spcBef>
-              <a:defRPr sz="1100" b="1">
+              <a:defRPr sz="1000" b="1">
                 <a:solidFill>
                   <a:srgbClr val="801818"/>
                 </a:solidFill>
@@ -5190,9 +5288,9 @@
           <a:p>
             <a:pPr>
               <a:spcBef>
-                <a:spcPts val="800"/>
+                <a:spcPts val="600"/>
               </a:spcBef>
-              <a:defRPr sz="1100" b="1">
+              <a:defRPr sz="1000" b="1">
                 <a:solidFill>
                   <a:srgbClr val="801818"/>
                 </a:solidFill>
@@ -5239,8 +5337,8 @@
         </p:nvSpPr>
         <p:spPr>
           <a:xfrm>
-            <a:off x="731520" y="1188720"/>
-            <a:ext cx="10728655" cy="36576"/>
+            <a:off x="731520" y="1170432"/>
+            <a:ext cx="10728655" cy="27432"/>
           </a:xfrm>
           <a:prstGeom prst="rect">
             <a:avLst/>
@@ -5284,7 +5382,7 @@
         </p:nvSpPr>
         <p:spPr>
           <a:xfrm>
-            <a:off x="731520" y="411480"/>
+            <a:off x="731520" y="365760"/>
             <a:ext cx="7772400" cy="731520"/>
           </a:xfrm>
           <a:prstGeom prst="rect">
@@ -5299,7 +5397,7 @@
           <a:lstStyle/>
           <a:p>
             <a:pPr>
-              <a:defRPr sz="2800" b="1">
+              <a:defRPr sz="2600" b="1">
                 <a:solidFill>
                   <a:srgbClr val="1E293B"/>
                 </a:solidFill>
@@ -5414,8 +5512,8 @@
         </p:nvSpPr>
         <p:spPr>
           <a:xfrm>
-            <a:off x="731520" y="6309360"/>
-            <a:ext cx="10728655" cy="365760"/>
+            <a:off x="731520" y="6291072"/>
+            <a:ext cx="2743200" cy="274320"/>
           </a:xfrm>
           <a:prstGeom prst="rect">
             <a:avLst/>
@@ -5423,7 +5521,7 @@
           <a:noFill/>
         </p:spPr>
         <p:txBody>
-          <a:bodyPr wrap="square" lIns="0" tIns="0" rIns="0" bIns="0">
+          <a:bodyPr wrap="none" lIns="0" tIns="0" rIns="0" bIns="0">
             <a:spAutoFit/>
           </a:bodyPr>
           <a:lstStyle/>
@@ -5440,9 +5538,32 @@
               <a:t>Academic Year 2025-2026</a:t>
             </a:r>
           </a:p>
+        </p:txBody>
+      </p:sp>
+      <p:sp>
+        <p:nvSpPr>
+          <p:cNvPr id="7" name="TextBox 6"/>
+          <p:cNvSpPr txBox="1"/>
+          <p:nvPr/>
+        </p:nvSpPr>
+        <p:spPr>
+          <a:xfrm>
+            <a:off x="3474720" y="6291072"/>
+            <a:ext cx="5242255" cy="274320"/>
+          </a:xfrm>
+          <a:prstGeom prst="rect">
+            <a:avLst/>
+          </a:prstGeom>
+          <a:noFill/>
+        </p:spPr>
+        <p:txBody>
+          <a:bodyPr wrap="none" lIns="0" tIns="0" rIns="0" bIns="0">
+            <a:spAutoFit/>
+          </a:bodyPr>
+          <a:lstStyle/>
           <a:p>
             <a:pPr algn="ctr">
-              <a:defRPr sz="900" b="1">
+              <a:defRPr sz="850" b="1">
                 <a:solidFill>
                   <a:srgbClr val="801818"/>
                 </a:solidFill>
@@ -5453,6 +5574,29 @@
               <a:t>DEPARTMENT OF COMPUTER ENGINEERING  •  SILVER OAK UNIVERSITY</a:t>
             </a:r>
           </a:p>
+        </p:txBody>
+      </p:sp>
+      <p:sp>
+        <p:nvSpPr>
+          <p:cNvPr id="8" name="TextBox 7"/>
+          <p:cNvSpPr txBox="1"/>
+          <p:nvPr/>
+        </p:nvSpPr>
+        <p:spPr>
+          <a:xfrm>
+            <a:off x="9631375" y="6291072"/>
+            <a:ext cx="1828800" cy="274320"/>
+          </a:xfrm>
+          <a:prstGeom prst="rect">
+            <a:avLst/>
+          </a:prstGeom>
+          <a:noFill/>
+        </p:spPr>
+        <p:txBody>
+          <a:bodyPr wrap="none" lIns="0" tIns="0" rIns="0" bIns="0">
+            <a:spAutoFit/>
+          </a:bodyPr>
+          <a:lstStyle/>
           <a:p>
             <a:pPr algn="r">
               <a:defRPr sz="900">
@@ -5470,14 +5614,14 @@
       </p:sp>
       <p:sp>
         <p:nvSpPr>
-          <p:cNvPr id="7" name="Rounded Rectangle 6"/>
+          <p:cNvPr id="9" name="Rounded Rectangle 8"/>
           <p:cNvSpPr/>
           <p:nvPr/>
         </p:nvSpPr>
         <p:spPr>
           <a:xfrm>
-            <a:off x="731520" y="1463040"/>
-            <a:ext cx="10728655" cy="960120"/>
+            <a:off x="731520" y="1389888"/>
+            <a:ext cx="10728655" cy="1005840"/>
           </a:xfrm>
           <a:prstGeom prst="roundRect">
             <a:avLst/>
@@ -5506,11 +5650,11 @@
           </a:fontRef>
         </p:style>
         <p:txBody>
-          <a:bodyPr rtlCol="0" anchor="ctr" wrap="square" lIns="274320" tIns="109728"/>
+          <a:bodyPr rtlCol="0" anchor="ctr" wrap="square" lIns="228600" rIns="182880" tIns="109728" bIns="73152"/>
           <a:lstStyle/>
           <a:p>
             <a:pPr algn="ctr">
-              <a:defRPr sz="1300" b="1">
+              <a:defRPr sz="1150" b="1">
                 <a:solidFill>
                   <a:srgbClr val="801818"/>
                 </a:solidFill>
@@ -5523,7 +5667,10 @@
           </a:p>
           <a:p>
             <a:pPr>
-              <a:defRPr sz="1100">
+              <a:spcBef>
+                <a:spcPts val="200"/>
+              </a:spcBef>
+              <a:defRPr sz="1000">
                 <a:solidFill>
                   <a:srgbClr val="1E293B"/>
                 </a:solidFill>
@@ -5538,14 +5685,14 @@
       </p:sp>
       <p:sp>
         <p:nvSpPr>
-          <p:cNvPr id="8" name="Rounded Rectangle 7"/>
+          <p:cNvPr id="10" name="Rounded Rectangle 9"/>
           <p:cNvSpPr/>
           <p:nvPr/>
         </p:nvSpPr>
         <p:spPr>
           <a:xfrm>
-            <a:off x="731520" y="2606040"/>
-            <a:ext cx="10728655" cy="960120"/>
+            <a:off x="731520" y="2542032"/>
+            <a:ext cx="10728655" cy="1005840"/>
           </a:xfrm>
           <a:prstGeom prst="roundRect">
             <a:avLst/>
@@ -5574,11 +5721,11 @@
           </a:fontRef>
         </p:style>
         <p:txBody>
-          <a:bodyPr rtlCol="0" anchor="ctr" wrap="square" lIns="274320" tIns="109728"/>
+          <a:bodyPr rtlCol="0" anchor="ctr" wrap="square" lIns="228600" rIns="182880" tIns="109728" bIns="73152"/>
           <a:lstStyle/>
           <a:p>
             <a:pPr algn="ctr">
-              <a:defRPr sz="1300" b="1">
+              <a:defRPr sz="1150" b="1">
                 <a:solidFill>
                   <a:srgbClr val="801818"/>
                 </a:solidFill>
@@ -5591,7 +5738,10 @@
           </a:p>
           <a:p>
             <a:pPr>
-              <a:defRPr sz="1100">
+              <a:spcBef>
+                <a:spcPts val="200"/>
+              </a:spcBef>
+              <a:defRPr sz="1000">
                 <a:solidFill>
                   <a:srgbClr val="1E293B"/>
                 </a:solidFill>
@@ -5606,14 +5756,14 @@
       </p:sp>
       <p:sp>
         <p:nvSpPr>
-          <p:cNvPr id="9" name="Rounded Rectangle 8"/>
+          <p:cNvPr id="11" name="Rounded Rectangle 10"/>
           <p:cNvSpPr/>
           <p:nvPr/>
         </p:nvSpPr>
         <p:spPr>
           <a:xfrm>
-            <a:off x="731520" y="3749039"/>
-            <a:ext cx="10728655" cy="960120"/>
+            <a:off x="731520" y="3694176"/>
+            <a:ext cx="10728655" cy="1005840"/>
           </a:xfrm>
           <a:prstGeom prst="roundRect">
             <a:avLst/>
@@ -5642,11 +5792,11 @@
           </a:fontRef>
         </p:style>
         <p:txBody>
-          <a:bodyPr rtlCol="0" anchor="ctr" wrap="square" lIns="274320" tIns="109728"/>
+          <a:bodyPr rtlCol="0" anchor="ctr" wrap="square" lIns="228600" rIns="182880" tIns="109728" bIns="73152"/>
           <a:lstStyle/>
           <a:p>
             <a:pPr algn="ctr">
-              <a:defRPr sz="1300" b="1">
+              <a:defRPr sz="1150" b="1">
                 <a:solidFill>
                   <a:srgbClr val="801818"/>
                 </a:solidFill>
@@ -5659,7 +5809,10 @@
           </a:p>
           <a:p>
             <a:pPr>
-              <a:defRPr sz="1100">
+              <a:spcBef>
+                <a:spcPts val="200"/>
+              </a:spcBef>
+              <a:defRPr sz="1000">
                 <a:solidFill>
                   <a:srgbClr val="1E293B"/>
                 </a:solidFill>
@@ -5674,14 +5827,14 @@
       </p:sp>
       <p:sp>
         <p:nvSpPr>
-          <p:cNvPr id="10" name="Rounded Rectangle 9"/>
+          <p:cNvPr id="12" name="Rounded Rectangle 11"/>
           <p:cNvSpPr/>
           <p:nvPr/>
         </p:nvSpPr>
         <p:spPr>
           <a:xfrm>
-            <a:off x="731520" y="4892040"/>
-            <a:ext cx="10728655" cy="960120"/>
+            <a:off x="731520" y="4846320"/>
+            <a:ext cx="10728655" cy="1005840"/>
           </a:xfrm>
           <a:prstGeom prst="roundRect">
             <a:avLst/>
@@ -5710,11 +5863,11 @@
           </a:fontRef>
         </p:style>
         <p:txBody>
-          <a:bodyPr rtlCol="0" anchor="ctr" wrap="square" lIns="274320" tIns="109728"/>
+          <a:bodyPr rtlCol="0" anchor="ctr" wrap="square" lIns="228600" rIns="182880" tIns="109728" bIns="73152"/>
           <a:lstStyle/>
           <a:p>
             <a:pPr algn="ctr">
-              <a:defRPr sz="1300" b="1">
+              <a:defRPr sz="1150" b="1">
                 <a:solidFill>
                   <a:srgbClr val="801818"/>
                 </a:solidFill>
@@ -5727,7 +5880,10 @@
           </a:p>
           <a:p>
             <a:pPr>
-              <a:defRPr sz="1100">
+              <a:spcBef>
+                <a:spcPts val="200"/>
+              </a:spcBef>
+              <a:defRPr sz="1000">
                 <a:solidFill>
                   <a:srgbClr val="1E293B"/>
                 </a:solidFill>
@@ -5766,8 +5922,8 @@
         </p:nvSpPr>
         <p:spPr>
           <a:xfrm>
-            <a:off x="731520" y="1188720"/>
-            <a:ext cx="10728655" cy="36576"/>
+            <a:off x="731520" y="1170432"/>
+            <a:ext cx="10728655" cy="27432"/>
           </a:xfrm>
           <a:prstGeom prst="rect">
             <a:avLst/>
@@ -5811,7 +5967,7 @@
         </p:nvSpPr>
         <p:spPr>
           <a:xfrm>
-            <a:off x="731520" y="411480"/>
+            <a:off x="731520" y="365760"/>
             <a:ext cx="7772400" cy="731520"/>
           </a:xfrm>
           <a:prstGeom prst="rect">
@@ -5826,7 +5982,7 @@
           <a:lstStyle/>
           <a:p>
             <a:pPr>
-              <a:defRPr sz="2800" b="1">
+              <a:defRPr sz="2600" b="1">
                 <a:solidFill>
                   <a:srgbClr val="1E293B"/>
                 </a:solidFill>
@@ -5941,8 +6097,8 @@
         </p:nvSpPr>
         <p:spPr>
           <a:xfrm>
-            <a:off x="731520" y="6309360"/>
-            <a:ext cx="10728655" cy="365760"/>
+            <a:off x="731520" y="6291072"/>
+            <a:ext cx="2743200" cy="274320"/>
           </a:xfrm>
           <a:prstGeom prst="rect">
             <a:avLst/>
@@ -5950,7 +6106,7 @@
           <a:noFill/>
         </p:spPr>
         <p:txBody>
-          <a:bodyPr wrap="square" lIns="0" tIns="0" rIns="0" bIns="0">
+          <a:bodyPr wrap="none" lIns="0" tIns="0" rIns="0" bIns="0">
             <a:spAutoFit/>
           </a:bodyPr>
           <a:lstStyle/>
@@ -5967,9 +6123,32 @@
               <a:t>Academic Year 2025-2026</a:t>
             </a:r>
           </a:p>
+        </p:txBody>
+      </p:sp>
+      <p:sp>
+        <p:nvSpPr>
+          <p:cNvPr id="7" name="TextBox 6"/>
+          <p:cNvSpPr txBox="1"/>
+          <p:nvPr/>
+        </p:nvSpPr>
+        <p:spPr>
+          <a:xfrm>
+            <a:off x="3474720" y="6291072"/>
+            <a:ext cx="5242255" cy="274320"/>
+          </a:xfrm>
+          <a:prstGeom prst="rect">
+            <a:avLst/>
+          </a:prstGeom>
+          <a:noFill/>
+        </p:spPr>
+        <p:txBody>
+          <a:bodyPr wrap="none" lIns="0" tIns="0" rIns="0" bIns="0">
+            <a:spAutoFit/>
+          </a:bodyPr>
+          <a:lstStyle/>
           <a:p>
             <a:pPr algn="ctr">
-              <a:defRPr sz="900" b="1">
+              <a:defRPr sz="850" b="1">
                 <a:solidFill>
                   <a:srgbClr val="801818"/>
                 </a:solidFill>
@@ -5980,6 +6159,29 @@
               <a:t>DEPARTMENT OF COMPUTER ENGINEERING  •  SILVER OAK UNIVERSITY</a:t>
             </a:r>
           </a:p>
+        </p:txBody>
+      </p:sp>
+      <p:sp>
+        <p:nvSpPr>
+          <p:cNvPr id="8" name="TextBox 7"/>
+          <p:cNvSpPr txBox="1"/>
+          <p:nvPr/>
+        </p:nvSpPr>
+        <p:spPr>
+          <a:xfrm>
+            <a:off x="9631375" y="6291072"/>
+            <a:ext cx="1828800" cy="274320"/>
+          </a:xfrm>
+          <a:prstGeom prst="rect">
+            <a:avLst/>
+          </a:prstGeom>
+          <a:noFill/>
+        </p:spPr>
+        <p:txBody>
+          <a:bodyPr wrap="none" lIns="0" tIns="0" rIns="0" bIns="0">
+            <a:spAutoFit/>
+          </a:bodyPr>
+          <a:lstStyle/>
           <a:p>
             <a:pPr algn="r">
               <a:defRPr sz="900">
@@ -5997,14 +6199,14 @@
       </p:sp>
       <p:sp>
         <p:nvSpPr>
-          <p:cNvPr id="7" name="Rounded Rectangle 6"/>
+          <p:cNvPr id="9" name="Rounded Rectangle 8"/>
           <p:cNvSpPr/>
           <p:nvPr/>
         </p:nvSpPr>
         <p:spPr>
           <a:xfrm>
-            <a:off x="731520" y="1463040"/>
-            <a:ext cx="10728655" cy="777240"/>
+            <a:off x="731520" y="1389888"/>
+            <a:ext cx="10728655" cy="822960"/>
           </a:xfrm>
           <a:prstGeom prst="roundRect">
             <a:avLst/>
@@ -6033,11 +6235,11 @@
           </a:fontRef>
         </p:style>
         <p:txBody>
-          <a:bodyPr rtlCol="0" anchor="ctr" wrap="square" lIns="274320" tIns="109728"/>
+          <a:bodyPr rtlCol="0" anchor="ctr" wrap="square" lIns="228600" rIns="182880" tIns="73152" bIns="73152"/>
           <a:lstStyle/>
           <a:p>
             <a:pPr algn="ctr">
-              <a:defRPr sz="1300" b="1">
+              <a:defRPr sz="1100" b="1">
                 <a:solidFill>
                   <a:srgbClr val="801818"/>
                 </a:solidFill>
@@ -6060,14 +6262,14 @@
       </p:sp>
       <p:sp>
         <p:nvSpPr>
-          <p:cNvPr id="8" name="Rounded Rectangle 7"/>
+          <p:cNvPr id="10" name="Rounded Rectangle 9"/>
           <p:cNvSpPr/>
           <p:nvPr/>
         </p:nvSpPr>
         <p:spPr>
           <a:xfrm>
-            <a:off x="731520" y="2359152"/>
-            <a:ext cx="10728655" cy="777240"/>
+            <a:off x="731520" y="2304288"/>
+            <a:ext cx="10728655" cy="822960"/>
           </a:xfrm>
           <a:prstGeom prst="roundRect">
             <a:avLst/>
@@ -6096,11 +6298,11 @@
           </a:fontRef>
         </p:style>
         <p:txBody>
-          <a:bodyPr rtlCol="0" anchor="ctr" wrap="square" lIns="274320" tIns="109728"/>
+          <a:bodyPr rtlCol="0" anchor="ctr" wrap="square" lIns="228600" rIns="182880" tIns="73152" bIns="73152"/>
           <a:lstStyle/>
           <a:p>
             <a:pPr algn="ctr">
-              <a:defRPr sz="1300" b="1">
+              <a:defRPr sz="1100" b="1">
                 <a:solidFill>
                   <a:srgbClr val="801818"/>
                 </a:solidFill>
@@ -6123,14 +6325,14 @@
       </p:sp>
       <p:sp>
         <p:nvSpPr>
-          <p:cNvPr id="9" name="Rounded Rectangle 8"/>
+          <p:cNvPr id="11" name="Rounded Rectangle 10"/>
           <p:cNvSpPr/>
           <p:nvPr/>
         </p:nvSpPr>
         <p:spPr>
           <a:xfrm>
-            <a:off x="731520" y="3255264"/>
-            <a:ext cx="10728655" cy="777240"/>
+            <a:off x="731520" y="3218688"/>
+            <a:ext cx="10728655" cy="822960"/>
           </a:xfrm>
           <a:prstGeom prst="roundRect">
             <a:avLst/>
@@ -6159,11 +6361,11 @@
           </a:fontRef>
         </p:style>
         <p:txBody>
-          <a:bodyPr rtlCol="0" anchor="ctr" wrap="square" lIns="274320" tIns="109728"/>
+          <a:bodyPr rtlCol="0" anchor="ctr" wrap="square" lIns="228600" rIns="182880" tIns="73152" bIns="73152"/>
           <a:lstStyle/>
           <a:p>
             <a:pPr algn="ctr">
-              <a:defRPr sz="1300" b="1">
+              <a:defRPr sz="1100" b="1">
                 <a:solidFill>
                   <a:srgbClr val="801818"/>
                 </a:solidFill>
@@ -6186,14 +6388,14 @@
       </p:sp>
       <p:sp>
         <p:nvSpPr>
-          <p:cNvPr id="10" name="Rounded Rectangle 9"/>
+          <p:cNvPr id="12" name="Rounded Rectangle 11"/>
           <p:cNvSpPr/>
           <p:nvPr/>
         </p:nvSpPr>
         <p:spPr>
           <a:xfrm>
-            <a:off x="731520" y="4151376"/>
-            <a:ext cx="10728655" cy="777240"/>
+            <a:off x="731520" y="4133087"/>
+            <a:ext cx="10728655" cy="822960"/>
           </a:xfrm>
           <a:prstGeom prst="roundRect">
             <a:avLst/>
@@ -6222,11 +6424,11 @@
           </a:fontRef>
         </p:style>
         <p:txBody>
-          <a:bodyPr rtlCol="0" anchor="ctr" wrap="square" lIns="274320" tIns="109728"/>
+          <a:bodyPr rtlCol="0" anchor="ctr" wrap="square" lIns="228600" rIns="182880" tIns="73152" bIns="73152"/>
           <a:lstStyle/>
           <a:p>
             <a:pPr algn="ctr">
-              <a:defRPr sz="1300" b="1">
+              <a:defRPr sz="1100" b="1">
                 <a:solidFill>
                   <a:srgbClr val="801818"/>
                 </a:solidFill>
@@ -6249,14 +6451,14 @@
       </p:sp>
       <p:sp>
         <p:nvSpPr>
-          <p:cNvPr id="11" name="Rounded Rectangle 10"/>
+          <p:cNvPr id="13" name="Rounded Rectangle 12"/>
           <p:cNvSpPr/>
           <p:nvPr/>
         </p:nvSpPr>
         <p:spPr>
           <a:xfrm>
             <a:off x="731520" y="5047488"/>
-            <a:ext cx="10728655" cy="777240"/>
+            <a:ext cx="10728655" cy="822960"/>
           </a:xfrm>
           <a:prstGeom prst="roundRect">
             <a:avLst/>
@@ -6285,11 +6487,11 @@
           </a:fontRef>
         </p:style>
         <p:txBody>
-          <a:bodyPr rtlCol="0" anchor="ctr" wrap="square" lIns="274320" tIns="109728"/>
+          <a:bodyPr rtlCol="0" anchor="ctr" wrap="square" lIns="228600" rIns="182880" tIns="73152" bIns="73152"/>
           <a:lstStyle/>
           <a:p>
             <a:pPr algn="ctr">
-              <a:defRPr sz="1300" b="1">
+              <a:defRPr sz="1100" b="1">
                 <a:solidFill>
                   <a:srgbClr val="801818"/>
                 </a:solidFill>
@@ -6336,8 +6538,8 @@
         </p:nvSpPr>
         <p:spPr>
           <a:xfrm>
-            <a:off x="731520" y="1188720"/>
-            <a:ext cx="10728655" cy="36576"/>
+            <a:off x="731520" y="1170432"/>
+            <a:ext cx="10728655" cy="27432"/>
           </a:xfrm>
           <a:prstGeom prst="rect">
             <a:avLst/>
@@ -6381,7 +6583,7 @@
         </p:nvSpPr>
         <p:spPr>
           <a:xfrm>
-            <a:off x="731520" y="411480"/>
+            <a:off x="731520" y="365760"/>
             <a:ext cx="7772400" cy="731520"/>
           </a:xfrm>
           <a:prstGeom prst="rect">
@@ -6396,7 +6598,7 @@
           <a:lstStyle/>
           <a:p>
             <a:pPr>
-              <a:defRPr sz="2800" b="1">
+              <a:defRPr sz="2600" b="1">
                 <a:solidFill>
                   <a:srgbClr val="1E293B"/>
                 </a:solidFill>
@@ -6511,8 +6713,8 @@
         </p:nvSpPr>
         <p:spPr>
           <a:xfrm>
-            <a:off x="731520" y="6309360"/>
-            <a:ext cx="10728655" cy="365760"/>
+            <a:off x="731520" y="6291072"/>
+            <a:ext cx="2743200" cy="274320"/>
           </a:xfrm>
           <a:prstGeom prst="rect">
             <a:avLst/>
@@ -6520,7 +6722,7 @@
           <a:noFill/>
         </p:spPr>
         <p:txBody>
-          <a:bodyPr wrap="square" lIns="0" tIns="0" rIns="0" bIns="0">
+          <a:bodyPr wrap="none" lIns="0" tIns="0" rIns="0" bIns="0">
             <a:spAutoFit/>
           </a:bodyPr>
           <a:lstStyle/>
@@ -6537,9 +6739,32 @@
               <a:t>Academic Year 2025-2026</a:t>
             </a:r>
           </a:p>
+        </p:txBody>
+      </p:sp>
+      <p:sp>
+        <p:nvSpPr>
+          <p:cNvPr id="7" name="TextBox 6"/>
+          <p:cNvSpPr txBox="1"/>
+          <p:nvPr/>
+        </p:nvSpPr>
+        <p:spPr>
+          <a:xfrm>
+            <a:off x="3474720" y="6291072"/>
+            <a:ext cx="5242255" cy="274320"/>
+          </a:xfrm>
+          <a:prstGeom prst="rect">
+            <a:avLst/>
+          </a:prstGeom>
+          <a:noFill/>
+        </p:spPr>
+        <p:txBody>
+          <a:bodyPr wrap="none" lIns="0" tIns="0" rIns="0" bIns="0">
+            <a:spAutoFit/>
+          </a:bodyPr>
+          <a:lstStyle/>
           <a:p>
             <a:pPr algn="ctr">
-              <a:defRPr sz="900" b="1">
+              <a:defRPr sz="850" b="1">
                 <a:solidFill>
                   <a:srgbClr val="801818"/>
                 </a:solidFill>
@@ -6550,6 +6775,29 @@
               <a:t>DEPARTMENT OF COMPUTER ENGINEERING  •  SILVER OAK UNIVERSITY</a:t>
             </a:r>
           </a:p>
+        </p:txBody>
+      </p:sp>
+      <p:sp>
+        <p:nvSpPr>
+          <p:cNvPr id="8" name="TextBox 7"/>
+          <p:cNvSpPr txBox="1"/>
+          <p:nvPr/>
+        </p:nvSpPr>
+        <p:spPr>
+          <a:xfrm>
+            <a:off x="9631375" y="6291072"/>
+            <a:ext cx="1828800" cy="274320"/>
+          </a:xfrm>
+          <a:prstGeom prst="rect">
+            <a:avLst/>
+          </a:prstGeom>
+          <a:noFill/>
+        </p:spPr>
+        <p:txBody>
+          <a:bodyPr wrap="none" lIns="0" tIns="0" rIns="0" bIns="0">
+            <a:spAutoFit/>
+          </a:bodyPr>
+          <a:lstStyle/>
           <a:p>
             <a:pPr algn="r">
               <a:defRPr sz="900">
@@ -6567,14 +6815,14 @@
       </p:sp>
       <p:sp>
         <p:nvSpPr>
-          <p:cNvPr id="7" name="Rectangle 6"/>
+          <p:cNvPr id="9" name="Rectangle 8"/>
           <p:cNvSpPr/>
           <p:nvPr/>
         </p:nvSpPr>
         <p:spPr>
           <a:xfrm>
-            <a:off x="731520" y="1463040"/>
-            <a:ext cx="10728655" cy="658368"/>
+            <a:off x="731520" y="1389888"/>
+            <a:ext cx="10728655" cy="676656"/>
           </a:xfrm>
           <a:prstGeom prst="rect">
             <a:avLst/>
@@ -6603,11 +6851,11 @@
           </a:fontRef>
         </p:style>
         <p:txBody>
-          <a:bodyPr rtlCol="0" anchor="ctr" wrap="square" lIns="228600" tIns="91440"/>
+          <a:bodyPr rtlCol="0" anchor="ctr" wrap="square" lIns="182880" rIns="182880" tIns="54864" bIns="54864"/>
           <a:lstStyle/>
           <a:p>
             <a:pPr algn="ctr">
-              <a:defRPr sz="1100">
+              <a:defRPr sz="950">
                 <a:solidFill>
                   <a:srgbClr val="1E293B"/>
                 </a:solidFill>
@@ -6622,14 +6870,14 @@
       </p:sp>
       <p:sp>
         <p:nvSpPr>
-          <p:cNvPr id="8" name="Rectangle 7"/>
+          <p:cNvPr id="10" name="Rectangle 9"/>
           <p:cNvSpPr/>
           <p:nvPr/>
         </p:nvSpPr>
         <p:spPr>
           <a:xfrm>
-            <a:off x="731520" y="2194560"/>
-            <a:ext cx="10728655" cy="658368"/>
+            <a:off x="731520" y="2139696"/>
+            <a:ext cx="10728655" cy="676656"/>
           </a:xfrm>
           <a:prstGeom prst="rect">
             <a:avLst/>
@@ -6658,11 +6906,11 @@
           </a:fontRef>
         </p:style>
         <p:txBody>
-          <a:bodyPr rtlCol="0" anchor="ctr" wrap="square" lIns="228600" tIns="91440"/>
+          <a:bodyPr rtlCol="0" anchor="ctr" wrap="square" lIns="182880" rIns="182880" tIns="54864" bIns="54864"/>
           <a:lstStyle/>
           <a:p>
             <a:pPr algn="ctr">
-              <a:defRPr sz="1100">
+              <a:defRPr sz="950">
                 <a:solidFill>
                   <a:srgbClr val="1E293B"/>
                 </a:solidFill>
@@ -6677,14 +6925,14 @@
       </p:sp>
       <p:sp>
         <p:nvSpPr>
-          <p:cNvPr id="9" name="Rectangle 8"/>
+          <p:cNvPr id="11" name="Rectangle 10"/>
           <p:cNvSpPr/>
           <p:nvPr/>
         </p:nvSpPr>
         <p:spPr>
           <a:xfrm>
-            <a:off x="731520" y="2926080"/>
-            <a:ext cx="10728655" cy="658368"/>
+            <a:off x="731520" y="2889504"/>
+            <a:ext cx="10728655" cy="676656"/>
           </a:xfrm>
           <a:prstGeom prst="rect">
             <a:avLst/>
@@ -6713,11 +6961,11 @@
           </a:fontRef>
         </p:style>
         <p:txBody>
-          <a:bodyPr rtlCol="0" anchor="ctr" wrap="square" lIns="228600" tIns="91440"/>
+          <a:bodyPr rtlCol="0" anchor="ctr" wrap="square" lIns="182880" rIns="182880" tIns="54864" bIns="54864"/>
           <a:lstStyle/>
           <a:p>
             <a:pPr algn="ctr">
-              <a:defRPr sz="1100">
+              <a:defRPr sz="950">
                 <a:solidFill>
                   <a:srgbClr val="1E293B"/>
                 </a:solidFill>
@@ -6732,14 +6980,14 @@
       </p:sp>
       <p:sp>
         <p:nvSpPr>
-          <p:cNvPr id="10" name="Rectangle 9"/>
+          <p:cNvPr id="12" name="Rectangle 11"/>
           <p:cNvSpPr/>
           <p:nvPr/>
         </p:nvSpPr>
         <p:spPr>
           <a:xfrm>
-            <a:off x="731520" y="3657600"/>
-            <a:ext cx="10728655" cy="658368"/>
+            <a:off x="731520" y="3639312"/>
+            <a:ext cx="10728655" cy="676656"/>
           </a:xfrm>
           <a:prstGeom prst="rect">
             <a:avLst/>
@@ -6768,11 +7016,11 @@
           </a:fontRef>
         </p:style>
         <p:txBody>
-          <a:bodyPr rtlCol="0" anchor="ctr" wrap="square" lIns="228600" tIns="91440"/>
+          <a:bodyPr rtlCol="0" anchor="ctr" wrap="square" lIns="182880" rIns="182880" tIns="54864" bIns="54864"/>
           <a:lstStyle/>
           <a:p>
             <a:pPr algn="ctr">
-              <a:defRPr sz="1100">
+              <a:defRPr sz="950">
                 <a:solidFill>
                   <a:srgbClr val="1E293B"/>
                 </a:solidFill>
@@ -6787,14 +7035,14 @@
       </p:sp>
       <p:sp>
         <p:nvSpPr>
-          <p:cNvPr id="11" name="Rectangle 10"/>
+          <p:cNvPr id="13" name="Rectangle 12"/>
           <p:cNvSpPr/>
           <p:nvPr/>
         </p:nvSpPr>
         <p:spPr>
           <a:xfrm>
             <a:off x="731520" y="4389120"/>
-            <a:ext cx="10728655" cy="658368"/>
+            <a:ext cx="10728655" cy="676656"/>
           </a:xfrm>
           <a:prstGeom prst="rect">
             <a:avLst/>
@@ -6823,11 +7071,11 @@
           </a:fontRef>
         </p:style>
         <p:txBody>
-          <a:bodyPr rtlCol="0" anchor="ctr" wrap="square" lIns="228600" tIns="91440"/>
+          <a:bodyPr rtlCol="0" anchor="ctr" wrap="square" lIns="182880" rIns="182880" tIns="54864" bIns="54864"/>
           <a:lstStyle/>
           <a:p>
             <a:pPr algn="ctr">
-              <a:defRPr sz="1100">
+              <a:defRPr sz="950">
                 <a:solidFill>
                   <a:srgbClr val="1E293B"/>
                 </a:solidFill>
@@ -6842,14 +7090,14 @@
       </p:sp>
       <p:sp>
         <p:nvSpPr>
-          <p:cNvPr id="12" name="Rectangle 11"/>
+          <p:cNvPr id="14" name="Rectangle 13"/>
           <p:cNvSpPr/>
           <p:nvPr/>
         </p:nvSpPr>
         <p:spPr>
           <a:xfrm>
-            <a:off x="731520" y="5120640"/>
-            <a:ext cx="10728655" cy="658368"/>
+            <a:off x="731520" y="5138927"/>
+            <a:ext cx="10728655" cy="676656"/>
           </a:xfrm>
           <a:prstGeom prst="rect">
             <a:avLst/>
@@ -6878,11 +7126,11 @@
           </a:fontRef>
         </p:style>
         <p:txBody>
-          <a:bodyPr rtlCol="0" anchor="ctr" wrap="square" lIns="228600" tIns="91440"/>
+          <a:bodyPr rtlCol="0" anchor="ctr" wrap="square" lIns="182880" rIns="182880" tIns="54864" bIns="54864"/>
           <a:lstStyle/>
           <a:p>
             <a:pPr algn="ctr">
-              <a:defRPr sz="1100">
+              <a:defRPr sz="950">
                 <a:solidFill>
                   <a:srgbClr val="1E293B"/>
                 </a:solidFill>
@@ -6921,8 +7169,8 @@
         </p:nvSpPr>
         <p:spPr>
           <a:xfrm>
-            <a:off x="731520" y="1188720"/>
-            <a:ext cx="10728655" cy="36576"/>
+            <a:off x="731520" y="1170432"/>
+            <a:ext cx="10728655" cy="27432"/>
           </a:xfrm>
           <a:prstGeom prst="rect">
             <a:avLst/>
@@ -6966,7 +7214,7 @@
         </p:nvSpPr>
         <p:spPr>
           <a:xfrm>
-            <a:off x="731520" y="411480"/>
+            <a:off x="731520" y="365760"/>
             <a:ext cx="7772400" cy="731520"/>
           </a:xfrm>
           <a:prstGeom prst="rect">
@@ -6981,7 +7229,7 @@
           <a:lstStyle/>
           <a:p>
             <a:pPr>
-              <a:defRPr sz="2800" b="1">
+              <a:defRPr sz="2600" b="1">
                 <a:solidFill>
                   <a:srgbClr val="1E293B"/>
                 </a:solidFill>
@@ -7096,8 +7344,8 @@
         </p:nvSpPr>
         <p:spPr>
           <a:xfrm>
-            <a:off x="731520" y="6309360"/>
-            <a:ext cx="10728655" cy="365760"/>
+            <a:off x="731520" y="6291072"/>
+            <a:ext cx="2743200" cy="274320"/>
           </a:xfrm>
           <a:prstGeom prst="rect">
             <a:avLst/>
@@ -7105,7 +7353,7 @@
           <a:noFill/>
         </p:spPr>
         <p:txBody>
-          <a:bodyPr wrap="square" lIns="0" tIns="0" rIns="0" bIns="0">
+          <a:bodyPr wrap="none" lIns="0" tIns="0" rIns="0" bIns="0">
             <a:spAutoFit/>
           </a:bodyPr>
           <a:lstStyle/>
@@ -7122,9 +7370,32 @@
               <a:t>Academic Year 2025-2026</a:t>
             </a:r>
           </a:p>
+        </p:txBody>
+      </p:sp>
+      <p:sp>
+        <p:nvSpPr>
+          <p:cNvPr id="7" name="TextBox 6"/>
+          <p:cNvSpPr txBox="1"/>
+          <p:nvPr/>
+        </p:nvSpPr>
+        <p:spPr>
+          <a:xfrm>
+            <a:off x="3474720" y="6291072"/>
+            <a:ext cx="5242255" cy="274320"/>
+          </a:xfrm>
+          <a:prstGeom prst="rect">
+            <a:avLst/>
+          </a:prstGeom>
+          <a:noFill/>
+        </p:spPr>
+        <p:txBody>
+          <a:bodyPr wrap="none" lIns="0" tIns="0" rIns="0" bIns="0">
+            <a:spAutoFit/>
+          </a:bodyPr>
+          <a:lstStyle/>
           <a:p>
             <a:pPr algn="ctr">
-              <a:defRPr sz="900" b="1">
+              <a:defRPr sz="850" b="1">
                 <a:solidFill>
                   <a:srgbClr val="801818"/>
                 </a:solidFill>
@@ -7135,6 +7406,29 @@
               <a:t>DEPARTMENT OF COMPUTER ENGINEERING  •  SILVER OAK UNIVERSITY</a:t>
             </a:r>
           </a:p>
+        </p:txBody>
+      </p:sp>
+      <p:sp>
+        <p:nvSpPr>
+          <p:cNvPr id="8" name="TextBox 7"/>
+          <p:cNvSpPr txBox="1"/>
+          <p:nvPr/>
+        </p:nvSpPr>
+        <p:spPr>
+          <a:xfrm>
+            <a:off x="9631375" y="6291072"/>
+            <a:ext cx="1828800" cy="274320"/>
+          </a:xfrm>
+          <a:prstGeom prst="rect">
+            <a:avLst/>
+          </a:prstGeom>
+          <a:noFill/>
+        </p:spPr>
+        <p:txBody>
+          <a:bodyPr wrap="none" lIns="0" tIns="0" rIns="0" bIns="0">
+            <a:spAutoFit/>
+          </a:bodyPr>
+          <a:lstStyle/>
           <a:p>
             <a:pPr algn="r">
               <a:defRPr sz="900">
@@ -7152,14 +7446,14 @@
       </p:sp>
       <p:sp>
         <p:nvSpPr>
-          <p:cNvPr id="7" name="Rounded Rectangle 6"/>
+          <p:cNvPr id="9" name="Rounded Rectangle 8"/>
           <p:cNvSpPr/>
           <p:nvPr/>
         </p:nvSpPr>
         <p:spPr>
           <a:xfrm>
-            <a:off x="1097280" y="1554480"/>
-            <a:ext cx="4754880" cy="594360"/>
+            <a:off x="914400" y="1417320"/>
+            <a:ext cx="4937760" cy="621792"/>
           </a:xfrm>
           <a:prstGeom prst="roundRect">
             <a:avLst/>
@@ -7188,11 +7482,11 @@
           </a:fontRef>
         </p:style>
         <p:txBody>
-          <a:bodyPr rtlCol="0" anchor="ctr"/>
+          <a:bodyPr rtlCol="0" anchor="ctr" lIns="182880" rIns="182880"/>
           <a:lstStyle/>
           <a:p>
             <a:pPr algn="ctr">
-              <a:defRPr sz="1300" b="1">
+              <a:defRPr sz="1200" b="1">
                 <a:solidFill>
                   <a:srgbClr val="1E293B"/>
                 </a:solidFill>
@@ -7207,14 +7501,14 @@
       </p:sp>
       <p:sp>
         <p:nvSpPr>
-          <p:cNvPr id="8" name="Rounded Rectangle 7"/>
+          <p:cNvPr id="10" name="Rounded Rectangle 9"/>
           <p:cNvSpPr/>
           <p:nvPr/>
         </p:nvSpPr>
         <p:spPr>
           <a:xfrm>
-            <a:off x="1097280" y="2286000"/>
-            <a:ext cx="4754880" cy="594360"/>
+            <a:off x="914400" y="2167128"/>
+            <a:ext cx="4937760" cy="621792"/>
           </a:xfrm>
           <a:prstGeom prst="roundRect">
             <a:avLst/>
@@ -7243,11 +7537,11 @@
           </a:fontRef>
         </p:style>
         <p:txBody>
-          <a:bodyPr rtlCol="0" anchor="ctr"/>
+          <a:bodyPr rtlCol="0" anchor="ctr" lIns="182880" rIns="182880"/>
           <a:lstStyle/>
           <a:p>
             <a:pPr algn="ctr">
-              <a:defRPr sz="1300" b="1">
+              <a:defRPr sz="1200" b="1">
                 <a:solidFill>
                   <a:srgbClr val="1E293B"/>
                 </a:solidFill>
@@ -7262,14 +7556,14 @@
       </p:sp>
       <p:sp>
         <p:nvSpPr>
-          <p:cNvPr id="9" name="Rounded Rectangle 8"/>
+          <p:cNvPr id="11" name="Rounded Rectangle 10"/>
           <p:cNvSpPr/>
           <p:nvPr/>
         </p:nvSpPr>
         <p:spPr>
           <a:xfrm>
-            <a:off x="1097280" y="3017520"/>
-            <a:ext cx="4754880" cy="594360"/>
+            <a:off x="914400" y="2916936"/>
+            <a:ext cx="4937760" cy="621792"/>
           </a:xfrm>
           <a:prstGeom prst="roundRect">
             <a:avLst/>
@@ -7298,11 +7592,11 @@
           </a:fontRef>
         </p:style>
         <p:txBody>
-          <a:bodyPr rtlCol="0" anchor="ctr"/>
+          <a:bodyPr rtlCol="0" anchor="ctr" lIns="182880" rIns="182880"/>
           <a:lstStyle/>
           <a:p>
             <a:pPr algn="ctr">
-              <a:defRPr sz="1300" b="1">
+              <a:defRPr sz="1200" b="1">
                 <a:solidFill>
                   <a:srgbClr val="1E293B"/>
                 </a:solidFill>
@@ -7317,14 +7611,14 @@
       </p:sp>
       <p:sp>
         <p:nvSpPr>
-          <p:cNvPr id="10" name="Rounded Rectangle 9"/>
+          <p:cNvPr id="12" name="Rounded Rectangle 11"/>
           <p:cNvSpPr/>
           <p:nvPr/>
         </p:nvSpPr>
         <p:spPr>
           <a:xfrm>
-            <a:off x="1097280" y="3749040"/>
-            <a:ext cx="4754880" cy="594360"/>
+            <a:off x="914400" y="3666744"/>
+            <a:ext cx="4937760" cy="621792"/>
           </a:xfrm>
           <a:prstGeom prst="roundRect">
             <a:avLst/>
@@ -7353,11 +7647,11 @@
           </a:fontRef>
         </p:style>
         <p:txBody>
-          <a:bodyPr rtlCol="0" anchor="ctr"/>
+          <a:bodyPr rtlCol="0" anchor="ctr" lIns="182880" rIns="182880"/>
           <a:lstStyle/>
           <a:p>
             <a:pPr algn="ctr">
-              <a:defRPr sz="1300" b="1">
+              <a:defRPr sz="1200" b="1">
                 <a:solidFill>
                   <a:srgbClr val="1E293B"/>
                 </a:solidFill>
@@ -7372,14 +7666,14 @@
       </p:sp>
       <p:sp>
         <p:nvSpPr>
-          <p:cNvPr id="11" name="Rounded Rectangle 10"/>
+          <p:cNvPr id="13" name="Rounded Rectangle 12"/>
           <p:cNvSpPr/>
           <p:nvPr/>
         </p:nvSpPr>
         <p:spPr>
           <a:xfrm>
-            <a:off x="1097280" y="4480560"/>
-            <a:ext cx="4754880" cy="594360"/>
+            <a:off x="914400" y="4416552"/>
+            <a:ext cx="4937760" cy="621792"/>
           </a:xfrm>
           <a:prstGeom prst="roundRect">
             <a:avLst/>
@@ -7408,11 +7702,11 @@
           </a:fontRef>
         </p:style>
         <p:txBody>
-          <a:bodyPr rtlCol="0" anchor="ctr"/>
+          <a:bodyPr rtlCol="0" anchor="ctr" lIns="182880" rIns="182880"/>
           <a:lstStyle/>
           <a:p>
             <a:pPr algn="ctr">
-              <a:defRPr sz="1300" b="1">
+              <a:defRPr sz="1200" b="1">
                 <a:solidFill>
                   <a:srgbClr val="1E293B"/>
                 </a:solidFill>
@@ -7427,14 +7721,14 @@
       </p:sp>
       <p:sp>
         <p:nvSpPr>
-          <p:cNvPr id="12" name="Rounded Rectangle 11"/>
+          <p:cNvPr id="14" name="Rounded Rectangle 13"/>
           <p:cNvSpPr/>
           <p:nvPr/>
         </p:nvSpPr>
         <p:spPr>
           <a:xfrm>
-            <a:off x="1097280" y="5212080"/>
-            <a:ext cx="4754880" cy="594360"/>
+            <a:off x="914400" y="5166359"/>
+            <a:ext cx="4937760" cy="621792"/>
           </a:xfrm>
           <a:prstGeom prst="roundRect">
             <a:avLst/>
@@ -7463,11 +7757,11 @@
           </a:fontRef>
         </p:style>
         <p:txBody>
-          <a:bodyPr rtlCol="0" anchor="ctr"/>
+          <a:bodyPr rtlCol="0" anchor="ctr" lIns="182880" rIns="182880"/>
           <a:lstStyle/>
           <a:p>
             <a:pPr algn="ctr">
-              <a:defRPr sz="1300" b="1">
+              <a:defRPr sz="1200" b="1">
                 <a:solidFill>
                   <a:srgbClr val="1E293B"/>
                 </a:solidFill>
@@ -7482,14 +7776,14 @@
       </p:sp>
       <p:sp>
         <p:nvSpPr>
-          <p:cNvPr id="13" name="Rounded Rectangle 12"/>
+          <p:cNvPr id="15" name="Rounded Rectangle 14"/>
           <p:cNvSpPr/>
           <p:nvPr/>
         </p:nvSpPr>
         <p:spPr>
           <a:xfrm>
-            <a:off x="6400800" y="1554480"/>
-            <a:ext cx="4754880" cy="594360"/>
+            <a:off x="6309360" y="1417320"/>
+            <a:ext cx="4937760" cy="621792"/>
           </a:xfrm>
           <a:prstGeom prst="roundRect">
             <a:avLst/>
@@ -7518,11 +7812,11 @@
           </a:fontRef>
         </p:style>
         <p:txBody>
-          <a:bodyPr rtlCol="0" anchor="ctr"/>
+          <a:bodyPr rtlCol="0" anchor="ctr" lIns="182880" rIns="182880"/>
           <a:lstStyle/>
           <a:p>
             <a:pPr algn="ctr">
-              <a:defRPr sz="1300" b="1">
+              <a:defRPr sz="1200" b="1">
                 <a:solidFill>
                   <a:srgbClr val="1E293B"/>
                 </a:solidFill>
@@ -7537,14 +7831,14 @@
       </p:sp>
       <p:sp>
         <p:nvSpPr>
-          <p:cNvPr id="14" name="Rounded Rectangle 13"/>
+          <p:cNvPr id="16" name="Rounded Rectangle 15"/>
           <p:cNvSpPr/>
           <p:nvPr/>
         </p:nvSpPr>
         <p:spPr>
           <a:xfrm>
-            <a:off x="6400800" y="2286000"/>
-            <a:ext cx="4754880" cy="594360"/>
+            <a:off x="6309360" y="2167128"/>
+            <a:ext cx="4937760" cy="621792"/>
           </a:xfrm>
           <a:prstGeom prst="roundRect">
             <a:avLst/>
@@ -7573,11 +7867,11 @@
           </a:fontRef>
         </p:style>
         <p:txBody>
-          <a:bodyPr rtlCol="0" anchor="ctr"/>
+          <a:bodyPr rtlCol="0" anchor="ctr" lIns="182880" rIns="182880"/>
           <a:lstStyle/>
           <a:p>
             <a:pPr algn="ctr">
-              <a:defRPr sz="1300" b="1">
+              <a:defRPr sz="1200" b="1">
                 <a:solidFill>
                   <a:srgbClr val="1E293B"/>
                 </a:solidFill>
@@ -7592,14 +7886,14 @@
       </p:sp>
       <p:sp>
         <p:nvSpPr>
-          <p:cNvPr id="15" name="Rounded Rectangle 14"/>
+          <p:cNvPr id="17" name="Rounded Rectangle 16"/>
           <p:cNvSpPr/>
           <p:nvPr/>
         </p:nvSpPr>
         <p:spPr>
           <a:xfrm>
-            <a:off x="6400800" y="3017520"/>
-            <a:ext cx="4754880" cy="594360"/>
+            <a:off x="6309360" y="2916936"/>
+            <a:ext cx="4937760" cy="621792"/>
           </a:xfrm>
           <a:prstGeom prst="roundRect">
             <a:avLst/>
@@ -7628,11 +7922,11 @@
           </a:fontRef>
         </p:style>
         <p:txBody>
-          <a:bodyPr rtlCol="0" anchor="ctr"/>
+          <a:bodyPr rtlCol="0" anchor="ctr" lIns="182880" rIns="182880"/>
           <a:lstStyle/>
           <a:p>
             <a:pPr algn="ctr">
-              <a:defRPr sz="1300" b="1">
+              <a:defRPr sz="1200" b="1">
                 <a:solidFill>
                   <a:srgbClr val="1E293B"/>
                 </a:solidFill>
@@ -7647,14 +7941,14 @@
       </p:sp>
       <p:sp>
         <p:nvSpPr>
-          <p:cNvPr id="16" name="Rounded Rectangle 15"/>
+          <p:cNvPr id="18" name="Rounded Rectangle 17"/>
           <p:cNvSpPr/>
           <p:nvPr/>
         </p:nvSpPr>
         <p:spPr>
           <a:xfrm>
-            <a:off x="6400800" y="3749040"/>
-            <a:ext cx="4754880" cy="594360"/>
+            <a:off x="6309360" y="3666744"/>
+            <a:ext cx="4937760" cy="621792"/>
           </a:xfrm>
           <a:prstGeom prst="roundRect">
             <a:avLst/>
@@ -7683,11 +7977,11 @@
           </a:fontRef>
         </p:style>
         <p:txBody>
-          <a:bodyPr rtlCol="0" anchor="ctr"/>
+          <a:bodyPr rtlCol="0" anchor="ctr" lIns="182880" rIns="182880"/>
           <a:lstStyle/>
           <a:p>
             <a:pPr algn="ctr">
-              <a:defRPr sz="1300" b="1">
+              <a:defRPr sz="1200" b="1">
                 <a:solidFill>
                   <a:srgbClr val="1E293B"/>
                 </a:solidFill>
@@ -7702,14 +7996,14 @@
       </p:sp>
       <p:sp>
         <p:nvSpPr>
-          <p:cNvPr id="17" name="Rounded Rectangle 16"/>
+          <p:cNvPr id="19" name="Rounded Rectangle 18"/>
           <p:cNvSpPr/>
           <p:nvPr/>
         </p:nvSpPr>
         <p:spPr>
           <a:xfrm>
-            <a:off x="6400800" y="4480560"/>
-            <a:ext cx="4754880" cy="594360"/>
+            <a:off x="6309360" y="4416552"/>
+            <a:ext cx="4937760" cy="621792"/>
           </a:xfrm>
           <a:prstGeom prst="roundRect">
             <a:avLst/>
@@ -7738,11 +8032,11 @@
           </a:fontRef>
         </p:style>
         <p:txBody>
-          <a:bodyPr rtlCol="0" anchor="ctr"/>
+          <a:bodyPr rtlCol="0" anchor="ctr" lIns="182880" rIns="182880"/>
           <a:lstStyle/>
           <a:p>
             <a:pPr algn="ctr">
-              <a:defRPr sz="1300" b="1">
+              <a:defRPr sz="1200" b="1">
                 <a:solidFill>
                   <a:srgbClr val="1E293B"/>
                 </a:solidFill>
@@ -7757,14 +8051,14 @@
       </p:sp>
       <p:sp>
         <p:nvSpPr>
-          <p:cNvPr id="18" name="Rounded Rectangle 17"/>
+          <p:cNvPr id="20" name="Rounded Rectangle 19"/>
           <p:cNvSpPr/>
           <p:nvPr/>
         </p:nvSpPr>
         <p:spPr>
           <a:xfrm>
-            <a:off x="6400800" y="5212080"/>
-            <a:ext cx="4754880" cy="594360"/>
+            <a:off x="6309360" y="5166359"/>
+            <a:ext cx="4937760" cy="621792"/>
           </a:xfrm>
           <a:prstGeom prst="roundRect">
             <a:avLst/>
@@ -7793,11 +8087,11 @@
           </a:fontRef>
         </p:style>
         <p:txBody>
-          <a:bodyPr rtlCol="0" anchor="ctr"/>
+          <a:bodyPr rtlCol="0" anchor="ctr" lIns="182880" rIns="182880"/>
           <a:lstStyle/>
           <a:p>
             <a:pPr algn="ctr">
-              <a:defRPr sz="1300" b="1">
+              <a:defRPr sz="1200" b="1">
                 <a:solidFill>
                   <a:srgbClr val="1E293B"/>
                 </a:solidFill>
@@ -7836,8 +8130,8 @@
         </p:nvSpPr>
         <p:spPr>
           <a:xfrm>
-            <a:off x="731520" y="1188720"/>
-            <a:ext cx="10728655" cy="36576"/>
+            <a:off x="731520" y="1170432"/>
+            <a:ext cx="10728655" cy="27432"/>
           </a:xfrm>
           <a:prstGeom prst="rect">
             <a:avLst/>
@@ -7881,7 +8175,7 @@
         </p:nvSpPr>
         <p:spPr>
           <a:xfrm>
-            <a:off x="731520" y="411480"/>
+            <a:off x="731520" y="365760"/>
             <a:ext cx="7772400" cy="731520"/>
           </a:xfrm>
           <a:prstGeom prst="rect">
@@ -7896,7 +8190,7 @@
           <a:lstStyle/>
           <a:p>
             <a:pPr>
-              <a:defRPr sz="2800" b="1">
+              <a:defRPr sz="2600" b="1">
                 <a:solidFill>
                   <a:srgbClr val="1E293B"/>
                 </a:solidFill>
@@ -8011,8 +8305,8 @@
         </p:nvSpPr>
         <p:spPr>
           <a:xfrm>
-            <a:off x="731520" y="6309360"/>
-            <a:ext cx="10728655" cy="365760"/>
+            <a:off x="731520" y="6291072"/>
+            <a:ext cx="2743200" cy="274320"/>
           </a:xfrm>
           <a:prstGeom prst="rect">
             <a:avLst/>
@@ -8020,7 +8314,7 @@
           <a:noFill/>
         </p:spPr>
         <p:txBody>
-          <a:bodyPr wrap="square" lIns="0" tIns="0" rIns="0" bIns="0">
+          <a:bodyPr wrap="none" lIns="0" tIns="0" rIns="0" bIns="0">
             <a:spAutoFit/>
           </a:bodyPr>
           <a:lstStyle/>
@@ -8037,9 +8331,32 @@
               <a:t>Academic Year 2025-2026</a:t>
             </a:r>
           </a:p>
+        </p:txBody>
+      </p:sp>
+      <p:sp>
+        <p:nvSpPr>
+          <p:cNvPr id="7" name="TextBox 6"/>
+          <p:cNvSpPr txBox="1"/>
+          <p:nvPr/>
+        </p:nvSpPr>
+        <p:spPr>
+          <a:xfrm>
+            <a:off x="3474720" y="6291072"/>
+            <a:ext cx="5242255" cy="274320"/>
+          </a:xfrm>
+          <a:prstGeom prst="rect">
+            <a:avLst/>
+          </a:prstGeom>
+          <a:noFill/>
+        </p:spPr>
+        <p:txBody>
+          <a:bodyPr wrap="none" lIns="0" tIns="0" rIns="0" bIns="0">
+            <a:spAutoFit/>
+          </a:bodyPr>
+          <a:lstStyle/>
           <a:p>
             <a:pPr algn="ctr">
-              <a:defRPr sz="900" b="1">
+              <a:defRPr sz="850" b="1">
                 <a:solidFill>
                   <a:srgbClr val="801818"/>
                 </a:solidFill>
@@ -8050,6 +8367,29 @@
               <a:t>DEPARTMENT OF COMPUTER ENGINEERING  •  SILVER OAK UNIVERSITY</a:t>
             </a:r>
           </a:p>
+        </p:txBody>
+      </p:sp>
+      <p:sp>
+        <p:nvSpPr>
+          <p:cNvPr id="8" name="TextBox 7"/>
+          <p:cNvSpPr txBox="1"/>
+          <p:nvPr/>
+        </p:nvSpPr>
+        <p:spPr>
+          <a:xfrm>
+            <a:off x="9631375" y="6291072"/>
+            <a:ext cx="1828800" cy="274320"/>
+          </a:xfrm>
+          <a:prstGeom prst="rect">
+            <a:avLst/>
+          </a:prstGeom>
+          <a:noFill/>
+        </p:spPr>
+        <p:txBody>
+          <a:bodyPr wrap="none" lIns="0" tIns="0" rIns="0" bIns="0">
+            <a:spAutoFit/>
+          </a:bodyPr>
+          <a:lstStyle/>
           <a:p>
             <a:pPr algn="r">
               <a:defRPr sz="900">
@@ -8067,14 +8407,14 @@
       </p:sp>
       <p:sp>
         <p:nvSpPr>
-          <p:cNvPr id="7" name="Rectangle 6"/>
+          <p:cNvPr id="9" name="Rectangle 8"/>
           <p:cNvSpPr/>
           <p:nvPr/>
         </p:nvSpPr>
         <p:spPr>
           <a:xfrm>
-            <a:off x="731520" y="1463040"/>
-            <a:ext cx="10728655" cy="777240"/>
+            <a:off x="731520" y="1389888"/>
+            <a:ext cx="10728655" cy="822960"/>
           </a:xfrm>
           <a:prstGeom prst="rect">
             <a:avLst/>
@@ -8103,11 +8443,11 @@
           </a:fontRef>
         </p:style>
         <p:txBody>
-          <a:bodyPr rtlCol="0" anchor="ctr" wrap="square" lIns="274320" tIns="109728"/>
+          <a:bodyPr rtlCol="0" anchor="ctr" wrap="square" lIns="228600" rIns="182880" tIns="73152" bIns="73152"/>
           <a:lstStyle/>
           <a:p>
             <a:pPr algn="ctr">
-              <a:defRPr sz="1300" b="1">
+              <a:defRPr sz="1100" b="1">
                 <a:solidFill>
                   <a:srgbClr val="801818"/>
                 </a:solidFill>
@@ -8130,14 +8470,14 @@
       </p:sp>
       <p:sp>
         <p:nvSpPr>
-          <p:cNvPr id="8" name="Rectangle 7"/>
+          <p:cNvPr id="10" name="Rectangle 9"/>
           <p:cNvSpPr/>
           <p:nvPr/>
         </p:nvSpPr>
         <p:spPr>
           <a:xfrm>
-            <a:off x="731520" y="1463040"/>
-            <a:ext cx="109728" cy="777240"/>
+            <a:off x="731520" y="1389888"/>
+            <a:ext cx="109728" cy="822960"/>
           </a:xfrm>
           <a:prstGeom prst="rect">
             <a:avLst/>
@@ -8173,14 +8513,14 @@
       </p:sp>
       <p:sp>
         <p:nvSpPr>
-          <p:cNvPr id="9" name="Rectangle 8"/>
+          <p:cNvPr id="11" name="Rectangle 10"/>
           <p:cNvSpPr/>
           <p:nvPr/>
         </p:nvSpPr>
         <p:spPr>
           <a:xfrm>
-            <a:off x="731520" y="2359152"/>
-            <a:ext cx="10728655" cy="777240"/>
+            <a:off x="731520" y="2304288"/>
+            <a:ext cx="10728655" cy="822960"/>
           </a:xfrm>
           <a:prstGeom prst="rect">
             <a:avLst/>
@@ -8209,11 +8549,11 @@
           </a:fontRef>
         </p:style>
         <p:txBody>
-          <a:bodyPr rtlCol="0" anchor="ctr" wrap="square" lIns="274320" tIns="109728"/>
+          <a:bodyPr rtlCol="0" anchor="ctr" wrap="square" lIns="228600" rIns="182880" tIns="73152" bIns="73152"/>
           <a:lstStyle/>
           <a:p>
             <a:pPr algn="ctr">
-              <a:defRPr sz="1300" b="1">
+              <a:defRPr sz="1100" b="1">
                 <a:solidFill>
                   <a:srgbClr val="801818"/>
                 </a:solidFill>
@@ -8229,21 +8569,21 @@
                   <a:srgbClr val="1E293B"/>
                 </a:solidFill>
               </a:rPr>
-              <a:t>PitchIQ is an intelligent, automated pitch analysis and coaching platform designed to help startup founders, sales executives, and students critically evaluate and elevate their verbal/written pitch scripts.</a:t>
-            </a:r>
-          </a:p>
-        </p:txBody>
-      </p:sp>
-      <p:sp>
-        <p:nvSpPr>
-          <p:cNvPr id="10" name="Rectangle 9"/>
+              <a:t>PitchIQ is an intelligent, automated pitch analysis and coaching platform designed to help startup founders, sales executives, and students critically evaluate and elevate their pitch scripts.</a:t>
+            </a:r>
+          </a:p>
+        </p:txBody>
+      </p:sp>
+      <p:sp>
+        <p:nvSpPr>
+          <p:cNvPr id="12" name="Rectangle 11"/>
           <p:cNvSpPr/>
           <p:nvPr/>
         </p:nvSpPr>
         <p:spPr>
           <a:xfrm>
-            <a:off x="731520" y="2359152"/>
-            <a:ext cx="109728" cy="777240"/>
+            <a:off x="731520" y="2304288"/>
+            <a:ext cx="109728" cy="822960"/>
           </a:xfrm>
           <a:prstGeom prst="rect">
             <a:avLst/>
@@ -8279,14 +8619,14 @@
       </p:sp>
       <p:sp>
         <p:nvSpPr>
-          <p:cNvPr id="11" name="Rectangle 10"/>
+          <p:cNvPr id="13" name="Rectangle 12"/>
           <p:cNvSpPr/>
           <p:nvPr/>
         </p:nvSpPr>
         <p:spPr>
           <a:xfrm>
-            <a:off x="731520" y="3255264"/>
-            <a:ext cx="10728655" cy="777240"/>
+            <a:off x="731520" y="3218688"/>
+            <a:ext cx="10728655" cy="822960"/>
           </a:xfrm>
           <a:prstGeom prst="rect">
             <a:avLst/>
@@ -8315,11 +8655,11 @@
           </a:fontRef>
         </p:style>
         <p:txBody>
-          <a:bodyPr rtlCol="0" anchor="ctr" wrap="square" lIns="274320" tIns="109728"/>
+          <a:bodyPr rtlCol="0" anchor="ctr" wrap="square" lIns="228600" rIns="182880" tIns="73152" bIns="73152"/>
           <a:lstStyle/>
           <a:p>
             <a:pPr algn="ctr">
-              <a:defRPr sz="1300" b="1">
+              <a:defRPr sz="1100" b="1">
                 <a:solidFill>
                   <a:srgbClr val="801818"/>
                 </a:solidFill>
@@ -8342,14 +8682,14 @@
       </p:sp>
       <p:sp>
         <p:nvSpPr>
-          <p:cNvPr id="12" name="Rectangle 11"/>
+          <p:cNvPr id="14" name="Rectangle 13"/>
           <p:cNvSpPr/>
           <p:nvPr/>
         </p:nvSpPr>
         <p:spPr>
           <a:xfrm>
-            <a:off x="731520" y="3255264"/>
-            <a:ext cx="109728" cy="777240"/>
+            <a:off x="731520" y="3218688"/>
+            <a:ext cx="109728" cy="822960"/>
           </a:xfrm>
           <a:prstGeom prst="rect">
             <a:avLst/>
@@ -8385,14 +8725,14 @@
       </p:sp>
       <p:sp>
         <p:nvSpPr>
-          <p:cNvPr id="13" name="Rectangle 12"/>
+          <p:cNvPr id="15" name="Rectangle 14"/>
           <p:cNvSpPr/>
           <p:nvPr/>
         </p:nvSpPr>
         <p:spPr>
           <a:xfrm>
-            <a:off x="731520" y="4151376"/>
-            <a:ext cx="10728655" cy="777240"/>
+            <a:off x="731520" y="4133087"/>
+            <a:ext cx="10728655" cy="822960"/>
           </a:xfrm>
           <a:prstGeom prst="rect">
             <a:avLst/>
@@ -8421,11 +8761,11 @@
           </a:fontRef>
         </p:style>
         <p:txBody>
-          <a:bodyPr rtlCol="0" anchor="ctr" wrap="square" lIns="274320" tIns="109728"/>
+          <a:bodyPr rtlCol="0" anchor="ctr" wrap="square" lIns="228600" rIns="182880" tIns="73152" bIns="73152"/>
           <a:lstStyle/>
           <a:p>
             <a:pPr algn="ctr">
-              <a:defRPr sz="1300" b="1">
+              <a:defRPr sz="1100" b="1">
                 <a:solidFill>
                   <a:srgbClr val="801818"/>
                 </a:solidFill>
@@ -8448,14 +8788,14 @@
       </p:sp>
       <p:sp>
         <p:nvSpPr>
-          <p:cNvPr id="14" name="Rectangle 13"/>
+          <p:cNvPr id="16" name="Rectangle 15"/>
           <p:cNvSpPr/>
           <p:nvPr/>
         </p:nvSpPr>
         <p:spPr>
           <a:xfrm>
-            <a:off x="731520" y="4151376"/>
-            <a:ext cx="109728" cy="777240"/>
+            <a:off x="731520" y="4133087"/>
+            <a:ext cx="109728" cy="822960"/>
           </a:xfrm>
           <a:prstGeom prst="rect">
             <a:avLst/>
@@ -8491,14 +8831,14 @@
       </p:sp>
       <p:sp>
         <p:nvSpPr>
-          <p:cNvPr id="15" name="Rectangle 14"/>
+          <p:cNvPr id="17" name="Rectangle 16"/>
           <p:cNvSpPr/>
           <p:nvPr/>
         </p:nvSpPr>
         <p:spPr>
           <a:xfrm>
             <a:off x="731520" y="5047488"/>
-            <a:ext cx="10728655" cy="777240"/>
+            <a:ext cx="10728655" cy="822960"/>
           </a:xfrm>
           <a:prstGeom prst="rect">
             <a:avLst/>
@@ -8527,11 +8867,11 @@
           </a:fontRef>
         </p:style>
         <p:txBody>
-          <a:bodyPr rtlCol="0" anchor="ctr" wrap="square" lIns="274320" tIns="109728"/>
+          <a:bodyPr rtlCol="0" anchor="ctr" wrap="square" lIns="228600" rIns="182880" tIns="73152" bIns="73152"/>
           <a:lstStyle/>
           <a:p>
             <a:pPr algn="ctr">
-              <a:defRPr sz="1300" b="1">
+              <a:defRPr sz="1100" b="1">
                 <a:solidFill>
                   <a:srgbClr val="801818"/>
                 </a:solidFill>
@@ -8554,14 +8894,14 @@
       </p:sp>
       <p:sp>
         <p:nvSpPr>
-          <p:cNvPr id="16" name="Rectangle 15"/>
+          <p:cNvPr id="18" name="Rectangle 17"/>
           <p:cNvSpPr/>
           <p:nvPr/>
         </p:nvSpPr>
         <p:spPr>
           <a:xfrm>
             <a:off x="731520" y="5047488"/>
-            <a:ext cx="109728" cy="777240"/>
+            <a:ext cx="109728" cy="822960"/>
           </a:xfrm>
           <a:prstGeom prst="rect">
             <a:avLst/>
@@ -8621,8 +8961,8 @@
         </p:nvSpPr>
         <p:spPr>
           <a:xfrm>
-            <a:off x="731520" y="1188720"/>
-            <a:ext cx="10728655" cy="36576"/>
+            <a:off x="731520" y="1170432"/>
+            <a:ext cx="10728655" cy="27432"/>
           </a:xfrm>
           <a:prstGeom prst="rect">
             <a:avLst/>
@@ -8666,7 +9006,7 @@
         </p:nvSpPr>
         <p:spPr>
           <a:xfrm>
-            <a:off x="731520" y="411480"/>
+            <a:off x="731520" y="365760"/>
             <a:ext cx="7772400" cy="731520"/>
           </a:xfrm>
           <a:prstGeom prst="rect">
@@ -8681,7 +9021,7 @@
           <a:lstStyle/>
           <a:p>
             <a:pPr>
-              <a:defRPr sz="2800" b="1">
+              <a:defRPr sz="2600" b="1">
                 <a:solidFill>
                   <a:srgbClr val="1E293B"/>
                 </a:solidFill>
@@ -8796,8 +9136,8 @@
         </p:nvSpPr>
         <p:spPr>
           <a:xfrm>
-            <a:off x="731520" y="6309360"/>
-            <a:ext cx="10728655" cy="365760"/>
+            <a:off x="731520" y="6291072"/>
+            <a:ext cx="2743200" cy="274320"/>
           </a:xfrm>
           <a:prstGeom prst="rect">
             <a:avLst/>
@@ -8805,7 +9145,7 @@
           <a:noFill/>
         </p:spPr>
         <p:txBody>
-          <a:bodyPr wrap="square" lIns="0" tIns="0" rIns="0" bIns="0">
+          <a:bodyPr wrap="none" lIns="0" tIns="0" rIns="0" bIns="0">
             <a:spAutoFit/>
           </a:bodyPr>
           <a:lstStyle/>
@@ -8822,9 +9162,32 @@
               <a:t>Academic Year 2025-2026</a:t>
             </a:r>
           </a:p>
+        </p:txBody>
+      </p:sp>
+      <p:sp>
+        <p:nvSpPr>
+          <p:cNvPr id="7" name="TextBox 6"/>
+          <p:cNvSpPr txBox="1"/>
+          <p:nvPr/>
+        </p:nvSpPr>
+        <p:spPr>
+          <a:xfrm>
+            <a:off x="3474720" y="6291072"/>
+            <a:ext cx="5242255" cy="274320"/>
+          </a:xfrm>
+          <a:prstGeom prst="rect">
+            <a:avLst/>
+          </a:prstGeom>
+          <a:noFill/>
+        </p:spPr>
+        <p:txBody>
+          <a:bodyPr wrap="none" lIns="0" tIns="0" rIns="0" bIns="0">
+            <a:spAutoFit/>
+          </a:bodyPr>
+          <a:lstStyle/>
           <a:p>
             <a:pPr algn="ctr">
-              <a:defRPr sz="900" b="1">
+              <a:defRPr sz="850" b="1">
                 <a:solidFill>
                   <a:srgbClr val="801818"/>
                 </a:solidFill>
@@ -8835,6 +9198,29 @@
               <a:t>DEPARTMENT OF COMPUTER ENGINEERING  •  SILVER OAK UNIVERSITY</a:t>
             </a:r>
           </a:p>
+        </p:txBody>
+      </p:sp>
+      <p:sp>
+        <p:nvSpPr>
+          <p:cNvPr id="8" name="TextBox 7"/>
+          <p:cNvSpPr txBox="1"/>
+          <p:nvPr/>
+        </p:nvSpPr>
+        <p:spPr>
+          <a:xfrm>
+            <a:off x="9631375" y="6291072"/>
+            <a:ext cx="1828800" cy="274320"/>
+          </a:xfrm>
+          <a:prstGeom prst="rect">
+            <a:avLst/>
+          </a:prstGeom>
+          <a:noFill/>
+        </p:spPr>
+        <p:txBody>
+          <a:bodyPr wrap="none" lIns="0" tIns="0" rIns="0" bIns="0">
+            <a:spAutoFit/>
+          </a:bodyPr>
+          <a:lstStyle/>
           <a:p>
             <a:pPr algn="r">
               <a:defRPr sz="900">
@@ -8852,14 +9238,14 @@
       </p:sp>
       <p:sp>
         <p:nvSpPr>
-          <p:cNvPr id="7" name="Rounded Rectangle 6"/>
+          <p:cNvPr id="9" name="Rounded Rectangle 8"/>
           <p:cNvSpPr/>
           <p:nvPr/>
         </p:nvSpPr>
         <p:spPr>
           <a:xfrm>
-            <a:off x="731520" y="1463040"/>
-            <a:ext cx="5120640" cy="4480560"/>
+            <a:off x="731520" y="1389888"/>
+            <a:ext cx="5166360" cy="4572000"/>
           </a:xfrm>
           <a:prstGeom prst="roundRect">
             <a:avLst/>
@@ -8888,11 +9274,11 @@
           </a:fontRef>
         </p:style>
         <p:txBody>
-          <a:bodyPr rtlCol="0" anchor="ctr" wrap="square" lIns="274320" rIns="274320" tIns="228600"/>
+          <a:bodyPr rtlCol="0" anchor="ctr" wrap="square" lIns="228600" rIns="228600" tIns="182880" bIns="137160"/>
           <a:lstStyle/>
           <a:p>
             <a:pPr algn="ctr">
-              <a:defRPr sz="1800" b="1">
+              <a:defRPr sz="1600" b="1">
                 <a:solidFill>
                   <a:srgbClr val="801818"/>
                 </a:solidFill>
@@ -8906,9 +9292,9 @@
           <a:p>
             <a:pPr>
               <a:spcBef>
-                <a:spcPts val="1000"/>
+                <a:spcPts val="600"/>
               </a:spcBef>
-              <a:defRPr sz="1200">
+              <a:defRPr sz="1050">
                 <a:solidFill>
                   <a:srgbClr val="1E293B"/>
                 </a:solidFill>
@@ -8916,15 +9302,15 @@
               </a:defRPr>
             </a:pPr>
             <a:r>
-              <a:t>•  High Stakes in Pitching: Founders and sales reps have less than 30 seconds to capture attention before investors or prospects disengage.</a:t>
+              <a:t>•  High Stakes in Pitching: Founders and sales reps have under 30 seconds to capture attention before investors or prospects disengage.</a:t>
             </a:r>
           </a:p>
           <a:p>
             <a:pPr>
               <a:spcBef>
-                <a:spcPts val="1000"/>
+                <a:spcPts val="600"/>
               </a:spcBef>
-              <a:defRPr sz="1200">
+              <a:defRPr sz="1050">
                 <a:solidFill>
                   <a:srgbClr val="1E293B"/>
                 </a:solidFill>
@@ -8932,15 +9318,15 @@
               </a:defRPr>
             </a:pPr>
             <a:r>
-              <a:t>•  Over 70% of Early Deals Lost: Studies show early deal drop-offs occur because pitches lack clarity, sound generic, or fail to state a compelling problem statement.</a:t>
+              <a:t>•  Over 70% of Early Deals Lost: Early pitch drop-offs occur because scripts lack clarity, sound generic, or fail to state a clear problem.</a:t>
             </a:r>
           </a:p>
           <a:p>
             <a:pPr>
               <a:spcBef>
-                <a:spcPts val="1000"/>
+                <a:spcPts val="600"/>
               </a:spcBef>
-              <a:defRPr sz="1200">
+              <a:defRPr sz="1050">
                 <a:solidFill>
                   <a:srgbClr val="1E293B"/>
                 </a:solidFill>
@@ -8948,15 +9334,15 @@
               </a:defRPr>
             </a:pPr>
             <a:r>
-              <a:t>•  Inaccessible Coaching: Traditional professional executive speech coaching costs between $200 and $500/hour, making it out of reach for early-stage entrepreneurs and students.</a:t>
+              <a:t>•  Inaccessible Coaching: Traditional professional speech coaching costs $200–$500/hour, making it out of reach for students and early founders.</a:t>
             </a:r>
           </a:p>
           <a:p>
             <a:pPr>
               <a:spcBef>
-                <a:spcPts val="1000"/>
+                <a:spcPts val="600"/>
               </a:spcBef>
-              <a:defRPr sz="1200">
+              <a:defRPr sz="1050">
                 <a:solidFill>
                   <a:srgbClr val="1E293B"/>
                 </a:solidFill>
@@ -8971,14 +9357,14 @@
       </p:sp>
       <p:sp>
         <p:nvSpPr>
-          <p:cNvPr id="8" name="Rounded Rectangle 7"/>
+          <p:cNvPr id="10" name="Rounded Rectangle 9"/>
           <p:cNvSpPr/>
           <p:nvPr/>
         </p:nvSpPr>
         <p:spPr>
           <a:xfrm>
-            <a:off x="6217920" y="1463040"/>
-            <a:ext cx="5242255" cy="4480560"/>
+            <a:off x="6172200" y="1389888"/>
+            <a:ext cx="5287975" cy="4572000"/>
           </a:xfrm>
           <a:prstGeom prst="roundRect">
             <a:avLst/>
@@ -9007,11 +9393,11 @@
           </a:fontRef>
         </p:style>
         <p:txBody>
-          <a:bodyPr rtlCol="0" anchor="ctr" wrap="square" lIns="274320" rIns="274320" tIns="228600"/>
+          <a:bodyPr rtlCol="0" anchor="ctr" wrap="square" lIns="228600" rIns="228600" tIns="182880" bIns="137160"/>
           <a:lstStyle/>
           <a:p>
             <a:pPr algn="ctr">
-              <a:defRPr sz="1800" b="1">
+              <a:defRPr sz="1600" b="1">
                 <a:solidFill>
                   <a:srgbClr val="166534"/>
                 </a:solidFill>
@@ -9025,9 +9411,9 @@
           <a:p>
             <a:pPr>
               <a:spcBef>
-                <a:spcPts val="1000"/>
+                <a:spcPts val="600"/>
               </a:spcBef>
-              <a:defRPr sz="1200">
+              <a:defRPr sz="1050">
                 <a:solidFill>
                   <a:srgbClr val="1E293B"/>
                 </a:solidFill>
@@ -9035,15 +9421,15 @@
               </a:defRPr>
             </a:pPr>
             <a:r>
-              <a:t>•  Instant Accessible AI Coaching: Provide an automated platform that evaluates pitch scripts in under 2 seconds at zero cost.</a:t>
+              <a:t>•  Instant Accessible AI Coaching: Deliver an automated platform evaluating pitch scripts in under 2 seconds at zero cost.</a:t>
             </a:r>
           </a:p>
           <a:p>
             <a:pPr>
               <a:spcBef>
-                <a:spcPts val="1000"/>
+                <a:spcPts val="600"/>
               </a:spcBef>
-              <a:defRPr sz="1200">
+              <a:defRPr sz="1050">
                 <a:solidFill>
                   <a:srgbClr val="1E293B"/>
                 </a:solidFill>
@@ -9051,15 +9437,15 @@
               </a:defRPr>
             </a:pPr>
             <a:r>
-              <a:t>•  Deterministic &amp; Objective Scoring: Ensure repeatable, unbiased evaluation across 6 concrete communication dimensions rather than vague sentiments.</a:t>
+              <a:t>•  Deterministic Objective Scoring: Ensure repeatable, unbiased evaluation across 6 concrete communication dimensions.</a:t>
             </a:r>
           </a:p>
           <a:p>
             <a:pPr>
               <a:spcBef>
-                <a:spcPts val="1000"/>
+                <a:spcPts val="600"/>
               </a:spcBef>
-              <a:defRPr sz="1200">
+              <a:defRPr sz="1050">
                 <a:solidFill>
                   <a:srgbClr val="1E293B"/>
                 </a:solidFill>
@@ -9067,15 +9453,15 @@
               </a:defRPr>
             </a:pPr>
             <a:r>
-              <a:t>•  Real-Time Diagnostic Feedback: Immediately highlight critical pitfalls such as missing Call-To-Action (CTA), unsubstantiated claims, or overextended openings.</a:t>
+              <a:t>•  Real-Time Diagnostic Feedback: Immediately highlight critical pitfalls like missing CTA, vague claims, or overextended openings.</a:t>
             </a:r>
           </a:p>
           <a:p>
             <a:pPr>
               <a:spcBef>
-                <a:spcPts val="1000"/>
+                <a:spcPts val="600"/>
               </a:spcBef>
-              <a:defRPr sz="1200">
+              <a:defRPr sz="1050">
                 <a:solidFill>
                   <a:srgbClr val="1E293B"/>
                 </a:solidFill>
@@ -9083,15 +9469,15 @@
               </a:defRPr>
             </a:pPr>
             <a:r>
-              <a:t>•  Actionable Transformation: Not just telling users what is wrong, but giving them an improved, ready-to-use rewritten opening personalized to their product.</a:t>
+              <a:t>•  Actionable Transformation: Not just pointing out errors, but giving an improved, ready-to-use rewritten opening personalized to the product.</a:t>
             </a:r>
           </a:p>
           <a:p>
             <a:pPr>
               <a:spcBef>
-                <a:spcPts val="1000"/>
+                <a:spcPts val="600"/>
               </a:spcBef>
-              <a:defRPr sz="1200">
+              <a:defRPr sz="1050">
                 <a:solidFill>
                   <a:srgbClr val="1E293B"/>
                 </a:solidFill>
@@ -9099,7 +9485,7 @@
               </a:defRPr>
             </a:pPr>
             <a:r>
-              <a:t>•  Democratizing Venture Readiness: Empower students and startup founders to refine their value proposition before investor meetings.</a:t>
+              <a:t>•  Democratizing Venture Readiness: Empower students and startup founders to refine value propositions before high-stakes meetings.</a:t>
             </a:r>
           </a:p>
         </p:txBody>
@@ -9130,8 +9516,8 @@
         </p:nvSpPr>
         <p:spPr>
           <a:xfrm>
-            <a:off x="731520" y="1188720"/>
-            <a:ext cx="10728655" cy="36576"/>
+            <a:off x="731520" y="1170432"/>
+            <a:ext cx="10728655" cy="27432"/>
           </a:xfrm>
           <a:prstGeom prst="rect">
             <a:avLst/>
@@ -9175,7 +9561,7 @@
         </p:nvSpPr>
         <p:spPr>
           <a:xfrm>
-            <a:off x="731520" y="411480"/>
+            <a:off x="731520" y="365760"/>
             <a:ext cx="7772400" cy="731520"/>
           </a:xfrm>
           <a:prstGeom prst="rect">
@@ -9190,7 +9576,7 @@
           <a:lstStyle/>
           <a:p>
             <a:pPr>
-              <a:defRPr sz="2800" b="1">
+              <a:defRPr sz="2600" b="1">
                 <a:solidFill>
                   <a:srgbClr val="1E293B"/>
                 </a:solidFill>
@@ -9305,8 +9691,8 @@
         </p:nvSpPr>
         <p:spPr>
           <a:xfrm>
-            <a:off x="731520" y="6309360"/>
-            <a:ext cx="10728655" cy="365760"/>
+            <a:off x="731520" y="6291072"/>
+            <a:ext cx="2743200" cy="274320"/>
           </a:xfrm>
           <a:prstGeom prst="rect">
             <a:avLst/>
@@ -9314,7 +9700,7 @@
           <a:noFill/>
         </p:spPr>
         <p:txBody>
-          <a:bodyPr wrap="square" lIns="0" tIns="0" rIns="0" bIns="0">
+          <a:bodyPr wrap="none" lIns="0" tIns="0" rIns="0" bIns="0">
             <a:spAutoFit/>
           </a:bodyPr>
           <a:lstStyle/>
@@ -9331,9 +9717,32 @@
               <a:t>Academic Year 2025-2026</a:t>
             </a:r>
           </a:p>
+        </p:txBody>
+      </p:sp>
+      <p:sp>
+        <p:nvSpPr>
+          <p:cNvPr id="7" name="TextBox 6"/>
+          <p:cNvSpPr txBox="1"/>
+          <p:nvPr/>
+        </p:nvSpPr>
+        <p:spPr>
+          <a:xfrm>
+            <a:off x="3474720" y="6291072"/>
+            <a:ext cx="5242255" cy="274320"/>
+          </a:xfrm>
+          <a:prstGeom prst="rect">
+            <a:avLst/>
+          </a:prstGeom>
+          <a:noFill/>
+        </p:spPr>
+        <p:txBody>
+          <a:bodyPr wrap="none" lIns="0" tIns="0" rIns="0" bIns="0">
+            <a:spAutoFit/>
+          </a:bodyPr>
+          <a:lstStyle/>
           <a:p>
             <a:pPr algn="ctr">
-              <a:defRPr sz="900" b="1">
+              <a:defRPr sz="850" b="1">
                 <a:solidFill>
                   <a:srgbClr val="801818"/>
                 </a:solidFill>
@@ -9344,6 +9753,29 @@
               <a:t>DEPARTMENT OF COMPUTER ENGINEERING  •  SILVER OAK UNIVERSITY</a:t>
             </a:r>
           </a:p>
+        </p:txBody>
+      </p:sp>
+      <p:sp>
+        <p:nvSpPr>
+          <p:cNvPr id="8" name="TextBox 7"/>
+          <p:cNvSpPr txBox="1"/>
+          <p:nvPr/>
+        </p:nvSpPr>
+        <p:spPr>
+          <a:xfrm>
+            <a:off x="9631375" y="6291072"/>
+            <a:ext cx="1828800" cy="274320"/>
+          </a:xfrm>
+          <a:prstGeom prst="rect">
+            <a:avLst/>
+          </a:prstGeom>
+          <a:noFill/>
+        </p:spPr>
+        <p:txBody>
+          <a:bodyPr wrap="none" lIns="0" tIns="0" rIns="0" bIns="0">
+            <a:spAutoFit/>
+          </a:bodyPr>
+          <a:lstStyle/>
           <a:p>
             <a:pPr algn="r">
               <a:defRPr sz="900">
@@ -9361,14 +9793,14 @@
       </p:sp>
       <p:sp>
         <p:nvSpPr>
-          <p:cNvPr id="7" name="Rounded Rectangle 6"/>
+          <p:cNvPr id="9" name="Rounded Rectangle 8"/>
           <p:cNvSpPr/>
           <p:nvPr/>
         </p:nvSpPr>
         <p:spPr>
           <a:xfrm>
-            <a:off x="731520" y="1463040"/>
-            <a:ext cx="3429000" cy="4480560"/>
+            <a:off x="731520" y="1389888"/>
+            <a:ext cx="3456432" cy="4572000"/>
           </a:xfrm>
           <a:prstGeom prst="roundRect">
             <a:avLst/>
@@ -9397,11 +9829,11 @@
           </a:fontRef>
         </p:style>
         <p:txBody>
-          <a:bodyPr rtlCol="0" anchor="ctr" wrap="square" lIns="182880" rIns="182880" tIns="182880"/>
+          <a:bodyPr rtlCol="0" anchor="ctr" wrap="square" lIns="164592" rIns="164592" tIns="164592" bIns="137160"/>
           <a:lstStyle/>
           <a:p>
             <a:pPr algn="ctr">
-              <a:defRPr sz="1600" b="1">
+              <a:defRPr sz="1450" b="1">
                 <a:solidFill>
                   <a:srgbClr val="1E40AF"/>
                 </a:solidFill>
@@ -9415,9 +9847,9 @@
           <a:p>
             <a:pPr>
               <a:spcBef>
-                <a:spcPts val="800"/>
+                <a:spcPts val="600"/>
               </a:spcBef>
-              <a:defRPr sz="1100">
+              <a:defRPr sz="1000">
                 <a:solidFill>
                   <a:srgbClr val="1E293B"/>
                 </a:solidFill>
@@ -9425,15 +9857,15 @@
               </a:defRPr>
             </a:pPr>
             <a:r>
-              <a:t>• Audience-Adaptive Evaluation: Calibrates weights dynamically based on target audience (Investors, Enterprise, SMB, General).</a:t>
+              <a:t>• Audience-Adaptive Evaluation: Dynamically adjusts weights for Investors, Enterprise, SMB, or General audiences.</a:t>
             </a:r>
           </a:p>
           <a:p>
             <a:pPr>
               <a:spcBef>
-                <a:spcPts val="800"/>
+                <a:spcPts val="600"/>
               </a:spcBef>
-              <a:defRPr sz="1100">
+              <a:defRPr sz="1000">
                 <a:solidFill>
                   <a:srgbClr val="1E293B"/>
                 </a:solidFill>
@@ -9441,15 +9873,15 @@
               </a:defRPr>
             </a:pPr>
             <a:r>
-              <a:t>• Multi-Criteria Scoring Engine: Synthesizes Lexical analysis, syntactic brevity checks, and keyword semantics into a unified 100-point scale.</a:t>
+              <a:t>• Multi-Criteria Scoring Engine: Synthesizes lexical analysis, brevity checks, and keyword semantics into a 100-point scale.</a:t>
             </a:r>
           </a:p>
           <a:p>
             <a:pPr>
               <a:spcBef>
-                <a:spcPts val="800"/>
+                <a:spcPts val="600"/>
               </a:spcBef>
-              <a:defRPr sz="1100">
+              <a:defRPr sz="1000">
                 <a:solidFill>
                   <a:srgbClr val="1E293B"/>
                 </a:solidFill>
@@ -9457,21 +9889,21 @@
               </a:defRPr>
             </a:pPr>
             <a:r>
-              <a:t>• Dynamic Script Synthesis: Contextually extracts speaker name, company name, offering, and core benefits to auto-generate refined pitches.</a:t>
-            </a:r>
-          </a:p>
-        </p:txBody>
-      </p:sp>
-      <p:sp>
-        <p:nvSpPr>
-          <p:cNvPr id="8" name="Rounded Rectangle 7"/>
+              <a:t>• Dynamic Script Synthesis: Extracts speaker, company, offering, and benefits to auto-generate refined elevator pitches.</a:t>
+            </a:r>
+          </a:p>
+        </p:txBody>
+      </p:sp>
+      <p:sp>
+        <p:nvSpPr>
+          <p:cNvPr id="10" name="Rounded Rectangle 9"/>
           <p:cNvSpPr/>
           <p:nvPr/>
         </p:nvSpPr>
         <p:spPr>
           <a:xfrm>
-            <a:off x="4370832" y="1463040"/>
-            <a:ext cx="3429000" cy="4480560"/>
+            <a:off x="4370832" y="1389888"/>
+            <a:ext cx="3456432" cy="4572000"/>
           </a:xfrm>
           <a:prstGeom prst="roundRect">
             <a:avLst/>
@@ -9500,11 +9932,11 @@
           </a:fontRef>
         </p:style>
         <p:txBody>
-          <a:bodyPr rtlCol="0" anchor="ctr" wrap="square" lIns="182880" rIns="182880" tIns="182880"/>
+          <a:bodyPr rtlCol="0" anchor="ctr" wrap="square" lIns="164592" rIns="164592" tIns="164592" bIns="137160"/>
           <a:lstStyle/>
           <a:p>
             <a:pPr algn="ctr">
-              <a:defRPr sz="1600" b="1">
+              <a:defRPr sz="1450" b="1">
                 <a:solidFill>
                   <a:srgbClr val="801818"/>
                 </a:solidFill>
@@ -9518,9 +9950,9 @@
           <a:p>
             <a:pPr>
               <a:spcBef>
-                <a:spcPts val="800"/>
+                <a:spcPts val="600"/>
               </a:spcBef>
-              <a:defRPr sz="1100">
+              <a:defRPr sz="1000">
                 <a:solidFill>
                   <a:srgbClr val="1E293B"/>
                 </a:solidFill>
@@ -9528,15 +9960,15 @@
               </a:defRPr>
             </a:pPr>
             <a:r>
-              <a:t>• Student Entrepreneurs &amp; Incubators: Perfecting pitch decks for university demo days and grant competitions.</a:t>
+              <a:t>• Student Entrepreneurs &amp; Incubators: Perfecting pitch decks for university demo days, grants, and hackathons.</a:t>
             </a:r>
           </a:p>
           <a:p>
             <a:pPr>
               <a:spcBef>
-                <a:spcPts val="800"/>
+                <a:spcPts val="600"/>
               </a:spcBef>
-              <a:defRPr sz="1100">
+              <a:defRPr sz="1000">
                 <a:solidFill>
                   <a:srgbClr val="1E293B"/>
                 </a:solidFill>
@@ -9544,15 +9976,15 @@
               </a:defRPr>
             </a:pPr>
             <a:r>
-              <a:t>• B2B Sales Representatives: Auditing cold outreach and discovery scripts before prospect meetings.</a:t>
+              <a:t>• B2B Sales Representatives: Auditing cold outreach and discovery scripts before prospect demo meetings.</a:t>
             </a:r>
           </a:p>
           <a:p>
             <a:pPr>
               <a:spcBef>
-                <a:spcPts val="800"/>
+                <a:spcPts val="600"/>
               </a:spcBef>
-              <a:defRPr sz="1100">
+              <a:defRPr sz="1000">
                 <a:solidFill>
                   <a:srgbClr val="1E293B"/>
                 </a:solidFill>
@@ -9566,9 +9998,9 @@
           <a:p>
             <a:pPr>
               <a:spcBef>
-                <a:spcPts val="800"/>
+                <a:spcPts val="600"/>
               </a:spcBef>
-              <a:defRPr sz="1100">
+              <a:defRPr sz="1000">
                 <a:solidFill>
                   <a:srgbClr val="1E293B"/>
                 </a:solidFill>
@@ -9576,21 +10008,21 @@
               </a:defRPr>
             </a:pPr>
             <a:r>
-              <a:t>• Job Seekers &amp; Professionals: Crafting high-converting 'Tell me about yourself' interviews.</a:t>
-            </a:r>
-          </a:p>
-        </p:txBody>
-      </p:sp>
-      <p:sp>
-        <p:nvSpPr>
-          <p:cNvPr id="9" name="Rounded Rectangle 8"/>
+              <a:t>• Job Seekers &amp; Professionals: Crafting high-converting 'Tell me about yourself' interview responses.</a:t>
+            </a:r>
+          </a:p>
+        </p:txBody>
+      </p:sp>
+      <p:sp>
+        <p:nvSpPr>
+          <p:cNvPr id="11" name="Rounded Rectangle 10"/>
           <p:cNvSpPr/>
           <p:nvPr/>
         </p:nvSpPr>
         <p:spPr>
           <a:xfrm>
-            <a:off x="8010144" y="1463040"/>
-            <a:ext cx="3429000" cy="4480560"/>
+            <a:off x="8010144" y="1389888"/>
+            <a:ext cx="3456432" cy="4572000"/>
           </a:xfrm>
           <a:prstGeom prst="roundRect">
             <a:avLst/>
@@ -9619,11 +10051,11 @@
           </a:fontRef>
         </p:style>
         <p:txBody>
-          <a:bodyPr rtlCol="0" anchor="ctr" wrap="square" lIns="182880" rIns="182880" tIns="182880"/>
+          <a:bodyPr rtlCol="0" anchor="ctr" wrap="square" lIns="164592" rIns="164592" tIns="164592" bIns="137160"/>
           <a:lstStyle/>
           <a:p>
             <a:pPr algn="ctr">
-              <a:defRPr sz="1600" b="1">
+              <a:defRPr sz="1450" b="1">
                 <a:solidFill>
                   <a:srgbClr val="166534"/>
                 </a:solidFill>
@@ -9637,9 +10069,9 @@
           <a:p>
             <a:pPr>
               <a:spcBef>
-                <a:spcPts val="800"/>
+                <a:spcPts val="600"/>
               </a:spcBef>
-              <a:defRPr sz="1100">
+              <a:defRPr sz="1000">
                 <a:solidFill>
                   <a:srgbClr val="1E293B"/>
                 </a:solidFill>
@@ -9647,15 +10079,15 @@
               </a:defRPr>
             </a:pPr>
             <a:r>
-              <a:t>• Bridges Academic NLP &amp; Practical Application: Translates computational linguistics into direct economic value (closing deals, securing funding).</a:t>
+              <a:t>• Bridges NLP &amp; Practical Value: Converts computational linguistics into direct economic impact (closing deals, winning funding).</a:t>
             </a:r>
           </a:p>
           <a:p>
             <a:pPr>
               <a:spcBef>
-                <a:spcPts val="800"/>
+                <a:spcPts val="600"/>
               </a:spcBef>
-              <a:defRPr sz="1100">
+              <a:defRPr sz="1000">
                 <a:solidFill>
                   <a:srgbClr val="1E293B"/>
                 </a:solidFill>
@@ -9663,15 +10095,15 @@
               </a:defRPr>
             </a:pPr>
             <a:r>
-              <a:t>• Scalable &amp; Zero Infrastructure Overhead: Executes blazingly fast in client-side runtime without requiring expensive enterprise GPU clusters.</a:t>
+              <a:t>• Zero Infrastructure Overhead: Executes blazingly fast in client-side runtime without expensive GPU servers.</a:t>
             </a:r>
           </a:p>
           <a:p>
             <a:pPr>
               <a:spcBef>
-                <a:spcPts val="800"/>
+                <a:spcPts val="600"/>
               </a:spcBef>
-              <a:defRPr sz="1100">
+              <a:defRPr sz="1000">
                 <a:solidFill>
                   <a:srgbClr val="1E293B"/>
                 </a:solidFill>
@@ -9679,7 +10111,7 @@
               </a:defRPr>
             </a:pPr>
             <a:r>
-              <a:t>• High Iteration Speed: Enables founders to test 10 script variations in 5 minutes to identify optimal phrasing.</a:t>
+              <a:t>• High Iteration Speed: Enables founders to test 10 script variations in 5 minutes to identify optimal messaging.</a:t>
             </a:r>
           </a:p>
         </p:txBody>
@@ -9710,8 +10142,8 @@
         </p:nvSpPr>
         <p:spPr>
           <a:xfrm>
-            <a:off x="731520" y="1188720"/>
-            <a:ext cx="10728655" cy="36576"/>
+            <a:off x="731520" y="1170432"/>
+            <a:ext cx="10728655" cy="27432"/>
           </a:xfrm>
           <a:prstGeom prst="rect">
             <a:avLst/>
@@ -9755,7 +10187,7 @@
         </p:nvSpPr>
         <p:spPr>
           <a:xfrm>
-            <a:off x="731520" y="411480"/>
+            <a:off x="731520" y="365760"/>
             <a:ext cx="7772400" cy="731520"/>
           </a:xfrm>
           <a:prstGeom prst="rect">
@@ -9770,7 +10202,7 @@
           <a:lstStyle/>
           <a:p>
             <a:pPr>
-              <a:defRPr sz="2800" b="1">
+              <a:defRPr sz="2600" b="1">
                 <a:solidFill>
                   <a:srgbClr val="1E293B"/>
                 </a:solidFill>
@@ -9885,8 +10317,8 @@
         </p:nvSpPr>
         <p:spPr>
           <a:xfrm>
-            <a:off x="731520" y="6309360"/>
-            <a:ext cx="10728655" cy="365760"/>
+            <a:off x="731520" y="6291072"/>
+            <a:ext cx="2743200" cy="274320"/>
           </a:xfrm>
           <a:prstGeom prst="rect">
             <a:avLst/>
@@ -9894,7 +10326,7 @@
           <a:noFill/>
         </p:spPr>
         <p:txBody>
-          <a:bodyPr wrap="square" lIns="0" tIns="0" rIns="0" bIns="0">
+          <a:bodyPr wrap="none" lIns="0" tIns="0" rIns="0" bIns="0">
             <a:spAutoFit/>
           </a:bodyPr>
           <a:lstStyle/>
@@ -9911,9 +10343,32 @@
               <a:t>Academic Year 2025-2026</a:t>
             </a:r>
           </a:p>
+        </p:txBody>
+      </p:sp>
+      <p:sp>
+        <p:nvSpPr>
+          <p:cNvPr id="7" name="TextBox 6"/>
+          <p:cNvSpPr txBox="1"/>
+          <p:nvPr/>
+        </p:nvSpPr>
+        <p:spPr>
+          <a:xfrm>
+            <a:off x="3474720" y="6291072"/>
+            <a:ext cx="5242255" cy="274320"/>
+          </a:xfrm>
+          <a:prstGeom prst="rect">
+            <a:avLst/>
+          </a:prstGeom>
+          <a:noFill/>
+        </p:spPr>
+        <p:txBody>
+          <a:bodyPr wrap="none" lIns="0" tIns="0" rIns="0" bIns="0">
+            <a:spAutoFit/>
+          </a:bodyPr>
+          <a:lstStyle/>
           <a:p>
             <a:pPr algn="ctr">
-              <a:defRPr sz="900" b="1">
+              <a:defRPr sz="850" b="1">
                 <a:solidFill>
                   <a:srgbClr val="801818"/>
                 </a:solidFill>
@@ -9924,6 +10379,29 @@
               <a:t>DEPARTMENT OF COMPUTER ENGINEERING  •  SILVER OAK UNIVERSITY</a:t>
             </a:r>
           </a:p>
+        </p:txBody>
+      </p:sp>
+      <p:sp>
+        <p:nvSpPr>
+          <p:cNvPr id="8" name="TextBox 7"/>
+          <p:cNvSpPr txBox="1"/>
+          <p:nvPr/>
+        </p:nvSpPr>
+        <p:spPr>
+          <a:xfrm>
+            <a:off x="9631375" y="6291072"/>
+            <a:ext cx="1828800" cy="274320"/>
+          </a:xfrm>
+          <a:prstGeom prst="rect">
+            <a:avLst/>
+          </a:prstGeom>
+          <a:noFill/>
+        </p:spPr>
+        <p:txBody>
+          <a:bodyPr wrap="none" lIns="0" tIns="0" rIns="0" bIns="0">
+            <a:spAutoFit/>
+          </a:bodyPr>
+          <a:lstStyle/>
           <a:p>
             <a:pPr algn="r">
               <a:defRPr sz="900">
@@ -9941,15 +10419,15 @@
       </p:sp>
       <p:graphicFrame>
         <p:nvGraphicFramePr>
-          <p:cNvPr id="7" name="Table 6"/>
+          <p:cNvPr id="9" name="Table 8"/>
           <p:cNvGraphicFramePr>
             <a:graphicFrameLocks noGrp="1"/>
           </p:cNvGraphicFramePr>
           <p:nvPr/>
         </p:nvGraphicFramePr>
         <p:xfrm>
-          <a:off x="731520" y="1463040"/>
-          <a:ext cx="10728655" cy="4389120"/>
+          <a:off x="731520" y="1389888"/>
+          <a:ext cx="10728655" cy="4480560"/>
         </p:xfrm>
         <a:graphic>
           <a:graphicData uri="http://schemas.openxmlformats.org/drawingml/2006/table">
@@ -9961,18 +10439,18 @@
                 <a:gridCol w="640080"/>
                 <a:gridCol w="1188720"/>
                 <a:gridCol w="2011680"/>
-                <a:gridCol w="1828800"/>
+                <a:gridCol w="1737360"/>
                 <a:gridCol w="1645920"/>
-                <a:gridCol w="3413455"/>
+                <a:gridCol w="3504895"/>
               </a:tblGrid>
-              <a:tr h="877824">
+              <a:tr h="896112">
                 <a:tc>
                   <a:txBody>
                     <a:bodyPr/>
                     <a:lstStyle/>
                     <a:p>
                       <a:pPr algn="ctr">
-                        <a:defRPr sz="1100" b="1">
+                        <a:defRPr sz="1000" b="1">
                           <a:solidFill>
                             <a:srgbClr val="FFFFFF"/>
                           </a:solidFill>
@@ -9984,7 +10462,7 @@
                       </a:r>
                     </a:p>
                   </a:txBody>
-                  <a:tcPr>
+                  <a:tcPr marL="73152" marR="73152" marT="45720" marB="45720">
                     <a:solidFill>
                       <a:srgbClr val="801818"/>
                     </a:solidFill>
@@ -9996,7 +10474,7 @@
                     <a:lstStyle/>
                     <a:p>
                       <a:pPr algn="ctr">
-                        <a:defRPr sz="1100" b="1">
+                        <a:defRPr sz="1000" b="1">
                           <a:solidFill>
                             <a:srgbClr val="FFFFFF"/>
                           </a:solidFill>
@@ -10008,7 +10486,7 @@
                       </a:r>
                     </a:p>
                   </a:txBody>
-                  <a:tcPr>
+                  <a:tcPr marL="73152" marR="73152" marT="45720" marB="45720">
                     <a:solidFill>
                       <a:srgbClr val="801818"/>
                     </a:solidFill>
@@ -10020,7 +10498,7 @@
                     <a:lstStyle/>
                     <a:p>
                       <a:pPr algn="ctr">
-                        <a:defRPr sz="1100" b="1">
+                        <a:defRPr sz="1000" b="1">
                           <a:solidFill>
                             <a:srgbClr val="FFFFFF"/>
                           </a:solidFill>
@@ -10032,7 +10510,7 @@
                       </a:r>
                     </a:p>
                   </a:txBody>
-                  <a:tcPr>
+                  <a:tcPr marL="73152" marR="73152" marT="45720" marB="45720">
                     <a:solidFill>
                       <a:srgbClr val="801818"/>
                     </a:solidFill>
@@ -10044,7 +10522,7 @@
                     <a:lstStyle/>
                     <a:p>
                       <a:pPr algn="ctr">
-                        <a:defRPr sz="1100" b="1">
+                        <a:defRPr sz="1000" b="1">
                           <a:solidFill>
                             <a:srgbClr val="FFFFFF"/>
                           </a:solidFill>
@@ -10056,7 +10534,7 @@
                       </a:r>
                     </a:p>
                   </a:txBody>
-                  <a:tcPr>
+                  <a:tcPr marL="73152" marR="73152" marT="45720" marB="45720">
                     <a:solidFill>
                       <a:srgbClr val="801818"/>
                     </a:solidFill>
@@ -10068,7 +10546,7 @@
                     <a:lstStyle/>
                     <a:p>
                       <a:pPr algn="ctr">
-                        <a:defRPr sz="1100" b="1">
+                        <a:defRPr sz="1000" b="1">
                           <a:solidFill>
                             <a:srgbClr val="FFFFFF"/>
                           </a:solidFill>
@@ -10080,7 +10558,7 @@
                       </a:r>
                     </a:p>
                   </a:txBody>
-                  <a:tcPr>
+                  <a:tcPr marL="73152" marR="73152" marT="45720" marB="45720">
                     <a:solidFill>
                       <a:srgbClr val="801818"/>
                     </a:solidFill>
@@ -10092,7 +10570,7 @@
                     <a:lstStyle/>
                     <a:p>
                       <a:pPr algn="ctr">
-                        <a:defRPr sz="1100" b="1">
+                        <a:defRPr sz="1000" b="1">
                           <a:solidFill>
                             <a:srgbClr val="FFFFFF"/>
                           </a:solidFill>
@@ -10104,21 +10582,21 @@
                       </a:r>
                     </a:p>
                   </a:txBody>
-                  <a:tcPr>
+                  <a:tcPr marL="73152" marR="73152" marT="45720" marB="45720">
                     <a:solidFill>
                       <a:srgbClr val="801818"/>
                     </a:solidFill>
                   </a:tcPr>
                 </a:tc>
               </a:tr>
-              <a:tr h="877824">
+              <a:tr h="896112">
                 <a:tc>
                   <a:txBody>
                     <a:bodyPr/>
                     <a:lstStyle/>
                     <a:p>
                       <a:pPr algn="ctr">
-                        <a:defRPr sz="1000" b="1">
+                        <a:defRPr sz="950" b="1">
                           <a:solidFill>
                             <a:srgbClr val="1E293B"/>
                           </a:solidFill>
@@ -10130,7 +10608,7 @@
                       </a:r>
                     </a:p>
                   </a:txBody>
-                  <a:tcPr>
+                  <a:tcPr marL="73152" marR="73152" marT="45720" marB="45720">
                     <a:solidFill>
                       <a:srgbClr val="FFFFFF"/>
                     </a:solidFill>
@@ -10142,7 +10620,7 @@
                     <a:lstStyle/>
                     <a:p>
                       <a:pPr algn="ctr">
-                        <a:defRPr sz="1000" b="1">
+                        <a:defRPr sz="950" b="1">
                           <a:solidFill>
                             <a:srgbClr val="1E293B"/>
                           </a:solidFill>
@@ -10154,7 +10632,7 @@
                       </a:r>
                     </a:p>
                   </a:txBody>
-                  <a:tcPr>
+                  <a:tcPr marL="73152" marR="73152" marT="45720" marB="45720">
                     <a:solidFill>
                       <a:srgbClr val="FFFFFF"/>
                     </a:solidFill>
@@ -10166,7 +10644,7 @@
                     <a:lstStyle/>
                     <a:p>
                       <a:pPr>
-                        <a:defRPr sz="1000">
+                        <a:defRPr sz="950">
                           <a:solidFill>
                             <a:srgbClr val="1E293B"/>
                           </a:solidFill>
@@ -10178,7 +10656,7 @@
                       </a:r>
                     </a:p>
                   </a:txBody>
-                  <a:tcPr>
+                  <a:tcPr marL="73152" marR="73152" marT="45720" marB="45720">
                     <a:solidFill>
                       <a:srgbClr val="FFFFFF"/>
                     </a:solidFill>
@@ -10190,7 +10668,7 @@
                     <a:lstStyle/>
                     <a:p>
                       <a:pPr>
-                        <a:defRPr sz="1000">
+                        <a:defRPr sz="950">
                           <a:solidFill>
                             <a:srgbClr val="1E293B"/>
                           </a:solidFill>
@@ -10202,7 +10680,7 @@
                       </a:r>
                     </a:p>
                   </a:txBody>
-                  <a:tcPr>
+                  <a:tcPr marL="73152" marR="73152" marT="45720" marB="45720">
                     <a:solidFill>
                       <a:srgbClr val="FFFFFF"/>
                     </a:solidFill>
@@ -10214,7 +10692,7 @@
                     <a:lstStyle/>
                     <a:p>
                       <a:pPr>
-                        <a:defRPr sz="1000">
+                        <a:defRPr sz="950">
                           <a:solidFill>
                             <a:srgbClr val="1E293B"/>
                           </a:solidFill>
@@ -10226,7 +10704,7 @@
                       </a:r>
                     </a:p>
                   </a:txBody>
-                  <a:tcPr>
+                  <a:tcPr marL="73152" marR="73152" marT="45720" marB="45720">
                     <a:solidFill>
                       <a:srgbClr val="FFFFFF"/>
                     </a:solidFill>
@@ -10238,7 +10716,7 @@
                     <a:lstStyle/>
                     <a:p>
                       <a:pPr>
-                        <a:defRPr sz="1000">
+                        <a:defRPr sz="950">
                           <a:solidFill>
                             <a:srgbClr val="1E293B"/>
                           </a:solidFill>
@@ -10250,21 +10728,21 @@
                       </a:r>
                     </a:p>
                   </a:txBody>
-                  <a:tcPr>
+                  <a:tcPr marL="73152" marR="73152" marT="45720" marB="45720">
                     <a:solidFill>
                       <a:srgbClr val="FFFFFF"/>
                     </a:solidFill>
                   </a:tcPr>
                 </a:tc>
               </a:tr>
-              <a:tr h="877824">
+              <a:tr h="896112">
                 <a:tc>
                   <a:txBody>
                     <a:bodyPr/>
                     <a:lstStyle/>
                     <a:p>
                       <a:pPr algn="ctr">
-                        <a:defRPr sz="1000" b="1">
+                        <a:defRPr sz="950" b="1">
                           <a:solidFill>
                             <a:srgbClr val="1E293B"/>
                           </a:solidFill>
@@ -10276,7 +10754,7 @@
                       </a:r>
                     </a:p>
                   </a:txBody>
-                  <a:tcPr>
+                  <a:tcPr marL="73152" marR="73152" marT="45720" marB="45720">
                     <a:solidFill>
                       <a:srgbClr val="F8FAFC"/>
                     </a:solidFill>
@@ -10288,7 +10766,7 @@
                     <a:lstStyle/>
                     <a:p>
                       <a:pPr algn="ctr">
-                        <a:defRPr sz="1000" b="1">
+                        <a:defRPr sz="950" b="1">
                           <a:solidFill>
                             <a:srgbClr val="1E293B"/>
                           </a:solidFill>
@@ -10300,7 +10778,7 @@
                       </a:r>
                     </a:p>
                   </a:txBody>
-                  <a:tcPr>
+                  <a:tcPr marL="73152" marR="73152" marT="45720" marB="45720">
                     <a:solidFill>
                       <a:srgbClr val="F8FAFC"/>
                     </a:solidFill>
@@ -10312,7 +10790,7 @@
                     <a:lstStyle/>
                     <a:p>
                       <a:pPr>
-                        <a:defRPr sz="1000">
+                        <a:defRPr sz="950">
                           <a:solidFill>
                             <a:srgbClr val="1E293B"/>
                           </a:solidFill>
@@ -10324,7 +10802,7 @@
                       </a:r>
                     </a:p>
                   </a:txBody>
-                  <a:tcPr>
+                  <a:tcPr marL="73152" marR="73152" marT="45720" marB="45720">
                     <a:solidFill>
                       <a:srgbClr val="F8FAFC"/>
                     </a:solidFill>
@@ -10336,7 +10814,7 @@
                     <a:lstStyle/>
                     <a:p>
                       <a:pPr>
-                        <a:defRPr sz="1000">
+                        <a:defRPr sz="950">
                           <a:solidFill>
                             <a:srgbClr val="1E293B"/>
                           </a:solidFill>
@@ -10348,7 +10826,7 @@
                       </a:r>
                     </a:p>
                   </a:txBody>
-                  <a:tcPr>
+                  <a:tcPr marL="73152" marR="73152" marT="45720" marB="45720">
                     <a:solidFill>
                       <a:srgbClr val="F8FAFC"/>
                     </a:solidFill>
@@ -10360,7 +10838,7 @@
                     <a:lstStyle/>
                     <a:p>
                       <a:pPr>
-                        <a:defRPr sz="1000">
+                        <a:defRPr sz="950">
                           <a:solidFill>
                             <a:srgbClr val="1E293B"/>
                           </a:solidFill>
@@ -10372,7 +10850,7 @@
                       </a:r>
                     </a:p>
                   </a:txBody>
-                  <a:tcPr>
+                  <a:tcPr marL="73152" marR="73152" marT="45720" marB="45720">
                     <a:solidFill>
                       <a:srgbClr val="F8FAFC"/>
                     </a:solidFill>
@@ -10384,7 +10862,7 @@
                     <a:lstStyle/>
                     <a:p>
                       <a:pPr>
-                        <a:defRPr sz="1000">
+                        <a:defRPr sz="950">
                           <a:solidFill>
                             <a:srgbClr val="1E293B"/>
                           </a:solidFill>
@@ -10396,21 +10874,21 @@
                       </a:r>
                     </a:p>
                   </a:txBody>
-                  <a:tcPr>
+                  <a:tcPr marL="73152" marR="73152" marT="45720" marB="45720">
                     <a:solidFill>
                       <a:srgbClr val="F8FAFC"/>
                     </a:solidFill>
                   </a:tcPr>
                 </a:tc>
               </a:tr>
-              <a:tr h="877824">
+              <a:tr h="896112">
                 <a:tc>
                   <a:txBody>
                     <a:bodyPr/>
                     <a:lstStyle/>
                     <a:p>
                       <a:pPr algn="ctr">
-                        <a:defRPr sz="1000" b="1">
+                        <a:defRPr sz="950" b="1">
                           <a:solidFill>
                             <a:srgbClr val="1E293B"/>
                           </a:solidFill>
@@ -10422,7 +10900,7 @@
                       </a:r>
                     </a:p>
                   </a:txBody>
-                  <a:tcPr>
+                  <a:tcPr marL="73152" marR="73152" marT="45720" marB="45720">
                     <a:solidFill>
                       <a:srgbClr val="FFFFFF"/>
                     </a:solidFill>
@@ -10434,7 +10912,7 @@
                     <a:lstStyle/>
                     <a:p>
                       <a:pPr algn="ctr">
-                        <a:defRPr sz="1000" b="1">
+                        <a:defRPr sz="950" b="1">
                           <a:solidFill>
                             <a:srgbClr val="1E293B"/>
                           </a:solidFill>
@@ -10446,7 +10924,7 @@
                       </a:r>
                     </a:p>
                   </a:txBody>
-                  <a:tcPr>
+                  <a:tcPr marL="73152" marR="73152" marT="45720" marB="45720">
                     <a:solidFill>
                       <a:srgbClr val="FFFFFF"/>
                     </a:solidFill>
@@ -10458,7 +10936,7 @@
                     <a:lstStyle/>
                     <a:p>
                       <a:pPr>
-                        <a:defRPr sz="1000">
+                        <a:defRPr sz="950">
                           <a:solidFill>
                             <a:srgbClr val="1E293B"/>
                           </a:solidFill>
@@ -10470,7 +10948,7 @@
                       </a:r>
                     </a:p>
                   </a:txBody>
-                  <a:tcPr>
+                  <a:tcPr marL="73152" marR="73152" marT="45720" marB="45720">
                     <a:solidFill>
                       <a:srgbClr val="FFFFFF"/>
                     </a:solidFill>
@@ -10482,7 +10960,7 @@
                     <a:lstStyle/>
                     <a:p>
                       <a:pPr>
-                        <a:defRPr sz="1000">
+                        <a:defRPr sz="950">
                           <a:solidFill>
                             <a:srgbClr val="1E293B"/>
                           </a:solidFill>
@@ -10494,7 +10972,7 @@
                       </a:r>
                     </a:p>
                   </a:txBody>
-                  <a:tcPr>
+                  <a:tcPr marL="73152" marR="73152" marT="45720" marB="45720">
                     <a:solidFill>
                       <a:srgbClr val="FFFFFF"/>
                     </a:solidFill>
@@ -10506,7 +10984,7 @@
                     <a:lstStyle/>
                     <a:p>
                       <a:pPr>
-                        <a:defRPr sz="1000">
+                        <a:defRPr sz="950">
                           <a:solidFill>
                             <a:srgbClr val="1E293B"/>
                           </a:solidFill>
@@ -10518,7 +10996,7 @@
                       </a:r>
                     </a:p>
                   </a:txBody>
-                  <a:tcPr>
+                  <a:tcPr marL="73152" marR="73152" marT="45720" marB="45720">
                     <a:solidFill>
                       <a:srgbClr val="FFFFFF"/>
                     </a:solidFill>
@@ -10530,7 +11008,7 @@
                     <a:lstStyle/>
                     <a:p>
                       <a:pPr>
-                        <a:defRPr sz="1000">
+                        <a:defRPr sz="950">
                           <a:solidFill>
                             <a:srgbClr val="1E293B"/>
                           </a:solidFill>
@@ -10542,21 +11020,21 @@
                       </a:r>
                     </a:p>
                   </a:txBody>
-                  <a:tcPr>
+                  <a:tcPr marL="73152" marR="73152" marT="45720" marB="45720">
                     <a:solidFill>
                       <a:srgbClr val="FFFFFF"/>
                     </a:solidFill>
                   </a:tcPr>
                 </a:tc>
               </a:tr>
-              <a:tr h="877824">
+              <a:tr h="896112">
                 <a:tc>
                   <a:txBody>
                     <a:bodyPr/>
                     <a:lstStyle/>
                     <a:p>
                       <a:pPr algn="ctr">
-                        <a:defRPr sz="1000" b="1">
+                        <a:defRPr sz="950" b="1">
                           <a:solidFill>
                             <a:srgbClr val="1E293B"/>
                           </a:solidFill>
@@ -10568,7 +11046,7 @@
                       </a:r>
                     </a:p>
                   </a:txBody>
-                  <a:tcPr>
+                  <a:tcPr marL="73152" marR="73152" marT="45720" marB="45720">
                     <a:solidFill>
                       <a:srgbClr val="F8FAFC"/>
                     </a:solidFill>
@@ -10580,7 +11058,7 @@
                     <a:lstStyle/>
                     <a:p>
                       <a:pPr algn="ctr">
-                        <a:defRPr sz="1000" b="1">
+                        <a:defRPr sz="950" b="1">
                           <a:solidFill>
                             <a:srgbClr val="1E293B"/>
                           </a:solidFill>
@@ -10592,7 +11070,7 @@
                       </a:r>
                     </a:p>
                   </a:txBody>
-                  <a:tcPr>
+                  <a:tcPr marL="73152" marR="73152" marT="45720" marB="45720">
                     <a:solidFill>
                       <a:srgbClr val="F8FAFC"/>
                     </a:solidFill>
@@ -10604,7 +11082,7 @@
                     <a:lstStyle/>
                     <a:p>
                       <a:pPr>
-                        <a:defRPr sz="1000">
+                        <a:defRPr sz="950">
                           <a:solidFill>
                             <a:srgbClr val="1E293B"/>
                           </a:solidFill>
@@ -10616,7 +11094,7 @@
                       </a:r>
                     </a:p>
                   </a:txBody>
-                  <a:tcPr>
+                  <a:tcPr marL="73152" marR="73152" marT="45720" marB="45720">
                     <a:solidFill>
                       <a:srgbClr val="F8FAFC"/>
                     </a:solidFill>
@@ -10628,7 +11106,7 @@
                     <a:lstStyle/>
                     <a:p>
                       <a:pPr>
-                        <a:defRPr sz="1000">
+                        <a:defRPr sz="950">
                           <a:solidFill>
                             <a:srgbClr val="1E293B"/>
                           </a:solidFill>
@@ -10640,7 +11118,7 @@
                       </a:r>
                     </a:p>
                   </a:txBody>
-                  <a:tcPr>
+                  <a:tcPr marL="73152" marR="73152" marT="45720" marB="45720">
                     <a:solidFill>
                       <a:srgbClr val="F8FAFC"/>
                     </a:solidFill>
@@ -10652,7 +11130,7 @@
                     <a:lstStyle/>
                     <a:p>
                       <a:pPr>
-                        <a:defRPr sz="1000">
+                        <a:defRPr sz="950">
                           <a:solidFill>
                             <a:srgbClr val="1E293B"/>
                           </a:solidFill>
@@ -10664,7 +11142,7 @@
                       </a:r>
                     </a:p>
                   </a:txBody>
-                  <a:tcPr>
+                  <a:tcPr marL="73152" marR="73152" marT="45720" marB="45720">
                     <a:solidFill>
                       <a:srgbClr val="F8FAFC"/>
                     </a:solidFill>
@@ -10676,7 +11154,7 @@
                     <a:lstStyle/>
                     <a:p>
                       <a:pPr>
-                        <a:defRPr sz="1000">
+                        <a:defRPr sz="950">
                           <a:solidFill>
                             <a:srgbClr val="1E293B"/>
                           </a:solidFill>
@@ -10688,7 +11166,7 @@
                       </a:r>
                     </a:p>
                   </a:txBody>
-                  <a:tcPr>
+                  <a:tcPr marL="73152" marR="73152" marT="45720" marB="45720">
                     <a:solidFill>
                       <a:srgbClr val="F8FAFC"/>
                     </a:solidFill>
@@ -10725,8 +11203,8 @@
         </p:nvSpPr>
         <p:spPr>
           <a:xfrm>
-            <a:off x="731520" y="1188720"/>
-            <a:ext cx="10728655" cy="36576"/>
+            <a:off x="731520" y="1170432"/>
+            <a:ext cx="10728655" cy="27432"/>
           </a:xfrm>
           <a:prstGeom prst="rect">
             <a:avLst/>
@@ -10770,7 +11248,7 @@
         </p:nvSpPr>
         <p:spPr>
           <a:xfrm>
-            <a:off x="731520" y="411480"/>
+            <a:off x="731520" y="365760"/>
             <a:ext cx="7772400" cy="731520"/>
           </a:xfrm>
           <a:prstGeom prst="rect">
@@ -10785,7 +11263,7 @@
           <a:lstStyle/>
           <a:p>
             <a:pPr>
-              <a:defRPr sz="2800" b="1">
+              <a:defRPr sz="2600" b="1">
                 <a:solidFill>
                   <a:srgbClr val="1E293B"/>
                 </a:solidFill>
@@ -10900,8 +11378,8 @@
         </p:nvSpPr>
         <p:spPr>
           <a:xfrm>
-            <a:off x="731520" y="6309360"/>
-            <a:ext cx="10728655" cy="365760"/>
+            <a:off x="731520" y="6291072"/>
+            <a:ext cx="2743200" cy="274320"/>
           </a:xfrm>
           <a:prstGeom prst="rect">
             <a:avLst/>
@@ -10909,7 +11387,7 @@
           <a:noFill/>
         </p:spPr>
         <p:txBody>
-          <a:bodyPr wrap="square" lIns="0" tIns="0" rIns="0" bIns="0">
+          <a:bodyPr wrap="none" lIns="0" tIns="0" rIns="0" bIns="0">
             <a:spAutoFit/>
           </a:bodyPr>
           <a:lstStyle/>
@@ -10926,9 +11404,32 @@
               <a:t>Academic Year 2025-2026</a:t>
             </a:r>
           </a:p>
+        </p:txBody>
+      </p:sp>
+      <p:sp>
+        <p:nvSpPr>
+          <p:cNvPr id="7" name="TextBox 6"/>
+          <p:cNvSpPr txBox="1"/>
+          <p:nvPr/>
+        </p:nvSpPr>
+        <p:spPr>
+          <a:xfrm>
+            <a:off x="3474720" y="6291072"/>
+            <a:ext cx="5242255" cy="274320"/>
+          </a:xfrm>
+          <a:prstGeom prst="rect">
+            <a:avLst/>
+          </a:prstGeom>
+          <a:noFill/>
+        </p:spPr>
+        <p:txBody>
+          <a:bodyPr wrap="none" lIns="0" tIns="0" rIns="0" bIns="0">
+            <a:spAutoFit/>
+          </a:bodyPr>
+          <a:lstStyle/>
           <a:p>
             <a:pPr algn="ctr">
-              <a:defRPr sz="900" b="1">
+              <a:defRPr sz="850" b="1">
                 <a:solidFill>
                   <a:srgbClr val="801818"/>
                 </a:solidFill>
@@ -10939,6 +11440,29 @@
               <a:t>DEPARTMENT OF COMPUTER ENGINEERING  •  SILVER OAK UNIVERSITY</a:t>
             </a:r>
           </a:p>
+        </p:txBody>
+      </p:sp>
+      <p:sp>
+        <p:nvSpPr>
+          <p:cNvPr id="8" name="TextBox 7"/>
+          <p:cNvSpPr txBox="1"/>
+          <p:nvPr/>
+        </p:nvSpPr>
+        <p:spPr>
+          <a:xfrm>
+            <a:off x="9631375" y="6291072"/>
+            <a:ext cx="1828800" cy="274320"/>
+          </a:xfrm>
+          <a:prstGeom prst="rect">
+            <a:avLst/>
+          </a:prstGeom>
+          <a:noFill/>
+        </p:spPr>
+        <p:txBody>
+          <a:bodyPr wrap="none" lIns="0" tIns="0" rIns="0" bIns="0">
+            <a:spAutoFit/>
+          </a:bodyPr>
+          <a:lstStyle/>
           <a:p>
             <a:pPr algn="r">
               <a:defRPr sz="900">
@@ -10956,14 +11480,14 @@
       </p:sp>
       <p:sp>
         <p:nvSpPr>
-          <p:cNvPr id="7" name="Rounded Rectangle 6"/>
+          <p:cNvPr id="9" name="Rounded Rectangle 8"/>
           <p:cNvSpPr/>
           <p:nvPr/>
         </p:nvSpPr>
         <p:spPr>
           <a:xfrm>
-            <a:off x="731520" y="1463040"/>
-            <a:ext cx="10728655" cy="960120"/>
+            <a:off x="731520" y="1389888"/>
+            <a:ext cx="10728655" cy="1005840"/>
           </a:xfrm>
           <a:prstGeom prst="roundRect">
             <a:avLst/>
@@ -10992,11 +11516,11 @@
           </a:fontRef>
         </p:style>
         <p:txBody>
-          <a:bodyPr rtlCol="0" anchor="ctr" wrap="square" lIns="822960" tIns="109728"/>
+          <a:bodyPr rtlCol="0" anchor="ctr" wrap="square" lIns="731520" rIns="182880" tIns="109728" bIns="73152"/>
           <a:lstStyle/>
           <a:p>
             <a:pPr algn="ctr">
-              <a:defRPr sz="1300" b="1">
+              <a:defRPr sz="1150" b="1">
                 <a:solidFill>
                   <a:srgbClr val="801818"/>
                 </a:solidFill>
@@ -11009,7 +11533,10 @@
           </a:p>
           <a:p>
             <a:pPr>
-              <a:defRPr sz="1100">
+              <a:spcBef>
+                <a:spcPts val="200"/>
+              </a:spcBef>
+              <a:defRPr sz="1000">
                 <a:solidFill>
                   <a:srgbClr val="1E293B"/>
                 </a:solidFill>
@@ -11024,14 +11551,14 @@
       </p:sp>
       <p:sp>
         <p:nvSpPr>
-          <p:cNvPr id="8" name="Oval 7"/>
+          <p:cNvPr id="10" name="Oval 9"/>
           <p:cNvSpPr/>
           <p:nvPr/>
         </p:nvSpPr>
         <p:spPr>
           <a:xfrm>
-            <a:off x="914400" y="1691640"/>
-            <a:ext cx="502920" cy="502920"/>
+            <a:off x="868680" y="1645920"/>
+            <a:ext cx="475488" cy="475488"/>
           </a:xfrm>
           <a:prstGeom prst="ellipse">
             <a:avLst/>
@@ -11062,7 +11589,7 @@
           <a:lstStyle/>
           <a:p>
             <a:pPr algn="ctr">
-              <a:defRPr sz="1100" b="1">
+              <a:defRPr sz="1050" b="1">
                 <a:solidFill>
                   <a:srgbClr val="FFFFFF"/>
                 </a:solidFill>
@@ -11077,14 +11604,14 @@
       </p:sp>
       <p:sp>
         <p:nvSpPr>
-          <p:cNvPr id="9" name="Rounded Rectangle 8"/>
+          <p:cNvPr id="11" name="Rounded Rectangle 10"/>
           <p:cNvSpPr/>
           <p:nvPr/>
         </p:nvSpPr>
         <p:spPr>
           <a:xfrm>
-            <a:off x="731520" y="2606040"/>
-            <a:ext cx="10728655" cy="960120"/>
+            <a:off x="731520" y="2542032"/>
+            <a:ext cx="10728655" cy="1005840"/>
           </a:xfrm>
           <a:prstGeom prst="roundRect">
             <a:avLst/>
@@ -11113,11 +11640,11 @@
           </a:fontRef>
         </p:style>
         <p:txBody>
-          <a:bodyPr rtlCol="0" anchor="ctr" wrap="square" lIns="822960" tIns="109728"/>
+          <a:bodyPr rtlCol="0" anchor="ctr" wrap="square" lIns="731520" rIns="182880" tIns="109728" bIns="73152"/>
           <a:lstStyle/>
           <a:p>
             <a:pPr algn="ctr">
-              <a:defRPr sz="1300" b="1">
+              <a:defRPr sz="1150" b="1">
                 <a:solidFill>
                   <a:srgbClr val="801818"/>
                 </a:solidFill>
@@ -11130,7 +11657,10 @@
           </a:p>
           <a:p>
             <a:pPr>
-              <a:defRPr sz="1100">
+              <a:spcBef>
+                <a:spcPts val="200"/>
+              </a:spcBef>
+              <a:defRPr sz="1000">
                 <a:solidFill>
                   <a:srgbClr val="1E293B"/>
                 </a:solidFill>
@@ -11145,14 +11675,14 @@
       </p:sp>
       <p:sp>
         <p:nvSpPr>
-          <p:cNvPr id="10" name="Oval 9"/>
+          <p:cNvPr id="12" name="Oval 11"/>
           <p:cNvSpPr/>
           <p:nvPr/>
         </p:nvSpPr>
         <p:spPr>
           <a:xfrm>
-            <a:off x="914400" y="2834640"/>
-            <a:ext cx="502920" cy="502920"/>
+            <a:off x="868680" y="2798064"/>
+            <a:ext cx="475488" cy="475488"/>
           </a:xfrm>
           <a:prstGeom prst="ellipse">
             <a:avLst/>
@@ -11183,7 +11713,7 @@
           <a:lstStyle/>
           <a:p>
             <a:pPr algn="ctr">
-              <a:defRPr sz="1100" b="1">
+              <a:defRPr sz="1050" b="1">
                 <a:solidFill>
                   <a:srgbClr val="FFFFFF"/>
                 </a:solidFill>
@@ -11198,14 +11728,14 @@
       </p:sp>
       <p:sp>
         <p:nvSpPr>
-          <p:cNvPr id="11" name="Rounded Rectangle 10"/>
+          <p:cNvPr id="13" name="Rounded Rectangle 12"/>
           <p:cNvSpPr/>
           <p:nvPr/>
         </p:nvSpPr>
         <p:spPr>
           <a:xfrm>
-            <a:off x="731520" y="3749039"/>
-            <a:ext cx="10728655" cy="960120"/>
+            <a:off x="731520" y="3694176"/>
+            <a:ext cx="10728655" cy="1005840"/>
           </a:xfrm>
           <a:prstGeom prst="roundRect">
             <a:avLst/>
@@ -11234,11 +11764,11 @@
           </a:fontRef>
         </p:style>
         <p:txBody>
-          <a:bodyPr rtlCol="0" anchor="ctr" wrap="square" lIns="822960" tIns="109728"/>
+          <a:bodyPr rtlCol="0" anchor="ctr" wrap="square" lIns="731520" rIns="182880" tIns="109728" bIns="73152"/>
           <a:lstStyle/>
           <a:p>
             <a:pPr algn="ctr">
-              <a:defRPr sz="1300" b="1">
+              <a:defRPr sz="1150" b="1">
                 <a:solidFill>
                   <a:srgbClr val="801818"/>
                 </a:solidFill>
@@ -11251,7 +11781,10 @@
           </a:p>
           <a:p>
             <a:pPr>
-              <a:defRPr sz="1100">
+              <a:spcBef>
+                <a:spcPts val="200"/>
+              </a:spcBef>
+              <a:defRPr sz="1000">
                 <a:solidFill>
                   <a:srgbClr val="1E293B"/>
                 </a:solidFill>
@@ -11259,21 +11792,21 @@
               </a:defRPr>
             </a:pPr>
             <a:r>
-              <a:t>Previous literature treats all presentations identically. An investor pitch requires strong traction metrics and market pain, whereas an SMB demo prioritizes immediate ease-of-use and ROI.</a:t>
-            </a:r>
-          </a:p>
-        </p:txBody>
-      </p:sp>
-      <p:sp>
-        <p:nvSpPr>
-          <p:cNvPr id="12" name="Oval 11"/>
+              <a:t>Previous literature treats all presentations identically. An investor pitch requires strong traction metrics, whereas an SMB demo prioritizes immediate ease-of-use and ROI.</a:t>
+            </a:r>
+          </a:p>
+        </p:txBody>
+      </p:sp>
+      <p:sp>
+        <p:nvSpPr>
+          <p:cNvPr id="14" name="Oval 13"/>
           <p:cNvSpPr/>
           <p:nvPr/>
         </p:nvSpPr>
         <p:spPr>
           <a:xfrm>
-            <a:off x="914400" y="3977639"/>
-            <a:ext cx="502920" cy="502920"/>
+            <a:off x="868680" y="3950208"/>
+            <a:ext cx="475488" cy="475488"/>
           </a:xfrm>
           <a:prstGeom prst="ellipse">
             <a:avLst/>
@@ -11304,7 +11837,7 @@
           <a:lstStyle/>
           <a:p>
             <a:pPr algn="ctr">
-              <a:defRPr sz="1100" b="1">
+              <a:defRPr sz="1050" b="1">
                 <a:solidFill>
                   <a:srgbClr val="FFFFFF"/>
                 </a:solidFill>
@@ -11319,14 +11852,14 @@
       </p:sp>
       <p:sp>
         <p:nvSpPr>
-          <p:cNvPr id="13" name="Rounded Rectangle 12"/>
+          <p:cNvPr id="15" name="Rounded Rectangle 14"/>
           <p:cNvSpPr/>
           <p:nvPr/>
         </p:nvSpPr>
         <p:spPr>
           <a:xfrm>
-            <a:off x="731520" y="4892040"/>
-            <a:ext cx="10728655" cy="960120"/>
+            <a:off x="731520" y="4846320"/>
+            <a:ext cx="10728655" cy="1005840"/>
           </a:xfrm>
           <a:prstGeom prst="roundRect">
             <a:avLst/>
@@ -11355,11 +11888,11 @@
           </a:fontRef>
         </p:style>
         <p:txBody>
-          <a:bodyPr rtlCol="0" anchor="ctr" wrap="square" lIns="822960" tIns="109728"/>
+          <a:bodyPr rtlCol="0" anchor="ctr" wrap="square" lIns="731520" rIns="182880" tIns="109728" bIns="73152"/>
           <a:lstStyle/>
           <a:p>
             <a:pPr algn="ctr">
-              <a:defRPr sz="1300" b="1">
+              <a:defRPr sz="1150" b="1">
                 <a:solidFill>
                   <a:srgbClr val="801818"/>
                 </a:solidFill>
@@ -11372,7 +11905,10 @@
           </a:p>
           <a:p>
             <a:pPr>
-              <a:defRPr sz="1100">
+              <a:spcBef>
+                <a:spcPts val="200"/>
+              </a:spcBef>
+              <a:defRPr sz="1000">
                 <a:solidFill>
                   <a:srgbClr val="1E293B"/>
                 </a:solidFill>
@@ -11387,14 +11923,14 @@
       </p:sp>
       <p:sp>
         <p:nvSpPr>
-          <p:cNvPr id="14" name="Oval 13"/>
+          <p:cNvPr id="16" name="Oval 15"/>
           <p:cNvSpPr/>
           <p:nvPr/>
         </p:nvSpPr>
         <p:spPr>
           <a:xfrm>
-            <a:off x="914400" y="5120640"/>
-            <a:ext cx="502920" cy="502920"/>
+            <a:off x="868680" y="5102352"/>
+            <a:ext cx="475488" cy="475488"/>
           </a:xfrm>
           <a:prstGeom prst="ellipse">
             <a:avLst/>
@@ -11425,7 +11961,7 @@
           <a:lstStyle/>
           <a:p>
             <a:pPr algn="ctr">
-              <a:defRPr sz="1100" b="1">
+              <a:defRPr sz="1050" b="1">
                 <a:solidFill>
                   <a:srgbClr val="FFFFFF"/>
                 </a:solidFill>
@@ -11464,8 +12000,8 @@
         </p:nvSpPr>
         <p:spPr>
           <a:xfrm>
-            <a:off x="731520" y="1188720"/>
-            <a:ext cx="10728655" cy="36576"/>
+            <a:off x="731520" y="1170432"/>
+            <a:ext cx="10728655" cy="27432"/>
           </a:xfrm>
           <a:prstGeom prst="rect">
             <a:avLst/>
@@ -11509,7 +12045,7 @@
         </p:nvSpPr>
         <p:spPr>
           <a:xfrm>
-            <a:off x="731520" y="411480"/>
+            <a:off x="731520" y="365760"/>
             <a:ext cx="7772400" cy="731520"/>
           </a:xfrm>
           <a:prstGeom prst="rect">
@@ -11524,7 +12060,7 @@
           <a:lstStyle/>
           <a:p>
             <a:pPr>
-              <a:defRPr sz="2800" b="1">
+              <a:defRPr sz="2600" b="1">
                 <a:solidFill>
                   <a:srgbClr val="1E293B"/>
                 </a:solidFill>
@@ -11639,8 +12175,8 @@
         </p:nvSpPr>
         <p:spPr>
           <a:xfrm>
-            <a:off x="731520" y="6309360"/>
-            <a:ext cx="10728655" cy="365760"/>
+            <a:off x="731520" y="6291072"/>
+            <a:ext cx="2743200" cy="274320"/>
           </a:xfrm>
           <a:prstGeom prst="rect">
             <a:avLst/>
@@ -11648,7 +12184,7 @@
           <a:noFill/>
         </p:spPr>
         <p:txBody>
-          <a:bodyPr wrap="square" lIns="0" tIns="0" rIns="0" bIns="0">
+          <a:bodyPr wrap="none" lIns="0" tIns="0" rIns="0" bIns="0">
             <a:spAutoFit/>
           </a:bodyPr>
           <a:lstStyle/>
@@ -11665,9 +12201,32 @@
               <a:t>Academic Year 2025-2026</a:t>
             </a:r>
           </a:p>
+        </p:txBody>
+      </p:sp>
+      <p:sp>
+        <p:nvSpPr>
+          <p:cNvPr id="7" name="TextBox 6"/>
+          <p:cNvSpPr txBox="1"/>
+          <p:nvPr/>
+        </p:nvSpPr>
+        <p:spPr>
+          <a:xfrm>
+            <a:off x="3474720" y="6291072"/>
+            <a:ext cx="5242255" cy="274320"/>
+          </a:xfrm>
+          <a:prstGeom prst="rect">
+            <a:avLst/>
+          </a:prstGeom>
+          <a:noFill/>
+        </p:spPr>
+        <p:txBody>
+          <a:bodyPr wrap="none" lIns="0" tIns="0" rIns="0" bIns="0">
+            <a:spAutoFit/>
+          </a:bodyPr>
+          <a:lstStyle/>
           <a:p>
             <a:pPr algn="ctr">
-              <a:defRPr sz="900" b="1">
+              <a:defRPr sz="850" b="1">
                 <a:solidFill>
                   <a:srgbClr val="801818"/>
                 </a:solidFill>
@@ -11678,6 +12237,29 @@
               <a:t>DEPARTMENT OF COMPUTER ENGINEERING  •  SILVER OAK UNIVERSITY</a:t>
             </a:r>
           </a:p>
+        </p:txBody>
+      </p:sp>
+      <p:sp>
+        <p:nvSpPr>
+          <p:cNvPr id="8" name="TextBox 7"/>
+          <p:cNvSpPr txBox="1"/>
+          <p:nvPr/>
+        </p:nvSpPr>
+        <p:spPr>
+          <a:xfrm>
+            <a:off x="9631375" y="6291072"/>
+            <a:ext cx="1828800" cy="274320"/>
+          </a:xfrm>
+          <a:prstGeom prst="rect">
+            <a:avLst/>
+          </a:prstGeom>
+          <a:noFill/>
+        </p:spPr>
+        <p:txBody>
+          <a:bodyPr wrap="none" lIns="0" tIns="0" rIns="0" bIns="0">
+            <a:spAutoFit/>
+          </a:bodyPr>
+          <a:lstStyle/>
           <a:p>
             <a:pPr algn="r">
               <a:defRPr sz="900">
@@ -11695,14 +12277,14 @@
       </p:sp>
       <p:sp>
         <p:nvSpPr>
-          <p:cNvPr id="7" name="Rounded Rectangle 6"/>
+          <p:cNvPr id="9" name="Rounded Rectangle 8"/>
           <p:cNvSpPr/>
           <p:nvPr/>
         </p:nvSpPr>
         <p:spPr>
           <a:xfrm>
-            <a:off x="731520" y="1463040"/>
-            <a:ext cx="10728655" cy="777240"/>
+            <a:off x="731520" y="1389888"/>
+            <a:ext cx="10728655" cy="822960"/>
           </a:xfrm>
           <a:prstGeom prst="roundRect">
             <a:avLst/>
@@ -11731,11 +12313,11 @@
           </a:fontRef>
         </p:style>
         <p:txBody>
-          <a:bodyPr rtlCol="0" anchor="ctr" wrap="square" lIns="274320" tIns="109728"/>
+          <a:bodyPr rtlCol="0" anchor="ctr" wrap="square" lIns="228600" rIns="182880" tIns="73152" bIns="73152"/>
           <a:lstStyle/>
           <a:p>
             <a:pPr algn="ctr">
-              <a:defRPr sz="1300" b="1">
+              <a:defRPr sz="1100" b="1">
                 <a:solidFill>
                   <a:srgbClr val="166534"/>
                 </a:solidFill>
@@ -11758,14 +12340,14 @@
       </p:sp>
       <p:sp>
         <p:nvSpPr>
-          <p:cNvPr id="8" name="Rounded Rectangle 7"/>
+          <p:cNvPr id="10" name="Rounded Rectangle 9"/>
           <p:cNvSpPr/>
           <p:nvPr/>
         </p:nvSpPr>
         <p:spPr>
           <a:xfrm>
-            <a:off x="731520" y="2359152"/>
-            <a:ext cx="10728655" cy="777240"/>
+            <a:off x="731520" y="2304288"/>
+            <a:ext cx="10728655" cy="822960"/>
           </a:xfrm>
           <a:prstGeom prst="roundRect">
             <a:avLst/>
@@ -11794,11 +12376,11 @@
           </a:fontRef>
         </p:style>
         <p:txBody>
-          <a:bodyPr rtlCol="0" anchor="ctr" wrap="square" lIns="274320" tIns="109728"/>
+          <a:bodyPr rtlCol="0" anchor="ctr" wrap="square" lIns="228600" rIns="182880" tIns="73152" bIns="73152"/>
           <a:lstStyle/>
           <a:p>
             <a:pPr algn="ctr">
-              <a:defRPr sz="1300" b="1">
+              <a:defRPr sz="1100" b="1">
                 <a:solidFill>
                   <a:srgbClr val="801818"/>
                 </a:solidFill>
@@ -11821,14 +12403,14 @@
       </p:sp>
       <p:sp>
         <p:nvSpPr>
-          <p:cNvPr id="9" name="Rounded Rectangle 8"/>
+          <p:cNvPr id="11" name="Rounded Rectangle 10"/>
           <p:cNvSpPr/>
           <p:nvPr/>
         </p:nvSpPr>
         <p:spPr>
           <a:xfrm>
-            <a:off x="731520" y="3255264"/>
-            <a:ext cx="10728655" cy="777240"/>
+            <a:off x="731520" y="3218688"/>
+            <a:ext cx="10728655" cy="822960"/>
           </a:xfrm>
           <a:prstGeom prst="roundRect">
             <a:avLst/>
@@ -11857,11 +12439,11 @@
           </a:fontRef>
         </p:style>
         <p:txBody>
-          <a:bodyPr rtlCol="0" anchor="ctr" wrap="square" lIns="274320" tIns="109728"/>
+          <a:bodyPr rtlCol="0" anchor="ctr" wrap="square" lIns="228600" rIns="182880" tIns="73152" bIns="73152"/>
           <a:lstStyle/>
           <a:p>
             <a:pPr algn="ctr">
-              <a:defRPr sz="1300" b="1">
+              <a:defRPr sz="1100" b="1">
                 <a:solidFill>
                   <a:srgbClr val="801818"/>
                 </a:solidFill>
@@ -11884,14 +12466,14 @@
       </p:sp>
       <p:sp>
         <p:nvSpPr>
-          <p:cNvPr id="10" name="Rounded Rectangle 9"/>
+          <p:cNvPr id="12" name="Rounded Rectangle 11"/>
           <p:cNvSpPr/>
           <p:nvPr/>
         </p:nvSpPr>
         <p:spPr>
           <a:xfrm>
-            <a:off x="731520" y="4151376"/>
-            <a:ext cx="10728655" cy="777240"/>
+            <a:off x="731520" y="4133087"/>
+            <a:ext cx="10728655" cy="822960"/>
           </a:xfrm>
           <a:prstGeom prst="roundRect">
             <a:avLst/>
@@ -11920,11 +12502,11 @@
           </a:fontRef>
         </p:style>
         <p:txBody>
-          <a:bodyPr rtlCol="0" anchor="ctr" wrap="square" lIns="274320" tIns="109728"/>
+          <a:bodyPr rtlCol="0" anchor="ctr" wrap="square" lIns="228600" rIns="182880" tIns="73152" bIns="73152"/>
           <a:lstStyle/>
           <a:p>
             <a:pPr algn="ctr">
-              <a:defRPr sz="1300" b="1">
+              <a:defRPr sz="1100" b="1">
                 <a:solidFill>
                   <a:srgbClr val="801818"/>
                 </a:solidFill>
@@ -11947,14 +12529,14 @@
       </p:sp>
       <p:sp>
         <p:nvSpPr>
-          <p:cNvPr id="11" name="Rounded Rectangle 10"/>
+          <p:cNvPr id="13" name="Rounded Rectangle 12"/>
           <p:cNvSpPr/>
           <p:nvPr/>
         </p:nvSpPr>
         <p:spPr>
           <a:xfrm>
             <a:off x="731520" y="5047488"/>
-            <a:ext cx="10728655" cy="777240"/>
+            <a:ext cx="10728655" cy="822960"/>
           </a:xfrm>
           <a:prstGeom prst="roundRect">
             <a:avLst/>
@@ -11983,11 +12565,11 @@
           </a:fontRef>
         </p:style>
         <p:txBody>
-          <a:bodyPr rtlCol="0" anchor="ctr" wrap="square" lIns="274320" tIns="109728"/>
+          <a:bodyPr rtlCol="0" anchor="ctr" wrap="square" lIns="228600" rIns="182880" tIns="73152" bIns="73152"/>
           <a:lstStyle/>
           <a:p>
             <a:pPr algn="ctr">
-              <a:defRPr sz="1300" b="1">
+              <a:defRPr sz="1100" b="1">
                 <a:solidFill>
                   <a:srgbClr val="801818"/>
                 </a:solidFill>
@@ -12034,8 +12616,8 @@
         </p:nvSpPr>
         <p:spPr>
           <a:xfrm>
-            <a:off x="731520" y="1188720"/>
-            <a:ext cx="10728655" cy="36576"/>
+            <a:off x="731520" y="1170432"/>
+            <a:ext cx="10728655" cy="27432"/>
           </a:xfrm>
           <a:prstGeom prst="rect">
             <a:avLst/>
@@ -12079,7 +12661,7 @@
         </p:nvSpPr>
         <p:spPr>
           <a:xfrm>
-            <a:off x="731520" y="411480"/>
+            <a:off x="731520" y="365760"/>
             <a:ext cx="7772400" cy="731520"/>
           </a:xfrm>
           <a:prstGeom prst="rect">
@@ -12094,7 +12676,7 @@
           <a:lstStyle/>
           <a:p>
             <a:pPr>
-              <a:defRPr sz="2800" b="1">
+              <a:defRPr sz="2600" b="1">
                 <a:solidFill>
                   <a:srgbClr val="1E293B"/>
                 </a:solidFill>
@@ -12209,8 +12791,8 @@
         </p:nvSpPr>
         <p:spPr>
           <a:xfrm>
-            <a:off x="731520" y="6309360"/>
-            <a:ext cx="10728655" cy="365760"/>
+            <a:off x="731520" y="6291072"/>
+            <a:ext cx="2743200" cy="274320"/>
           </a:xfrm>
           <a:prstGeom prst="rect">
             <a:avLst/>
@@ -12218,7 +12800,7 @@
           <a:noFill/>
         </p:spPr>
         <p:txBody>
-          <a:bodyPr wrap="square" lIns="0" tIns="0" rIns="0" bIns="0">
+          <a:bodyPr wrap="none" lIns="0" tIns="0" rIns="0" bIns="0">
             <a:spAutoFit/>
           </a:bodyPr>
           <a:lstStyle/>
@@ -12235,9 +12817,32 @@
               <a:t>Academic Year 2025-2026</a:t>
             </a:r>
           </a:p>
+        </p:txBody>
+      </p:sp>
+      <p:sp>
+        <p:nvSpPr>
+          <p:cNvPr id="7" name="TextBox 6"/>
+          <p:cNvSpPr txBox="1"/>
+          <p:nvPr/>
+        </p:nvSpPr>
+        <p:spPr>
+          <a:xfrm>
+            <a:off x="3474720" y="6291072"/>
+            <a:ext cx="5242255" cy="274320"/>
+          </a:xfrm>
+          <a:prstGeom prst="rect">
+            <a:avLst/>
+          </a:prstGeom>
+          <a:noFill/>
+        </p:spPr>
+        <p:txBody>
+          <a:bodyPr wrap="none" lIns="0" tIns="0" rIns="0" bIns="0">
+            <a:spAutoFit/>
+          </a:bodyPr>
+          <a:lstStyle/>
           <a:p>
             <a:pPr algn="ctr">
-              <a:defRPr sz="900" b="1">
+              <a:defRPr sz="850" b="1">
                 <a:solidFill>
                   <a:srgbClr val="801818"/>
                 </a:solidFill>
@@ -12248,6 +12853,29 @@
               <a:t>DEPARTMENT OF COMPUTER ENGINEERING  •  SILVER OAK UNIVERSITY</a:t>
             </a:r>
           </a:p>
+        </p:txBody>
+      </p:sp>
+      <p:sp>
+        <p:nvSpPr>
+          <p:cNvPr id="8" name="TextBox 7"/>
+          <p:cNvSpPr txBox="1"/>
+          <p:nvPr/>
+        </p:nvSpPr>
+        <p:spPr>
+          <a:xfrm>
+            <a:off x="9631375" y="6291072"/>
+            <a:ext cx="1828800" cy="274320"/>
+          </a:xfrm>
+          <a:prstGeom prst="rect">
+            <a:avLst/>
+          </a:prstGeom>
+          <a:noFill/>
+        </p:spPr>
+        <p:txBody>
+          <a:bodyPr wrap="none" lIns="0" tIns="0" rIns="0" bIns="0">
+            <a:spAutoFit/>
+          </a:bodyPr>
+          <a:lstStyle/>
           <a:p>
             <a:pPr algn="r">
               <a:defRPr sz="900">
@@ -12265,14 +12893,14 @@
       </p:sp>
       <p:sp>
         <p:nvSpPr>
-          <p:cNvPr id="7" name="Rounded Rectangle 6"/>
+          <p:cNvPr id="9" name="Rounded Rectangle 8"/>
           <p:cNvSpPr/>
           <p:nvPr/>
         </p:nvSpPr>
         <p:spPr>
           <a:xfrm>
-            <a:off x="731520" y="1463040"/>
-            <a:ext cx="3429000" cy="4480560"/>
+            <a:off x="731520" y="1389888"/>
+            <a:ext cx="3456432" cy="4572000"/>
           </a:xfrm>
           <a:prstGeom prst="roundRect">
             <a:avLst/>
@@ -12301,11 +12929,11 @@
           </a:fontRef>
         </p:style>
         <p:txBody>
-          <a:bodyPr rtlCol="0" anchor="ctr" wrap="square" lIns="182880" rIns="182880" tIns="182880"/>
+          <a:bodyPr rtlCol="0" anchor="ctr" wrap="square" lIns="164592" rIns="164592" tIns="164592" bIns="137160"/>
           <a:lstStyle/>
           <a:p>
             <a:pPr algn="ctr">
-              <a:defRPr sz="1500" b="1">
+              <a:defRPr sz="1400" b="1">
                 <a:solidFill>
                   <a:srgbClr val="1E40AF"/>
                 </a:solidFill>
@@ -12319,9 +12947,9 @@
           <a:p>
             <a:pPr>
               <a:spcBef>
-                <a:spcPts val="800"/>
+                <a:spcPts val="600"/>
               </a:spcBef>
-              <a:defRPr sz="1100">
+              <a:defRPr sz="980">
                 <a:solidFill>
                   <a:srgbClr val="1E293B"/>
                 </a:solidFill>
@@ -12335,9 +12963,9 @@
           <a:p>
             <a:pPr>
               <a:spcBef>
-                <a:spcPts val="800"/>
+                <a:spcPts val="600"/>
               </a:spcBef>
-              <a:defRPr sz="1100">
+              <a:defRPr sz="980">
                 <a:solidFill>
                   <a:srgbClr val="1E293B"/>
                 </a:solidFill>
@@ -12351,9 +12979,9 @@
           <a:p>
             <a:pPr>
               <a:spcBef>
-                <a:spcPts val="800"/>
+                <a:spcPts val="600"/>
               </a:spcBef>
-              <a:defRPr sz="1100">
+              <a:defRPr sz="980">
                 <a:solidFill>
                   <a:srgbClr val="1E293B"/>
                 </a:solidFill>
@@ -12367,9 +12995,9 @@
           <a:p>
             <a:pPr>
               <a:spcBef>
-                <a:spcPts val="800"/>
+                <a:spcPts val="600"/>
               </a:spcBef>
-              <a:defRPr sz="1100">
+              <a:defRPr sz="980">
                 <a:solidFill>
                   <a:srgbClr val="1E293B"/>
                 </a:solidFill>
@@ -12384,14 +13012,14 @@
       </p:sp>
       <p:sp>
         <p:nvSpPr>
-          <p:cNvPr id="8" name="Rounded Rectangle 7"/>
+          <p:cNvPr id="10" name="Rounded Rectangle 9"/>
           <p:cNvSpPr/>
           <p:nvPr/>
         </p:nvSpPr>
         <p:spPr>
           <a:xfrm>
-            <a:off x="4370832" y="1463040"/>
-            <a:ext cx="3429000" cy="4480560"/>
+            <a:off x="4370832" y="1389888"/>
+            <a:ext cx="3456432" cy="4572000"/>
           </a:xfrm>
           <a:prstGeom prst="roundRect">
             <a:avLst/>
@@ -12420,11 +13048,11 @@
           </a:fontRef>
         </p:style>
         <p:txBody>
-          <a:bodyPr rtlCol="0" anchor="ctr" wrap="square" lIns="182880" rIns="182880" tIns="182880"/>
+          <a:bodyPr rtlCol="0" anchor="ctr" wrap="square" lIns="164592" rIns="164592" tIns="164592" bIns="137160"/>
           <a:lstStyle/>
           <a:p>
             <a:pPr algn="ctr">
-              <a:defRPr sz="1500" b="1">
+              <a:defRPr sz="1400" b="1">
                 <a:solidFill>
                   <a:srgbClr val="D97706"/>
                 </a:solidFill>
@@ -12438,9 +13066,9 @@
           <a:p>
             <a:pPr>
               <a:spcBef>
-                <a:spcPts val="800"/>
+                <a:spcPts val="600"/>
               </a:spcBef>
-              <a:defRPr sz="1100">
+              <a:defRPr sz="980">
                 <a:solidFill>
                   <a:srgbClr val="1E293B"/>
                 </a:solidFill>
@@ -12454,9 +13082,9 @@
           <a:p>
             <a:pPr>
               <a:spcBef>
-                <a:spcPts val="800"/>
+                <a:spcPts val="600"/>
               </a:spcBef>
-              <a:defRPr sz="1100">
+              <a:defRPr sz="980">
                 <a:solidFill>
                   <a:srgbClr val="1E293B"/>
                 </a:solidFill>
@@ -12470,9 +13098,9 @@
           <a:p>
             <a:pPr>
               <a:spcBef>
-                <a:spcPts val="800"/>
+                <a:spcPts val="600"/>
               </a:spcBef>
-              <a:defRPr sz="1100">
+              <a:defRPr sz="980">
                 <a:solidFill>
                   <a:srgbClr val="1E293B"/>
                 </a:solidFill>
@@ -12486,9 +13114,9 @@
           <a:p>
             <a:pPr>
               <a:spcBef>
-                <a:spcPts val="800"/>
+                <a:spcPts val="600"/>
               </a:spcBef>
-              <a:defRPr sz="1100">
+              <a:defRPr sz="980">
                 <a:solidFill>
                   <a:srgbClr val="1E293B"/>
                 </a:solidFill>
@@ -12503,14 +13131,14 @@
       </p:sp>
       <p:sp>
         <p:nvSpPr>
-          <p:cNvPr id="9" name="Rounded Rectangle 8"/>
+          <p:cNvPr id="11" name="Rounded Rectangle 10"/>
           <p:cNvSpPr/>
           <p:nvPr/>
         </p:nvSpPr>
         <p:spPr>
           <a:xfrm>
-            <a:off x="8010144" y="1463040"/>
-            <a:ext cx="3429000" cy="4480560"/>
+            <a:off x="8010144" y="1389888"/>
+            <a:ext cx="3456432" cy="4572000"/>
           </a:xfrm>
           <a:prstGeom prst="roundRect">
             <a:avLst/>
@@ -12539,11 +13167,11 @@
           </a:fontRef>
         </p:style>
         <p:txBody>
-          <a:bodyPr rtlCol="0" anchor="ctr" wrap="square" lIns="182880" rIns="182880" tIns="182880"/>
+          <a:bodyPr rtlCol="0" anchor="ctr" wrap="square" lIns="164592" rIns="164592" tIns="164592" bIns="137160"/>
           <a:lstStyle/>
           <a:p>
             <a:pPr algn="ctr">
-              <a:defRPr sz="1500" b="1">
+              <a:defRPr sz="1400" b="1">
                 <a:solidFill>
                   <a:srgbClr val="166534"/>
                 </a:solidFill>
@@ -12557,9 +13185,9 @@
           <a:p>
             <a:pPr>
               <a:spcBef>
-                <a:spcPts val="800"/>
+                <a:spcPts val="600"/>
               </a:spcBef>
-              <a:defRPr sz="1100">
+              <a:defRPr sz="980">
                 <a:solidFill>
                   <a:srgbClr val="1E293B"/>
                 </a:solidFill>
@@ -12573,9 +13201,9 @@
           <a:p>
             <a:pPr>
               <a:spcBef>
-                <a:spcPts val="800"/>
+                <a:spcPts val="600"/>
               </a:spcBef>
-              <a:defRPr sz="1100">
+              <a:defRPr sz="980">
                 <a:solidFill>
                   <a:srgbClr val="1E293B"/>
                 </a:solidFill>
@@ -12589,9 +13217,9 @@
           <a:p>
             <a:pPr>
               <a:spcBef>
-                <a:spcPts val="800"/>
+                <a:spcPts val="600"/>
               </a:spcBef>
-              <a:defRPr sz="1100">
+              <a:defRPr sz="980">
                 <a:solidFill>
                   <a:srgbClr val="1E293B"/>
                 </a:solidFill>

--- a/PitchIQ_SilverOak_Presentation.pptx
+++ b/PitchIQ_SilverOak_Presentation.pptx
@@ -7271,7 +7271,7 @@
               </a:defRPr>
             </a:pPr>
             <a:r>
-              <a:t>Dark-Glassmorphic Aesthetic: Ambient emerald and amber glows (#00FF87, #FFB800) with backdrop blur panels.</a:t>
+              <a:t>Executive Minimalist Palette: Professional two-color design system (Deep Slate #0B0F19 &amp; Executive Blue #2563EB) with clean Inter typography.</a:t>
             </a:r>
           </a:p>
           <a:p>
